--- a/poc/1_MeetingMinutes/0626-slide-v6.pptx
+++ b/poc/1_MeetingMinutes/0626-slide-v6.pptx
@@ -5,25 +5,25 @@
     <p:sldMasterId id="2147483648" r:id="rId1"/>
   </p:sldMasterIdLst>
   <p:sldIdLst>
-    <p:sldId id="256" r:id="rId7"/>
-    <p:sldId id="257" r:id="rId8"/>
-    <p:sldId id="258" r:id="rId9"/>
-    <p:sldId id="259" r:id="rId10"/>
-    <p:sldId id="260" r:id="rId11"/>
-    <p:sldId id="261" r:id="rId12"/>
-    <p:sldId id="262" r:id="rId13"/>
-    <p:sldId id="263" r:id="rId14"/>
-    <p:sldId id="264" r:id="rId15"/>
-    <p:sldId id="265" r:id="rId16"/>
-    <p:sldId id="266" r:id="rId17"/>
-    <p:sldId id="267" r:id="rId18"/>
-    <p:sldId id="268" r:id="rId19"/>
-    <p:sldId id="269" r:id="rId20"/>
-    <p:sldId id="270" r:id="rId21"/>
-    <p:sldId id="271" r:id="rId22"/>
-    <p:sldId id="272" r:id="rId23"/>
+    <p:sldId id="256" r:id="rId2"/>
+    <p:sldId id="257" r:id="rId3"/>
+    <p:sldId id="258" r:id="rId4"/>
+    <p:sldId id="259" r:id="rId5"/>
+    <p:sldId id="260" r:id="rId6"/>
+    <p:sldId id="261" r:id="rId7"/>
+    <p:sldId id="262" r:id="rId8"/>
+    <p:sldId id="263" r:id="rId9"/>
+    <p:sldId id="264" r:id="rId10"/>
+    <p:sldId id="265" r:id="rId11"/>
+    <p:sldId id="266" r:id="rId12"/>
+    <p:sldId id="267" r:id="rId13"/>
+    <p:sldId id="268" r:id="rId14"/>
+    <p:sldId id="269" r:id="rId15"/>
+    <p:sldId id="270" r:id="rId16"/>
+    <p:sldId id="271" r:id="rId17"/>
+    <p:sldId id="272" r:id="rId18"/>
   </p:sldIdLst>
-  <p:sldSz cx="12191695" cy="6858000" type="screen4x3"/>
+  <p:sldSz cx="12192000" cy="6858000"/>
   <p:notesSz cx="6858000" cy="9144000"/>
   <p:defaultTextStyle>
     <a:defPPr>
@@ -120,6 +120,22 @@
       </a:defRPr>
     </a:lvl9pPr>
   </p:defaultTextStyle>
+  <p:extLst>
+    <p:ext uri="{EFAFB233-063F-42B5-8137-9DF3F51BA10A}">
+      <p15:sldGuideLst xmlns:p15="http://schemas.microsoft.com/office/powerpoint/2012/main">
+        <p15:guide id="1" orient="horz" pos="2160">
+          <p15:clr>
+            <a:srgbClr val="A4A3A4"/>
+          </p15:clr>
+        </p15:guide>
+        <p15:guide id="2" pos="2880">
+          <p15:clr>
+            <a:srgbClr val="A4A3A4"/>
+          </p15:clr>
+        </p15:guide>
+      </p15:sldGuideLst>
+    </p:ext>
+  </p:extLst>
 </p:presentation>
 </file>
 
@@ -161,10 +177,9 @@
           <a:lstStyle/>
           <a:p>
             <a:r>
-              <a:rPr lang="en-US" smtClean="0"/>
+              <a:rPr lang="en-US"/>
               <a:t>Click to edit Master title style</a:t>
             </a:r>
-            <a:endParaRPr lang="en-US"/>
           </a:p>
         </p:txBody>
       </p:sp>
@@ -280,10 +295,9 @@
           </a:lstStyle>
           <a:p>
             <a:r>
-              <a:rPr lang="en-US" smtClean="0"/>
+              <a:rPr lang="en-US"/>
               <a:t>Click to edit Master subtitle style</a:t>
             </a:r>
-            <a:endParaRPr lang="en-US"/>
           </a:p>
         </p:txBody>
       </p:sp>
@@ -304,7 +318,7 @@
           <a:p>
             <a:fld id="{5BCAD085-E8A6-8845-BD4E-CB4CCA059FC4}" type="datetimeFigureOut">
               <a:rPr lang="en-US" smtClean="0"/>
-              <a:t>1/27/13</a:t>
+              <a:t>6/26/26</a:t>
             </a:fld>
             <a:endParaRPr lang="en-US"/>
           </a:p>
@@ -398,10 +412,9 @@
           <a:lstStyle/>
           <a:p>
             <a:r>
-              <a:rPr lang="en-US" smtClean="0"/>
+              <a:rPr lang="en-US"/>
               <a:t>Click to edit Master title style</a:t>
             </a:r>
-            <a:endParaRPr lang="en-US"/>
           </a:p>
         </p:txBody>
       </p:sp>
@@ -422,38 +435,37 @@
           <a:p>
             <a:pPr lvl="0"/>
             <a:r>
-              <a:rPr lang="en-US" smtClean="0"/>
+              <a:rPr lang="en-US"/>
               <a:t>Click to edit Master text styles</a:t>
             </a:r>
           </a:p>
           <a:p>
             <a:pPr lvl="1"/>
             <a:r>
-              <a:rPr lang="en-US" smtClean="0"/>
+              <a:rPr lang="en-US"/>
               <a:t>Second level</a:t>
             </a:r>
           </a:p>
           <a:p>
             <a:pPr lvl="2"/>
             <a:r>
-              <a:rPr lang="en-US" smtClean="0"/>
+              <a:rPr lang="en-US"/>
               <a:t>Third level</a:t>
             </a:r>
           </a:p>
           <a:p>
             <a:pPr lvl="3"/>
             <a:r>
-              <a:rPr lang="en-US" smtClean="0"/>
+              <a:rPr lang="en-US"/>
               <a:t>Fourth level</a:t>
             </a:r>
           </a:p>
           <a:p>
             <a:pPr lvl="4"/>
             <a:r>
-              <a:rPr lang="en-US" smtClean="0"/>
+              <a:rPr lang="en-US"/>
               <a:t>Fifth level</a:t>
             </a:r>
-            <a:endParaRPr lang="en-US"/>
           </a:p>
         </p:txBody>
       </p:sp>
@@ -474,7 +486,7 @@
           <a:p>
             <a:fld id="{5BCAD085-E8A6-8845-BD4E-CB4CCA059FC4}" type="datetimeFigureOut">
               <a:rPr lang="en-US" smtClean="0"/>
-              <a:t>1/27/13</a:t>
+              <a:t>6/26/26</a:t>
             </a:fld>
             <a:endParaRPr lang="en-US"/>
           </a:p>
@@ -573,10 +585,9 @@
           <a:lstStyle/>
           <a:p>
             <a:r>
-              <a:rPr lang="en-US" smtClean="0"/>
+              <a:rPr lang="en-US"/>
               <a:t>Click to edit Master title style</a:t>
             </a:r>
-            <a:endParaRPr lang="en-US"/>
           </a:p>
         </p:txBody>
       </p:sp>
@@ -602,38 +613,37 @@
           <a:p>
             <a:pPr lvl="0"/>
             <a:r>
-              <a:rPr lang="en-US" smtClean="0"/>
+              <a:rPr lang="en-US"/>
               <a:t>Click to edit Master text styles</a:t>
             </a:r>
           </a:p>
           <a:p>
             <a:pPr lvl="1"/>
             <a:r>
-              <a:rPr lang="en-US" smtClean="0"/>
+              <a:rPr lang="en-US"/>
               <a:t>Second level</a:t>
             </a:r>
           </a:p>
           <a:p>
             <a:pPr lvl="2"/>
             <a:r>
-              <a:rPr lang="en-US" smtClean="0"/>
+              <a:rPr lang="en-US"/>
               <a:t>Third level</a:t>
             </a:r>
           </a:p>
           <a:p>
             <a:pPr lvl="3"/>
             <a:r>
-              <a:rPr lang="en-US" smtClean="0"/>
+              <a:rPr lang="en-US"/>
               <a:t>Fourth level</a:t>
             </a:r>
           </a:p>
           <a:p>
             <a:pPr lvl="4"/>
             <a:r>
-              <a:rPr lang="en-US" smtClean="0"/>
+              <a:rPr lang="en-US"/>
               <a:t>Fifth level</a:t>
             </a:r>
-            <a:endParaRPr lang="en-US"/>
           </a:p>
         </p:txBody>
       </p:sp>
@@ -654,7 +664,7 @@
           <a:p>
             <a:fld id="{5BCAD085-E8A6-8845-BD4E-CB4CCA059FC4}" type="datetimeFigureOut">
               <a:rPr lang="en-US" smtClean="0"/>
-              <a:t>1/27/13</a:t>
+              <a:t>6/26/26</a:t>
             </a:fld>
             <a:endParaRPr lang="en-US"/>
           </a:p>
@@ -748,10 +758,9 @@
           <a:lstStyle/>
           <a:p>
             <a:r>
-              <a:rPr lang="en-US" smtClean="0"/>
+              <a:rPr lang="en-US"/>
               <a:t>Click to edit Master title style</a:t>
             </a:r>
-            <a:endParaRPr lang="en-US"/>
           </a:p>
         </p:txBody>
       </p:sp>
@@ -772,38 +781,37 @@
           <a:p>
             <a:pPr lvl="0"/>
             <a:r>
-              <a:rPr lang="en-US" smtClean="0"/>
+              <a:rPr lang="en-US"/>
               <a:t>Click to edit Master text styles</a:t>
             </a:r>
           </a:p>
           <a:p>
             <a:pPr lvl="1"/>
             <a:r>
-              <a:rPr lang="en-US" smtClean="0"/>
+              <a:rPr lang="en-US"/>
               <a:t>Second level</a:t>
             </a:r>
           </a:p>
           <a:p>
             <a:pPr lvl="2"/>
             <a:r>
-              <a:rPr lang="en-US" smtClean="0"/>
+              <a:rPr lang="en-US"/>
               <a:t>Third level</a:t>
             </a:r>
           </a:p>
           <a:p>
             <a:pPr lvl="3"/>
             <a:r>
-              <a:rPr lang="en-US" smtClean="0"/>
+              <a:rPr lang="en-US"/>
               <a:t>Fourth level</a:t>
             </a:r>
           </a:p>
           <a:p>
             <a:pPr lvl="4"/>
             <a:r>
-              <a:rPr lang="en-US" smtClean="0"/>
+              <a:rPr lang="en-US"/>
               <a:t>Fifth level</a:t>
             </a:r>
-            <a:endParaRPr lang="en-US"/>
           </a:p>
         </p:txBody>
       </p:sp>
@@ -824,7 +832,7 @@
           <a:p>
             <a:fld id="{5BCAD085-E8A6-8845-BD4E-CB4CCA059FC4}" type="datetimeFigureOut">
               <a:rPr lang="en-US" smtClean="0"/>
-              <a:t>1/27/13</a:t>
+              <a:t>6/26/26</a:t>
             </a:fld>
             <a:endParaRPr lang="en-US"/>
           </a:p>
@@ -927,10 +935,9 @@
           </a:lstStyle>
           <a:p>
             <a:r>
-              <a:rPr lang="en-US" smtClean="0"/>
+              <a:rPr lang="en-US"/>
               <a:t>Click to edit Master title style</a:t>
             </a:r>
-            <a:endParaRPr lang="en-US"/>
           </a:p>
         </p:txBody>
       </p:sp>
@@ -1047,7 +1054,7 @@
           <a:p>
             <a:pPr lvl="0"/>
             <a:r>
-              <a:rPr lang="en-US" smtClean="0"/>
+              <a:rPr lang="en-US"/>
               <a:t>Click to edit Master text styles</a:t>
             </a:r>
           </a:p>
@@ -1070,7 +1077,7 @@
           <a:p>
             <a:fld id="{5BCAD085-E8A6-8845-BD4E-CB4CCA059FC4}" type="datetimeFigureOut">
               <a:rPr lang="en-US" smtClean="0"/>
-              <a:t>1/27/13</a:t>
+              <a:t>6/26/26</a:t>
             </a:fld>
             <a:endParaRPr lang="en-US"/>
           </a:p>
@@ -1164,10 +1171,9 @@
           <a:lstStyle/>
           <a:p>
             <a:r>
-              <a:rPr lang="en-US" smtClean="0"/>
+              <a:rPr lang="en-US"/>
               <a:t>Click to edit Master title style</a:t>
             </a:r>
-            <a:endParaRPr lang="en-US"/>
           </a:p>
         </p:txBody>
       </p:sp>
@@ -1221,38 +1227,37 @@
           <a:p>
             <a:pPr lvl="0"/>
             <a:r>
-              <a:rPr lang="en-US" smtClean="0"/>
+              <a:rPr lang="en-US"/>
               <a:t>Click to edit Master text styles</a:t>
             </a:r>
           </a:p>
           <a:p>
             <a:pPr lvl="1"/>
             <a:r>
-              <a:rPr lang="en-US" smtClean="0"/>
+              <a:rPr lang="en-US"/>
               <a:t>Second level</a:t>
             </a:r>
           </a:p>
           <a:p>
             <a:pPr lvl="2"/>
             <a:r>
-              <a:rPr lang="en-US" smtClean="0"/>
+              <a:rPr lang="en-US"/>
               <a:t>Third level</a:t>
             </a:r>
           </a:p>
           <a:p>
             <a:pPr lvl="3"/>
             <a:r>
-              <a:rPr lang="en-US" smtClean="0"/>
+              <a:rPr lang="en-US"/>
               <a:t>Fourth level</a:t>
             </a:r>
           </a:p>
           <a:p>
             <a:pPr lvl="4"/>
             <a:r>
-              <a:rPr lang="en-US" smtClean="0"/>
+              <a:rPr lang="en-US"/>
               <a:t>Fifth level</a:t>
             </a:r>
-            <a:endParaRPr lang="en-US"/>
           </a:p>
         </p:txBody>
       </p:sp>
@@ -1306,38 +1311,37 @@
           <a:p>
             <a:pPr lvl="0"/>
             <a:r>
-              <a:rPr lang="en-US" smtClean="0"/>
+              <a:rPr lang="en-US"/>
               <a:t>Click to edit Master text styles</a:t>
             </a:r>
           </a:p>
           <a:p>
             <a:pPr lvl="1"/>
             <a:r>
-              <a:rPr lang="en-US" smtClean="0"/>
+              <a:rPr lang="en-US"/>
               <a:t>Second level</a:t>
             </a:r>
           </a:p>
           <a:p>
             <a:pPr lvl="2"/>
             <a:r>
-              <a:rPr lang="en-US" smtClean="0"/>
+              <a:rPr lang="en-US"/>
               <a:t>Third level</a:t>
             </a:r>
           </a:p>
           <a:p>
             <a:pPr lvl="3"/>
             <a:r>
-              <a:rPr lang="en-US" smtClean="0"/>
+              <a:rPr lang="en-US"/>
               <a:t>Fourth level</a:t>
             </a:r>
           </a:p>
           <a:p>
             <a:pPr lvl="4"/>
             <a:r>
-              <a:rPr lang="en-US" smtClean="0"/>
+              <a:rPr lang="en-US"/>
               <a:t>Fifth level</a:t>
             </a:r>
-            <a:endParaRPr lang="en-US"/>
           </a:p>
         </p:txBody>
       </p:sp>
@@ -1358,7 +1362,7 @@
           <a:p>
             <a:fld id="{5BCAD085-E8A6-8845-BD4E-CB4CCA059FC4}" type="datetimeFigureOut">
               <a:rPr lang="en-US" smtClean="0"/>
-              <a:t>1/27/13</a:t>
+              <a:t>6/26/26</a:t>
             </a:fld>
             <a:endParaRPr lang="en-US"/>
           </a:p>
@@ -1456,10 +1460,9 @@
           </a:lstStyle>
           <a:p>
             <a:r>
-              <a:rPr lang="en-US" smtClean="0"/>
+              <a:rPr lang="en-US"/>
               <a:t>Click to edit Master title style</a:t>
             </a:r>
-            <a:endParaRPr lang="en-US"/>
           </a:p>
         </p:txBody>
       </p:sp>
@@ -1522,7 +1525,7 @@
           <a:p>
             <a:pPr lvl="0"/>
             <a:r>
-              <a:rPr lang="en-US" smtClean="0"/>
+              <a:rPr lang="en-US"/>
               <a:t>Click to edit Master text styles</a:t>
             </a:r>
           </a:p>
@@ -1578,38 +1581,37 @@
           <a:p>
             <a:pPr lvl="0"/>
             <a:r>
-              <a:rPr lang="en-US" smtClean="0"/>
+              <a:rPr lang="en-US"/>
               <a:t>Click to edit Master text styles</a:t>
             </a:r>
           </a:p>
           <a:p>
             <a:pPr lvl="1"/>
             <a:r>
-              <a:rPr lang="en-US" smtClean="0"/>
+              <a:rPr lang="en-US"/>
               <a:t>Second level</a:t>
             </a:r>
           </a:p>
           <a:p>
             <a:pPr lvl="2"/>
             <a:r>
-              <a:rPr lang="en-US" smtClean="0"/>
+              <a:rPr lang="en-US"/>
               <a:t>Third level</a:t>
             </a:r>
           </a:p>
           <a:p>
             <a:pPr lvl="3"/>
             <a:r>
-              <a:rPr lang="en-US" smtClean="0"/>
+              <a:rPr lang="en-US"/>
               <a:t>Fourth level</a:t>
             </a:r>
           </a:p>
           <a:p>
             <a:pPr lvl="4"/>
             <a:r>
-              <a:rPr lang="en-US" smtClean="0"/>
+              <a:rPr lang="en-US"/>
               <a:t>Fifth level</a:t>
             </a:r>
-            <a:endParaRPr lang="en-US"/>
           </a:p>
         </p:txBody>
       </p:sp>
@@ -1672,7 +1674,7 @@
           <a:p>
             <a:pPr lvl="0"/>
             <a:r>
-              <a:rPr lang="en-US" smtClean="0"/>
+              <a:rPr lang="en-US"/>
               <a:t>Click to edit Master text styles</a:t>
             </a:r>
           </a:p>
@@ -1728,38 +1730,37 @@
           <a:p>
             <a:pPr lvl="0"/>
             <a:r>
-              <a:rPr lang="en-US" smtClean="0"/>
+              <a:rPr lang="en-US"/>
               <a:t>Click to edit Master text styles</a:t>
             </a:r>
           </a:p>
           <a:p>
             <a:pPr lvl="1"/>
             <a:r>
-              <a:rPr lang="en-US" smtClean="0"/>
+              <a:rPr lang="en-US"/>
               <a:t>Second level</a:t>
             </a:r>
           </a:p>
           <a:p>
             <a:pPr lvl="2"/>
             <a:r>
-              <a:rPr lang="en-US" smtClean="0"/>
+              <a:rPr lang="en-US"/>
               <a:t>Third level</a:t>
             </a:r>
           </a:p>
           <a:p>
             <a:pPr lvl="3"/>
             <a:r>
-              <a:rPr lang="en-US" smtClean="0"/>
+              <a:rPr lang="en-US"/>
               <a:t>Fourth level</a:t>
             </a:r>
           </a:p>
           <a:p>
             <a:pPr lvl="4"/>
             <a:r>
-              <a:rPr lang="en-US" smtClean="0"/>
+              <a:rPr lang="en-US"/>
               <a:t>Fifth level</a:t>
             </a:r>
-            <a:endParaRPr lang="en-US"/>
           </a:p>
         </p:txBody>
       </p:sp>
@@ -1780,7 +1781,7 @@
           <a:p>
             <a:fld id="{5BCAD085-E8A6-8845-BD4E-CB4CCA059FC4}" type="datetimeFigureOut">
               <a:rPr lang="en-US" smtClean="0"/>
-              <a:t>1/27/13</a:t>
+              <a:t>6/26/26</a:t>
             </a:fld>
             <a:endParaRPr lang="en-US"/>
           </a:p>
@@ -1874,10 +1875,9 @@
           <a:lstStyle/>
           <a:p>
             <a:r>
-              <a:rPr lang="en-US" smtClean="0"/>
+              <a:rPr lang="en-US"/>
               <a:t>Click to edit Master title style</a:t>
             </a:r>
-            <a:endParaRPr lang="en-US"/>
           </a:p>
         </p:txBody>
       </p:sp>
@@ -1898,7 +1898,7 @@
           <a:p>
             <a:fld id="{5BCAD085-E8A6-8845-BD4E-CB4CCA059FC4}" type="datetimeFigureOut">
               <a:rPr lang="en-US" smtClean="0"/>
-              <a:t>1/27/13</a:t>
+              <a:t>6/26/26</a:t>
             </a:fld>
             <a:endParaRPr lang="en-US"/>
           </a:p>
@@ -1993,7 +1993,7 @@
           <a:p>
             <a:fld id="{5BCAD085-E8A6-8845-BD4E-CB4CCA059FC4}" type="datetimeFigureOut">
               <a:rPr lang="en-US" smtClean="0"/>
-              <a:t>1/27/13</a:t>
+              <a:t>6/26/26</a:t>
             </a:fld>
             <a:endParaRPr lang="en-US"/>
           </a:p>
@@ -2096,10 +2096,9 @@
           </a:lstStyle>
           <a:p>
             <a:r>
-              <a:rPr lang="en-US" smtClean="0"/>
+              <a:rPr lang="en-US"/>
               <a:t>Click to edit Master title style</a:t>
             </a:r>
-            <a:endParaRPr lang="en-US"/>
           </a:p>
         </p:txBody>
       </p:sp>
@@ -2153,38 +2152,37 @@
           <a:p>
             <a:pPr lvl="0"/>
             <a:r>
-              <a:rPr lang="en-US" smtClean="0"/>
+              <a:rPr lang="en-US"/>
               <a:t>Click to edit Master text styles</a:t>
             </a:r>
           </a:p>
           <a:p>
             <a:pPr lvl="1"/>
             <a:r>
-              <a:rPr lang="en-US" smtClean="0"/>
+              <a:rPr lang="en-US"/>
               <a:t>Second level</a:t>
             </a:r>
           </a:p>
           <a:p>
             <a:pPr lvl="2"/>
             <a:r>
-              <a:rPr lang="en-US" smtClean="0"/>
+              <a:rPr lang="en-US"/>
               <a:t>Third level</a:t>
             </a:r>
           </a:p>
           <a:p>
             <a:pPr lvl="3"/>
             <a:r>
-              <a:rPr lang="en-US" smtClean="0"/>
+              <a:rPr lang="en-US"/>
               <a:t>Fourth level</a:t>
             </a:r>
           </a:p>
           <a:p>
             <a:pPr lvl="4"/>
             <a:r>
-              <a:rPr lang="en-US" smtClean="0"/>
+              <a:rPr lang="en-US"/>
               <a:t>Fifth level</a:t>
             </a:r>
-            <a:endParaRPr lang="en-US"/>
           </a:p>
         </p:txBody>
       </p:sp>
@@ -2247,7 +2245,7 @@
           <a:p>
             <a:pPr lvl="0"/>
             <a:r>
-              <a:rPr lang="en-US" smtClean="0"/>
+              <a:rPr lang="en-US"/>
               <a:t>Click to edit Master text styles</a:t>
             </a:r>
           </a:p>
@@ -2270,7 +2268,7 @@
           <a:p>
             <a:fld id="{5BCAD085-E8A6-8845-BD4E-CB4CCA059FC4}" type="datetimeFigureOut">
               <a:rPr lang="en-US" smtClean="0"/>
-              <a:t>1/27/13</a:t>
+              <a:t>6/26/26</a:t>
             </a:fld>
             <a:endParaRPr lang="en-US"/>
           </a:p>
@@ -2373,10 +2371,9 @@
           </a:lstStyle>
           <a:p>
             <a:r>
-              <a:rPr lang="en-US" smtClean="0"/>
+              <a:rPr lang="en-US"/>
               <a:t>Click to edit Master title style</a:t>
             </a:r>
-            <a:endParaRPr lang="en-US"/>
           </a:p>
         </p:txBody>
       </p:sp>
@@ -2500,7 +2497,7 @@
           <a:p>
             <a:pPr lvl="0"/>
             <a:r>
-              <a:rPr lang="en-US" smtClean="0"/>
+              <a:rPr lang="en-US"/>
               <a:t>Click to edit Master text styles</a:t>
             </a:r>
           </a:p>
@@ -2523,7 +2520,7 @@
           <a:p>
             <a:fld id="{5BCAD085-E8A6-8845-BD4E-CB4CCA059FC4}" type="datetimeFigureOut">
               <a:rPr lang="en-US" smtClean="0"/>
-              <a:t>1/27/13</a:t>
+              <a:t>6/26/26</a:t>
             </a:fld>
             <a:endParaRPr lang="en-US"/>
           </a:p>
@@ -2632,10 +2629,9 @@
           <a:lstStyle/>
           <a:p>
             <a:r>
-              <a:rPr lang="en-US" smtClean="0"/>
+              <a:rPr lang="en-US"/>
               <a:t>Click to edit Master title style</a:t>
             </a:r>
-            <a:endParaRPr lang="en-US"/>
           </a:p>
         </p:txBody>
       </p:sp>
@@ -2666,38 +2662,37 @@
           <a:p>
             <a:pPr lvl="0"/>
             <a:r>
-              <a:rPr lang="en-US" smtClean="0"/>
+              <a:rPr lang="en-US"/>
               <a:t>Click to edit Master text styles</a:t>
             </a:r>
           </a:p>
           <a:p>
             <a:pPr lvl="1"/>
             <a:r>
-              <a:rPr lang="en-US" smtClean="0"/>
+              <a:rPr lang="en-US"/>
               <a:t>Second level</a:t>
             </a:r>
           </a:p>
           <a:p>
             <a:pPr lvl="2"/>
             <a:r>
-              <a:rPr lang="en-US" smtClean="0"/>
+              <a:rPr lang="en-US"/>
               <a:t>Third level</a:t>
             </a:r>
           </a:p>
           <a:p>
             <a:pPr lvl="3"/>
             <a:r>
-              <a:rPr lang="en-US" smtClean="0"/>
+              <a:rPr lang="en-US"/>
               <a:t>Fourth level</a:t>
             </a:r>
           </a:p>
           <a:p>
             <a:pPr lvl="4"/>
             <a:r>
-              <a:rPr lang="en-US" smtClean="0"/>
+              <a:rPr lang="en-US"/>
               <a:t>Fifth level</a:t>
             </a:r>
-            <a:endParaRPr lang="en-US"/>
           </a:p>
         </p:txBody>
       </p:sp>
@@ -2736,7 +2731,7 @@
           <a:p>
             <a:fld id="{5BCAD085-E8A6-8845-BD4E-CB4CCA059FC4}" type="datetimeFigureOut">
               <a:rPr lang="en-US" smtClean="0"/>
-              <a:t>1/27/13</a:t>
+              <a:t>6/26/26</a:t>
             </a:fld>
             <a:endParaRPr lang="en-US"/>
           </a:p>
@@ -3095,7 +3090,7 @@
 </file>
 
 <file path=ppt/slides/slide1.xml><?xml version="1.0" encoding="utf-8"?>
-<p:sld xmlns:a="http://schemas.openxmlformats.org/drawingml/2006/main" xmlns:p="http://schemas.openxmlformats.org/presentationml/2006/main" xmlns:r="http://schemas.openxmlformats.org/officeDocument/2006/relationships">
+<p:sld xmlns:a="http://schemas.openxmlformats.org/drawingml/2006/main" xmlns:r="http://schemas.openxmlformats.org/officeDocument/2006/relationships" xmlns:p="http://schemas.openxmlformats.org/presentationml/2006/main">
   <p:cSld>
     <p:bg>
       <p:bgPr>
@@ -3111,7 +3106,14 @@
         <p:cNvGrpSpPr/>
         <p:nvPr/>
       </p:nvGrpSpPr>
-      <p:grpSpPr/>
+      <p:grpSpPr>
+        <a:xfrm>
+          <a:off x="0" y="0"/>
+          <a:ext cx="0" cy="0"/>
+          <a:chOff x="0" y="0"/>
+          <a:chExt cx="0" cy="0"/>
+        </a:xfrm>
+      </p:grpSpPr>
       <p:sp>
         <p:nvSpPr>
           <p:cNvPr id="2" name="Rectangle 1"/>
@@ -3153,6 +3155,7 @@
           <a:lstStyle/>
           <a:p>
             <a:pPr algn="ctr"/>
+            <a:endParaRPr/>
           </a:p>
         </p:txBody>
       </p:sp>
@@ -3173,7 +3176,7 @@
           <a:noFill/>
         </p:spPr>
         <p:txBody>
-          <a:bodyPr wrap="square" lIns="0" rIns="0" tIns="0" bIns="0" anchor="t">
+          <a:bodyPr wrap="square" lIns="0" tIns="0" rIns="0" bIns="0" anchor="t">
             <a:spAutoFit/>
           </a:bodyPr>
           <a:lstStyle/>
@@ -3208,7 +3211,7 @@
           <a:noFill/>
         </p:spPr>
         <p:txBody>
-          <a:bodyPr wrap="square" lIns="0" rIns="0" tIns="0" bIns="0" anchor="t">
+          <a:bodyPr wrap="square" lIns="0" tIns="0" rIns="0" bIns="0" anchor="t">
             <a:spAutoFit/>
           </a:bodyPr>
           <a:lstStyle/>
@@ -3243,7 +3246,7 @@
           <a:noFill/>
         </p:spPr>
         <p:txBody>
-          <a:bodyPr wrap="square" lIns="0" rIns="0" tIns="0" bIns="0" anchor="t">
+          <a:bodyPr wrap="square" lIns="0" tIns="0" rIns="0" bIns="0" anchor="t">
             <a:spAutoFit/>
           </a:bodyPr>
           <a:lstStyle/>
@@ -3302,6 +3305,7 @@
           <a:lstStyle/>
           <a:p>
             <a:pPr algn="ctr"/>
+            <a:endParaRPr/>
           </a:p>
         </p:txBody>
       </p:sp>
@@ -3322,7 +3326,7 @@
           <a:noFill/>
         </p:spPr>
         <p:txBody>
-          <a:bodyPr wrap="square" lIns="0" rIns="0" tIns="0" bIns="0" anchor="t">
+          <a:bodyPr wrap="square" lIns="0" tIns="0" rIns="0" bIns="0" anchor="t">
             <a:spAutoFit/>
           </a:bodyPr>
           <a:lstStyle/>
@@ -3357,7 +3361,7 @@
           <a:noFill/>
         </p:spPr>
         <p:txBody>
-          <a:bodyPr wrap="square" lIns="0" rIns="0" tIns="0" bIns="0" anchor="t">
+          <a:bodyPr wrap="square" lIns="0" tIns="0" rIns="0" bIns="0" anchor="t">
             <a:spAutoFit/>
           </a:bodyPr>
           <a:lstStyle/>
@@ -3384,7 +3388,7 @@
 </file>
 
 <file path=ppt/slides/slide10.xml><?xml version="1.0" encoding="utf-8"?>
-<p:sld xmlns:a="http://schemas.openxmlformats.org/drawingml/2006/main" xmlns:p="http://schemas.openxmlformats.org/presentationml/2006/main" xmlns:r="http://schemas.openxmlformats.org/officeDocument/2006/relationships">
+<p:sld xmlns:a="http://schemas.openxmlformats.org/drawingml/2006/main" xmlns:r="http://schemas.openxmlformats.org/officeDocument/2006/relationships" xmlns:p="http://schemas.openxmlformats.org/presentationml/2006/main">
   <p:cSld>
     <p:bg>
       <p:bgPr>
@@ -3400,7 +3404,14 @@
         <p:cNvGrpSpPr/>
         <p:nvPr/>
       </p:nvGrpSpPr>
-      <p:grpSpPr/>
+      <p:grpSpPr>
+        <a:xfrm>
+          <a:off x="0" y="0"/>
+          <a:ext cx="0" cy="0"/>
+          <a:chOff x="0" y="0"/>
+          <a:chExt cx="0" cy="0"/>
+        </a:xfrm>
+      </p:grpSpPr>
       <p:sp>
         <p:nvSpPr>
           <p:cNvPr id="2" name="Rectangle 1"/>
@@ -3442,6 +3453,7 @@
           <a:lstStyle/>
           <a:p>
             <a:pPr algn="ctr"/>
+            <a:endParaRPr/>
           </a:p>
         </p:txBody>
       </p:sp>
@@ -3462,7 +3474,7 @@
           <a:noFill/>
         </p:spPr>
         <p:txBody>
-          <a:bodyPr wrap="square" lIns="0" rIns="0" tIns="0" bIns="0" anchor="t">
+          <a:bodyPr wrap="square" lIns="0" tIns="0" rIns="0" bIns="0" anchor="t">
             <a:spAutoFit/>
           </a:bodyPr>
           <a:lstStyle/>
@@ -3497,7 +3509,7 @@
           <a:noFill/>
         </p:spPr>
         <p:txBody>
-          <a:bodyPr wrap="square" lIns="0" rIns="0" tIns="0" bIns="0" anchor="t">
+          <a:bodyPr wrap="square" lIns="0" tIns="0" rIns="0" bIns="0" anchor="t">
             <a:spAutoFit/>
           </a:bodyPr>
           <a:lstStyle/>
@@ -3532,7 +3544,7 @@
           <a:noFill/>
         </p:spPr>
         <p:txBody>
-          <a:bodyPr wrap="square" lIns="0" rIns="0" tIns="0" bIns="0" anchor="t">
+          <a:bodyPr wrap="square" lIns="0" tIns="0" rIns="0" bIns="0" anchor="t">
             <a:spAutoFit/>
           </a:bodyPr>
           <a:lstStyle/>
@@ -3567,21 +3579,81 @@
           <a:noFill/>
         </p:spPr>
         <p:txBody>
-          <a:bodyPr wrap="square" lIns="0" rIns="0" tIns="0" bIns="0" anchor="t">
+          <a:bodyPr wrap="square" lIns="0" tIns="0" rIns="0" bIns="0" anchor="t">
             <a:spAutoFit/>
           </a:bodyPr>
           <a:lstStyle/>
           <a:p>
             <a:pPr algn="l"/>
             <a:r>
-              <a:rPr sz="3000" b="1">
+              <a:rPr sz="3000" b="1" dirty="0">
                 <a:solidFill>
                   <a:srgbClr val="FFFFFF"/>
                 </a:solidFill>
                 <a:latin typeface="PingFang TC"/>
               </a:rPr>
-              <a:t>Commit 路徑 × 跨區延遲稅 × 一致性</a:t>
-            </a:r>
+              <a:t>Commit 路徑 × 跨區延遲開銷 × 一致性</a:t>
+            </a:r>
+            <a:r>
+              <a:rPr sz="3000" b="1" dirty="0" err="1">
+                <a:solidFill>
+                  <a:srgbClr val="FFFFFF"/>
+                </a:solidFill>
+                <a:latin typeface="PingFang TC"/>
+              </a:rPr>
+              <a:t/>
+            </a:r>
+            <a:r>
+              <a:rPr sz="3000" b="1" dirty="0">
+                <a:solidFill>
+                  <a:srgbClr val="FFFFFF"/>
+                </a:solidFill>
+                <a:latin typeface="PingFang TC"/>
+              </a:rPr>
+              <a:t/>
+            </a:r>
+            <a:r>
+              <a:rPr sz="3000" b="1" dirty="0" err="1">
+                <a:solidFill>
+                  <a:srgbClr val="FFFFFF"/>
+                </a:solidFill>
+                <a:latin typeface="PingFang TC"/>
+              </a:rPr>
+              <a:t/>
+            </a:r>
+            <a:r>
+              <a:rPr lang="zh-TW" altLang="en-US" sz="3000" b="1" dirty="0">
+                <a:solidFill>
+                  <a:srgbClr val="FFFFFF"/>
+                </a:solidFill>
+                <a:latin typeface="PingFang TC"/>
+              </a:rPr>
+              <a:t/>
+            </a:r>
+            <a:r>
+              <a:rPr sz="3000" b="1" dirty="0">
+                <a:solidFill>
+                  <a:srgbClr val="FFFFFF"/>
+                </a:solidFill>
+                <a:latin typeface="PingFang TC"/>
+              </a:rPr>
+              <a:t/>
+            </a:r>
+            <a:r>
+              <a:rPr sz="3000" b="1" dirty="0" err="1">
+                <a:solidFill>
+                  <a:srgbClr val="FFFFFF"/>
+                </a:solidFill>
+                <a:latin typeface="PingFang TC"/>
+              </a:rPr>
+              <a:t/>
+            </a:r>
+            <a:endParaRPr sz="3000" b="1" dirty="0">
+              <a:solidFill>
+                <a:srgbClr val="FFFFFF"/>
+              </a:solidFill>
+              <a:latin typeface="PingFang TC"/>
+            </a:endParaRPr>
           </a:p>
         </p:txBody>
       </p:sp>
@@ -3626,6 +3698,7 @@
           <a:lstStyle/>
           <a:p>
             <a:pPr algn="ctr"/>
+            <a:endParaRPr/>
           </a:p>
         </p:txBody>
       </p:sp>
@@ -3670,6 +3743,7 @@
           <a:lstStyle/>
           <a:p>
             <a:pPr algn="ctr"/>
+            <a:endParaRPr/>
           </a:p>
         </p:txBody>
       </p:sp>
@@ -3690,7 +3764,7 @@
           <a:noFill/>
         </p:spPr>
         <p:txBody>
-          <a:bodyPr wrap="square" lIns="0" rIns="0" tIns="0" bIns="0" anchor="ctr">
+          <a:bodyPr wrap="square" lIns="0" tIns="0" rIns="0" bIns="0" anchor="ctr">
             <a:spAutoFit/>
           </a:bodyPr>
           <a:lstStyle/>
@@ -3703,7 +3777,7 @@
                 </a:solidFill>
                 <a:latin typeface="PingFang TC"/>
               </a:rPr>
-              <a:t>分散式 DB 跨區後，延遲稅集中在 commit 路徑上「必跨 WAN 的節點」且設計機制不同</a:t>
+              <a:t>分散式 DB 跨區後，延遲開銷集中在 commit 路徑上「必跨 WAN 的節點」且設計機制不同</a:t>
             </a:r>
           </a:p>
         </p:txBody>
@@ -3751,6 +3825,7 @@
           <a:lstStyle/>
           <a:p>
             <a:pPr algn="ctr"/>
+            <a:endParaRPr/>
           </a:p>
         </p:txBody>
       </p:sp>
@@ -3771,7 +3846,7 @@
           <a:noFill/>
         </p:spPr>
         <p:txBody>
-          <a:bodyPr wrap="square" lIns="0" rIns="0" tIns="0" bIns="0" anchor="t">
+          <a:bodyPr wrap="square" lIns="0" tIns="0" rIns="0" bIns="0" anchor="t">
             <a:spAutoFit/>
           </a:bodyPr>
           <a:lstStyle/>
@@ -3806,7 +3881,7 @@
           <a:noFill/>
         </p:spPr>
         <p:txBody>
-          <a:bodyPr wrap="square" lIns="0" rIns="0" tIns="0" bIns="0" anchor="t">
+          <a:bodyPr wrap="square" lIns="0" tIns="0" rIns="0" bIns="0" anchor="t">
             <a:spAutoFit/>
           </a:bodyPr>
           <a:lstStyle/>
@@ -3841,7 +3916,7 @@
           <a:noFill/>
         </p:spPr>
         <p:txBody>
-          <a:bodyPr wrap="square" lIns="0" rIns="0" tIns="0" bIns="0" anchor="t">
+          <a:bodyPr wrap="square" lIns="0" tIns="0" rIns="0" bIns="0" anchor="t">
             <a:spAutoFit/>
           </a:bodyPr>
           <a:lstStyle/>
@@ -3888,7 +3963,7 @@
           <a:noFill/>
         </p:spPr>
         <p:txBody>
-          <a:bodyPr wrap="square" lIns="0" rIns="0" tIns="0" bIns="0" anchor="t">
+          <a:bodyPr wrap="square" lIns="0" tIns="0" rIns="0" bIns="0" anchor="t">
             <a:spAutoFit/>
           </a:bodyPr>
           <a:lstStyle/>
@@ -3923,7 +3998,7 @@
           <a:noFill/>
         </p:spPr>
         <p:txBody>
-          <a:bodyPr wrap="square" lIns="0" rIns="0" tIns="0" bIns="0" anchor="t">
+          <a:bodyPr wrap="square" lIns="0" tIns="0" rIns="0" bIns="0" anchor="t">
             <a:spAutoFit/>
           </a:bodyPr>
           <a:lstStyle/>
@@ -3970,7 +4045,7 @@
           <a:noFill/>
         </p:spPr>
         <p:txBody>
-          <a:bodyPr wrap="square" lIns="0" rIns="0" tIns="0" bIns="0" anchor="t">
+          <a:bodyPr wrap="square" lIns="0" tIns="0" rIns="0" bIns="0" anchor="t">
             <a:spAutoFit/>
           </a:bodyPr>
           <a:lstStyle/>
@@ -3983,7 +4058,7 @@
                 </a:solidFill>
                 <a:latin typeface="PingFang TC"/>
               </a:rPr>
-              <a:t>延遲稅集中：</a:t>
+              <a:t>延遲開銷集中：</a:t>
             </a:r>
           </a:p>
         </p:txBody>
@@ -4005,7 +4080,7 @@
           <a:noFill/>
         </p:spPr>
         <p:txBody>
-          <a:bodyPr wrap="square" lIns="0" rIns="0" tIns="0" bIns="0" anchor="t">
+          <a:bodyPr wrap="square" lIns="0" tIns="0" rIns="0" bIns="0" anchor="t">
             <a:spAutoFit/>
           </a:bodyPr>
           <a:lstStyle/>
@@ -4066,6 +4141,7 @@
           <a:lstStyle/>
           <a:p>
             <a:pPr algn="ctr"/>
+            <a:endParaRPr/>
           </a:p>
         </p:txBody>
       </p:sp>
@@ -4086,7 +4162,7 @@
           <a:noFill/>
         </p:spPr>
         <p:txBody>
-          <a:bodyPr wrap="square" lIns="0" rIns="0" tIns="0" bIns="0" anchor="t">
+          <a:bodyPr wrap="square" lIns="0" tIns="0" rIns="0" bIns="0" anchor="t">
             <a:spAutoFit/>
           </a:bodyPr>
           <a:lstStyle/>
@@ -4121,7 +4197,7 @@
           <a:noFill/>
         </p:spPr>
         <p:txBody>
-          <a:bodyPr wrap="square" lIns="0" rIns="0" tIns="0" bIns="0" anchor="t">
+          <a:bodyPr wrap="square" lIns="0" tIns="0" rIns="0" bIns="0" anchor="t">
             <a:spAutoFit/>
           </a:bodyPr>
           <a:lstStyle/>
@@ -4156,7 +4232,7 @@
           <a:noFill/>
         </p:spPr>
         <p:txBody>
-          <a:bodyPr wrap="square" lIns="0" rIns="0" tIns="0" bIns="0" anchor="t">
+          <a:bodyPr wrap="square" lIns="0" tIns="0" rIns="0" bIns="0" anchor="t">
             <a:spAutoFit/>
           </a:bodyPr>
           <a:lstStyle/>
@@ -4203,7 +4279,7 @@
           <a:noFill/>
         </p:spPr>
         <p:txBody>
-          <a:bodyPr wrap="square" lIns="0" rIns="0" tIns="0" bIns="0" anchor="t">
+          <a:bodyPr wrap="square" lIns="0" tIns="0" rIns="0" bIns="0" anchor="t">
             <a:spAutoFit/>
           </a:bodyPr>
           <a:lstStyle/>
@@ -4238,7 +4314,7 @@
           <a:noFill/>
         </p:spPr>
         <p:txBody>
-          <a:bodyPr wrap="square" lIns="0" rIns="0" tIns="0" bIns="0" anchor="t">
+          <a:bodyPr wrap="square" lIns="0" tIns="0" rIns="0" bIns="0" anchor="t">
             <a:spAutoFit/>
           </a:bodyPr>
           <a:lstStyle/>
@@ -4285,7 +4361,7 @@
           <a:noFill/>
         </p:spPr>
         <p:txBody>
-          <a:bodyPr wrap="square" lIns="0" rIns="0" tIns="0" bIns="0" anchor="t">
+          <a:bodyPr wrap="square" lIns="0" tIns="0" rIns="0" bIns="0" anchor="t">
             <a:spAutoFit/>
           </a:bodyPr>
           <a:lstStyle/>
@@ -4298,7 +4374,7 @@
                 </a:solidFill>
                 <a:latin typeface="PingFang TC"/>
               </a:rPr>
-              <a:t>延遲稅集中：</a:t>
+              <a:t>延遲開銷集中：</a:t>
             </a:r>
           </a:p>
         </p:txBody>
@@ -4320,7 +4396,7 @@
           <a:noFill/>
         </p:spPr>
         <p:txBody>
-          <a:bodyPr wrap="square" lIns="0" rIns="0" tIns="0" bIns="0" anchor="t">
+          <a:bodyPr wrap="square" lIns="0" tIns="0" rIns="0" bIns="0" anchor="t">
             <a:spAutoFit/>
           </a:bodyPr>
           <a:lstStyle/>
@@ -4381,6 +4457,7 @@
           <a:lstStyle/>
           <a:p>
             <a:pPr algn="ctr"/>
+            <a:endParaRPr/>
           </a:p>
         </p:txBody>
       </p:sp>
@@ -4401,7 +4478,7 @@
           <a:noFill/>
         </p:spPr>
         <p:txBody>
-          <a:bodyPr wrap="square" lIns="0" rIns="0" tIns="0" bIns="0" anchor="t">
+          <a:bodyPr wrap="square" lIns="0" tIns="0" rIns="0" bIns="0" anchor="t">
             <a:spAutoFit/>
           </a:bodyPr>
           <a:lstStyle/>
@@ -4436,7 +4513,7 @@
           <a:noFill/>
         </p:spPr>
         <p:txBody>
-          <a:bodyPr wrap="square" lIns="0" rIns="0" tIns="0" bIns="0" anchor="t">
+          <a:bodyPr wrap="square" lIns="0" tIns="0" rIns="0" bIns="0" anchor="t">
             <a:spAutoFit/>
           </a:bodyPr>
           <a:lstStyle/>
@@ -4471,7 +4548,7 @@
           <a:noFill/>
         </p:spPr>
         <p:txBody>
-          <a:bodyPr wrap="square" lIns="0" rIns="0" tIns="0" bIns="0" anchor="t">
+          <a:bodyPr wrap="square" lIns="0" tIns="0" rIns="0" bIns="0" anchor="t">
             <a:spAutoFit/>
           </a:bodyPr>
           <a:lstStyle/>
@@ -4518,7 +4595,7 @@
           <a:noFill/>
         </p:spPr>
         <p:txBody>
-          <a:bodyPr wrap="square" lIns="0" rIns="0" tIns="0" bIns="0" anchor="t">
+          <a:bodyPr wrap="square" lIns="0" tIns="0" rIns="0" bIns="0" anchor="t">
             <a:spAutoFit/>
           </a:bodyPr>
           <a:lstStyle/>
@@ -4553,7 +4630,7 @@
           <a:noFill/>
         </p:spPr>
         <p:txBody>
-          <a:bodyPr wrap="square" lIns="0" rIns="0" tIns="0" bIns="0" anchor="t">
+          <a:bodyPr wrap="square" lIns="0" tIns="0" rIns="0" bIns="0" anchor="t">
             <a:spAutoFit/>
           </a:bodyPr>
           <a:lstStyle/>
@@ -4600,7 +4677,7 @@
           <a:noFill/>
         </p:spPr>
         <p:txBody>
-          <a:bodyPr wrap="square" lIns="0" rIns="0" tIns="0" bIns="0" anchor="t">
+          <a:bodyPr wrap="square" lIns="0" tIns="0" rIns="0" bIns="0" anchor="t">
             <a:spAutoFit/>
           </a:bodyPr>
           <a:lstStyle/>
@@ -4613,7 +4690,7 @@
                 </a:solidFill>
                 <a:latin typeface="PingFang TC"/>
               </a:rPr>
-              <a:t>延遲稅集中：</a:t>
+              <a:t>延遲開銷集中：</a:t>
             </a:r>
           </a:p>
         </p:txBody>
@@ -4635,7 +4712,7 @@
           <a:noFill/>
         </p:spPr>
         <p:txBody>
-          <a:bodyPr wrap="square" lIns="0" rIns="0" tIns="0" bIns="0" anchor="t">
+          <a:bodyPr wrap="square" lIns="0" tIns="0" rIns="0" bIns="0" anchor="t">
             <a:spAutoFit/>
           </a:bodyPr>
           <a:lstStyle/>
@@ -4682,7 +4759,7 @@
           <a:noFill/>
         </p:spPr>
         <p:txBody>
-          <a:bodyPr wrap="square" lIns="0" rIns="0" tIns="0" bIns="0" anchor="t">
+          <a:bodyPr wrap="square" lIns="0" tIns="0" rIns="0" bIns="0" anchor="t">
             <a:spAutoFit/>
           </a:bodyPr>
           <a:lstStyle/>
@@ -4717,16 +4794,13 @@
           <a:noFill/>
         </p:spPr>
         <p:txBody>
-          <a:bodyPr wrap="square" lIns="0" rIns="0" tIns="0" bIns="0">
+          <a:bodyPr wrap="square" lIns="0" tIns="0" rIns="0" bIns="0">
             <a:spAutoFit/>
           </a:bodyPr>
           <a:lstStyle/>
           <a:p>
-            <a:pPr algn="l" indent="-228600" marL="228600">
+            <a:pPr marL="228600" indent="-228600" algn="l">
               <a:buChar char="•"/>
-              <a:buClr>
-                <a:srgbClr val="E74C3C"/>
-              </a:buClr>
             </a:pPr>
             <a:r>
               <a:rPr sz="1300" b="1">
@@ -4748,11 +4822,8 @@
             </a:r>
           </a:p>
           <a:p>
-            <a:pPr algn="l" indent="-228600" marL="228600">
+            <a:pPr marL="228600" indent="-228600" algn="l">
               <a:buChar char="•"/>
-              <a:buClr>
-                <a:srgbClr val="E74C3C"/>
-              </a:buClr>
             </a:pPr>
             <a:r>
               <a:rPr sz="1300" b="1">
@@ -4774,11 +4845,8 @@
             </a:r>
           </a:p>
           <a:p>
-            <a:pPr algn="l" indent="-228600" marL="228600">
+            <a:pPr marL="228600" indent="-228600" algn="l">
               <a:buChar char="•"/>
-              <a:buClr>
-                <a:srgbClr val="E74C3C"/>
-              </a:buClr>
             </a:pPr>
             <a:r>
               <a:rPr sz="1300" b="1">
@@ -4818,7 +4886,7 @@
           <a:noFill/>
         </p:spPr>
         <p:txBody>
-          <a:bodyPr wrap="square" lIns="0" rIns="0" tIns="0" bIns="0" anchor="t">
+          <a:bodyPr wrap="square" lIns="0" tIns="0" rIns="0" bIns="0" anchor="t">
             <a:spAutoFit/>
           </a:bodyPr>
           <a:lstStyle/>
@@ -4854,7 +4922,7 @@
 </file>
 
 <file path=ppt/slides/slide11.xml><?xml version="1.0" encoding="utf-8"?>
-<p:sld xmlns:a="http://schemas.openxmlformats.org/drawingml/2006/main" xmlns:p="http://schemas.openxmlformats.org/presentationml/2006/main" xmlns:r="http://schemas.openxmlformats.org/officeDocument/2006/relationships">
+<p:sld xmlns:a="http://schemas.openxmlformats.org/drawingml/2006/main" xmlns:r="http://schemas.openxmlformats.org/officeDocument/2006/relationships" xmlns:p="http://schemas.openxmlformats.org/presentationml/2006/main">
   <p:cSld>
     <p:bg>
       <p:bgPr>
@@ -4870,7 +4938,14 @@
         <p:cNvGrpSpPr/>
         <p:nvPr/>
       </p:nvGrpSpPr>
-      <p:grpSpPr/>
+      <p:grpSpPr>
+        <a:xfrm>
+          <a:off x="0" y="0"/>
+          <a:ext cx="0" cy="0"/>
+          <a:chOff x="0" y="0"/>
+          <a:chExt cx="0" cy="0"/>
+        </a:xfrm>
+      </p:grpSpPr>
       <p:sp>
         <p:nvSpPr>
           <p:cNvPr id="2" name="Rectangle 1"/>
@@ -4912,6 +4987,7 @@
           <a:lstStyle/>
           <a:p>
             <a:pPr algn="ctr"/>
+            <a:endParaRPr/>
           </a:p>
         </p:txBody>
       </p:sp>
@@ -4932,7 +5008,7 @@
           <a:noFill/>
         </p:spPr>
         <p:txBody>
-          <a:bodyPr wrap="square" lIns="0" rIns="0" tIns="0" bIns="0" anchor="t">
+          <a:bodyPr wrap="square" lIns="0" tIns="0" rIns="0" bIns="0" anchor="t">
             <a:spAutoFit/>
           </a:bodyPr>
           <a:lstStyle/>
@@ -4967,7 +5043,7 @@
           <a:noFill/>
         </p:spPr>
         <p:txBody>
-          <a:bodyPr wrap="square" lIns="0" rIns="0" tIns="0" bIns="0" anchor="t">
+          <a:bodyPr wrap="square" lIns="0" tIns="0" rIns="0" bIns="0" anchor="t">
             <a:spAutoFit/>
           </a:bodyPr>
           <a:lstStyle/>
@@ -5002,7 +5078,7 @@
           <a:noFill/>
         </p:spPr>
         <p:txBody>
-          <a:bodyPr wrap="square" lIns="0" rIns="0" tIns="0" bIns="0" anchor="t">
+          <a:bodyPr wrap="square" lIns="0" tIns="0" rIns="0" bIns="0" anchor="t">
             <a:spAutoFit/>
           </a:bodyPr>
           <a:lstStyle/>
@@ -5037,7 +5113,7 @@
           <a:noFill/>
         </p:spPr>
         <p:txBody>
-          <a:bodyPr wrap="square" lIns="0" rIns="0" tIns="0" bIns="0" anchor="t">
+          <a:bodyPr wrap="square" lIns="0" tIns="0" rIns="0" bIns="0" anchor="t">
             <a:spAutoFit/>
           </a:bodyPr>
           <a:lstStyle/>
@@ -5096,6 +5172,7 @@
           <a:lstStyle/>
           <a:p>
             <a:pPr algn="ctr"/>
+            <a:endParaRPr/>
           </a:p>
         </p:txBody>
       </p:sp>
@@ -5140,6 +5217,7 @@
           <a:lstStyle/>
           <a:p>
             <a:pPr algn="ctr"/>
+            <a:endParaRPr/>
           </a:p>
         </p:txBody>
       </p:sp>
@@ -5160,7 +5238,7 @@
           <a:noFill/>
         </p:spPr>
         <p:txBody>
-          <a:bodyPr wrap="square" lIns="0" rIns="0" tIns="0" bIns="0" anchor="ctr">
+          <a:bodyPr wrap="square" lIns="0" tIns="0" rIns="0" bIns="0" anchor="ctr">
             <a:spAutoFit/>
           </a:bodyPr>
           <a:lstStyle/>
@@ -5221,6 +5299,7 @@
           <a:lstStyle/>
           <a:p>
             <a:pPr algn="ctr"/>
+            <a:endParaRPr/>
           </a:p>
         </p:txBody>
       </p:sp>
@@ -5241,7 +5320,7 @@
           <a:noFill/>
         </p:spPr>
         <p:txBody>
-          <a:bodyPr wrap="square" lIns="0" rIns="0" tIns="0" bIns="0" anchor="t">
+          <a:bodyPr wrap="square" lIns="0" tIns="0" rIns="0" bIns="0" anchor="t">
             <a:spAutoFit/>
           </a:bodyPr>
           <a:lstStyle/>
@@ -5276,7 +5355,7 @@
           <a:noFill/>
         </p:spPr>
         <p:txBody>
-          <a:bodyPr wrap="square" lIns="0" rIns="0" tIns="0" bIns="0" anchor="t">
+          <a:bodyPr wrap="square" lIns="0" tIns="0" rIns="0" bIns="0" anchor="t">
             <a:spAutoFit/>
           </a:bodyPr>
           <a:lstStyle/>
@@ -5320,7 +5399,7 @@
           <a:noFill/>
         </p:spPr>
         <p:txBody>
-          <a:bodyPr wrap="square" lIns="0" rIns="0" tIns="0" bIns="0" anchor="t">
+          <a:bodyPr wrap="square" lIns="0" tIns="0" rIns="0" bIns="0" anchor="t">
             <a:spAutoFit/>
           </a:bodyPr>
           <a:lstStyle/>
@@ -5364,7 +5443,7 @@
           <a:noFill/>
         </p:spPr>
         <p:txBody>
-          <a:bodyPr wrap="square" lIns="0" rIns="0" tIns="0" bIns="0" anchor="t">
+          <a:bodyPr wrap="square" lIns="0" tIns="0" rIns="0" bIns="0" anchor="t">
             <a:spAutoFit/>
           </a:bodyPr>
           <a:lstStyle/>
@@ -5408,7 +5487,7 @@
           <a:noFill/>
         </p:spPr>
         <p:txBody>
-          <a:bodyPr wrap="square" lIns="0" rIns="0" tIns="0" bIns="0" anchor="t">
+          <a:bodyPr wrap="square" lIns="0" tIns="0" rIns="0" bIns="0" anchor="t">
             <a:spAutoFit/>
           </a:bodyPr>
           <a:lstStyle/>
@@ -5478,6 +5557,7 @@
           <a:lstStyle/>
           <a:p>
             <a:pPr algn="ctr"/>
+            <a:endParaRPr/>
           </a:p>
         </p:txBody>
       </p:sp>
@@ -5498,7 +5578,7 @@
           <a:noFill/>
         </p:spPr>
         <p:txBody>
-          <a:bodyPr wrap="square" lIns="0" rIns="0" tIns="0" bIns="0" anchor="t">
+          <a:bodyPr wrap="square" lIns="0" tIns="0" rIns="0" bIns="0" anchor="t">
             <a:spAutoFit/>
           </a:bodyPr>
           <a:lstStyle/>
@@ -5533,7 +5613,7 @@
           <a:noFill/>
         </p:spPr>
         <p:txBody>
-          <a:bodyPr wrap="square" lIns="0" rIns="0" tIns="0" bIns="0" anchor="t">
+          <a:bodyPr wrap="square" lIns="0" tIns="0" rIns="0" bIns="0" anchor="t">
             <a:spAutoFit/>
           </a:bodyPr>
           <a:lstStyle/>
@@ -5577,7 +5657,7 @@
           <a:noFill/>
         </p:spPr>
         <p:txBody>
-          <a:bodyPr wrap="square" lIns="0" rIns="0" tIns="0" bIns="0" anchor="t">
+          <a:bodyPr wrap="square" lIns="0" tIns="0" rIns="0" bIns="0" anchor="t">
             <a:spAutoFit/>
           </a:bodyPr>
           <a:lstStyle/>
@@ -5621,7 +5701,7 @@
           <a:noFill/>
         </p:spPr>
         <p:txBody>
-          <a:bodyPr wrap="square" lIns="0" rIns="0" tIns="0" bIns="0" anchor="t">
+          <a:bodyPr wrap="square" lIns="0" tIns="0" rIns="0" bIns="0" anchor="t">
             <a:spAutoFit/>
           </a:bodyPr>
           <a:lstStyle/>
@@ -5665,7 +5745,7 @@
           <a:noFill/>
         </p:spPr>
         <p:txBody>
-          <a:bodyPr wrap="square" lIns="0" rIns="0" tIns="0" bIns="0" anchor="t">
+          <a:bodyPr wrap="square" lIns="0" tIns="0" rIns="0" bIns="0" anchor="t">
             <a:spAutoFit/>
           </a:bodyPr>
           <a:lstStyle/>
@@ -5711,13 +5791,25 @@
                 <a:tableStyleId>{5C22544A-7EE6-4342-B048-85BDC9FD1C3A}</a:tableStyleId>
               </a:tblPr>
               <a:tblGrid>
-                <a:gridCol w="3657600"/>
-                <a:gridCol w="7406640"/>
+                <a:gridCol w="3657600">
+                  <a:extLst>
+                    <a:ext uri="{9D8B030D-6E8A-4147-A177-3AD203B41FA5}">
+                      <a16:colId xmlns:a16="http://schemas.microsoft.com/office/drawing/2014/main" val="20000"/>
+                    </a:ext>
+                  </a:extLst>
+                </a:gridCol>
+                <a:gridCol w="7406640">
+                  <a:extLst>
+                    <a:ext uri="{9D8B030D-6E8A-4147-A177-3AD203B41FA5}">
+                      <a16:colId xmlns:a16="http://schemas.microsoft.com/office/drawing/2014/main" val="20001"/>
+                    </a:ext>
+                  </a:extLst>
+                </a:gridCol>
               </a:tblGrid>
               <a:tr h="365760">
                 <a:tc>
                   <a:txBody>
-                    <a:bodyPr wrap="square"/>
+                    <a:bodyPr/>
                     <a:lstStyle/>
                     <a:p>
                       <a:pPr algn="ctr"/>
@@ -5732,7 +5824,7 @@
                       </a:r>
                     </a:p>
                   </a:txBody>
-                  <a:tcPr marL="73152" marR="73152" marT="45720" marB="45720" anchor="ctr">
+                  <a:tcPr marL="73152" marR="73152" anchor="ctr">
                     <a:solidFill>
                       <a:srgbClr val="D8DDE6"/>
                     </a:solidFill>
@@ -5740,7 +5832,7 @@
                 </a:tc>
                 <a:tc>
                   <a:txBody>
-                    <a:bodyPr wrap="square"/>
+                    <a:bodyPr/>
                     <a:lstStyle/>
                     <a:p>
                       <a:pPr algn="ctr"/>
@@ -5755,17 +5847,22 @@
                       </a:r>
                     </a:p>
                   </a:txBody>
-                  <a:tcPr marL="73152" marR="73152" marT="45720" marB="45720" anchor="ctr">
+                  <a:tcPr marL="73152" marR="73152" anchor="ctr">
                     <a:solidFill>
                       <a:srgbClr val="D8DDE6"/>
                     </a:solidFill>
                   </a:tcPr>
                 </a:tc>
+                <a:extLst>
+                  <a:ext uri="{0D108BD9-81ED-4DB2-BD59-A6C34878D82A}">
+                    <a16:rowId xmlns:a16="http://schemas.microsoft.com/office/drawing/2014/main" val="10000"/>
+                  </a:ext>
+                </a:extLst>
               </a:tr>
               <a:tr h="365760">
                 <a:tc>
                   <a:txBody>
-                    <a:bodyPr wrap="square"/>
+                    <a:bodyPr/>
                     <a:lstStyle/>
                     <a:p>
                       <a:pPr algn="l"/>
@@ -5780,7 +5877,7 @@
                       </a:r>
                     </a:p>
                   </a:txBody>
-                  <a:tcPr marL="73152" marR="73152" marT="45720" marB="45720" anchor="ctr">
+                  <a:tcPr marL="73152" marR="73152" anchor="ctr">
                     <a:solidFill>
                       <a:srgbClr val="FFFFFF"/>
                     </a:solidFill>
@@ -5788,7 +5885,7 @@
                 </a:tc>
                 <a:tc>
                   <a:txBody>
-                    <a:bodyPr wrap="square"/>
+                    <a:bodyPr/>
                     <a:lstStyle/>
                     <a:p>
                       <a:pPr algn="l"/>
@@ -5803,17 +5900,22 @@
                       </a:r>
                     </a:p>
                   </a:txBody>
-                  <a:tcPr marL="73152" marR="73152" marT="45720" marB="45720" anchor="ctr">
+                  <a:tcPr marL="73152" marR="73152" anchor="ctr">
                     <a:solidFill>
                       <a:srgbClr val="FFFFFF"/>
                     </a:solidFill>
                   </a:tcPr>
                 </a:tc>
+                <a:extLst>
+                  <a:ext uri="{0D108BD9-81ED-4DB2-BD59-A6C34878D82A}">
+                    <a16:rowId xmlns:a16="http://schemas.microsoft.com/office/drawing/2014/main" val="10001"/>
+                  </a:ext>
+                </a:extLst>
               </a:tr>
               <a:tr h="365760">
                 <a:tc>
                   <a:txBody>
-                    <a:bodyPr wrap="square"/>
+                    <a:bodyPr/>
                     <a:lstStyle/>
                     <a:p>
                       <a:pPr algn="l"/>
@@ -5828,7 +5930,7 @@
                       </a:r>
                     </a:p>
                   </a:txBody>
-                  <a:tcPr marL="73152" marR="73152" marT="45720" marB="45720" anchor="ctr">
+                  <a:tcPr marL="73152" marR="73152" anchor="ctr">
                     <a:solidFill>
                       <a:srgbClr val="F1F3F6"/>
                     </a:solidFill>
@@ -5836,7 +5938,7 @@
                 </a:tc>
                 <a:tc>
                   <a:txBody>
-                    <a:bodyPr wrap="square"/>
+                    <a:bodyPr/>
                     <a:lstStyle/>
                     <a:p>
                       <a:pPr algn="l"/>
@@ -5851,17 +5953,22 @@
                       </a:r>
                     </a:p>
                   </a:txBody>
-                  <a:tcPr marL="73152" marR="73152" marT="45720" marB="45720" anchor="ctr">
+                  <a:tcPr marL="73152" marR="73152" anchor="ctr">
                     <a:solidFill>
                       <a:srgbClr val="F1F3F6"/>
                     </a:solidFill>
                   </a:tcPr>
                 </a:tc>
+                <a:extLst>
+                  <a:ext uri="{0D108BD9-81ED-4DB2-BD59-A6C34878D82A}">
+                    <a16:rowId xmlns:a16="http://schemas.microsoft.com/office/drawing/2014/main" val="10002"/>
+                  </a:ext>
+                </a:extLst>
               </a:tr>
               <a:tr h="365760">
                 <a:tc>
                   <a:txBody>
-                    <a:bodyPr wrap="square"/>
+                    <a:bodyPr/>
                     <a:lstStyle/>
                     <a:p>
                       <a:pPr algn="l"/>
@@ -5876,7 +5983,7 @@
                       </a:r>
                     </a:p>
                   </a:txBody>
-                  <a:tcPr marL="73152" marR="73152" marT="45720" marB="45720" anchor="ctr">
+                  <a:tcPr marL="73152" marR="73152" anchor="ctr">
                     <a:solidFill>
                       <a:srgbClr val="FFFFFF"/>
                     </a:solidFill>
@@ -5884,7 +5991,7 @@
                 </a:tc>
                 <a:tc>
                   <a:txBody>
-                    <a:bodyPr wrap="square"/>
+                    <a:bodyPr/>
                     <a:lstStyle/>
                     <a:p>
                       <a:pPr algn="l"/>
@@ -5899,12 +6006,17 @@
                       </a:r>
                     </a:p>
                   </a:txBody>
-                  <a:tcPr marL="73152" marR="73152" marT="45720" marB="45720" anchor="ctr">
+                  <a:tcPr marL="73152" marR="73152" anchor="ctr">
                     <a:solidFill>
                       <a:srgbClr val="FFFFFF"/>
                     </a:solidFill>
                   </a:tcPr>
                 </a:tc>
+                <a:extLst>
+                  <a:ext uri="{0D108BD9-81ED-4DB2-BD59-A6C34878D82A}">
+                    <a16:rowId xmlns:a16="http://schemas.microsoft.com/office/drawing/2014/main" val="10003"/>
+                  </a:ext>
+                </a:extLst>
               </a:tr>
             </a:tbl>
           </a:graphicData>
@@ -5927,7 +6039,7 @@
           <a:noFill/>
         </p:spPr>
         <p:txBody>
-          <a:bodyPr wrap="square" lIns="0" rIns="0" tIns="0" bIns="0" anchor="t">
+          <a:bodyPr wrap="square" lIns="0" tIns="0" rIns="0" bIns="0" anchor="t">
             <a:spAutoFit/>
           </a:bodyPr>
           <a:lstStyle/>
@@ -5963,7 +6075,7 @@
 </file>
 
 <file path=ppt/slides/slide12.xml><?xml version="1.0" encoding="utf-8"?>
-<p:sld xmlns:a="http://schemas.openxmlformats.org/drawingml/2006/main" xmlns:p="http://schemas.openxmlformats.org/presentationml/2006/main" xmlns:r="http://schemas.openxmlformats.org/officeDocument/2006/relationships">
+<p:sld xmlns:a="http://schemas.openxmlformats.org/drawingml/2006/main" xmlns:r="http://schemas.openxmlformats.org/officeDocument/2006/relationships" xmlns:p="http://schemas.openxmlformats.org/presentationml/2006/main">
   <p:cSld>
     <p:bg>
       <p:bgPr>
@@ -5979,7 +6091,14 @@
         <p:cNvGrpSpPr/>
         <p:nvPr/>
       </p:nvGrpSpPr>
-      <p:grpSpPr/>
+      <p:grpSpPr>
+        <a:xfrm>
+          <a:off x="0" y="0"/>
+          <a:ext cx="0" cy="0"/>
+          <a:chOff x="0" y="0"/>
+          <a:chExt cx="0" cy="0"/>
+        </a:xfrm>
+      </p:grpSpPr>
       <p:sp>
         <p:nvSpPr>
           <p:cNvPr id="2" name="Rectangle 1"/>
@@ -6021,6 +6140,7 @@
           <a:lstStyle/>
           <a:p>
             <a:pPr algn="ctr"/>
+            <a:endParaRPr/>
           </a:p>
         </p:txBody>
       </p:sp>
@@ -6041,7 +6161,7 @@
           <a:noFill/>
         </p:spPr>
         <p:txBody>
-          <a:bodyPr wrap="square" lIns="0" rIns="0" tIns="0" bIns="0" anchor="t">
+          <a:bodyPr wrap="square" lIns="0" tIns="0" rIns="0" bIns="0" anchor="t">
             <a:spAutoFit/>
           </a:bodyPr>
           <a:lstStyle/>
@@ -6076,7 +6196,7 @@
           <a:noFill/>
         </p:spPr>
         <p:txBody>
-          <a:bodyPr wrap="square" lIns="0" rIns="0" tIns="0" bIns="0" anchor="t">
+          <a:bodyPr wrap="square" lIns="0" tIns="0" rIns="0" bIns="0" anchor="t">
             <a:spAutoFit/>
           </a:bodyPr>
           <a:lstStyle/>
@@ -6111,7 +6231,7 @@
           <a:noFill/>
         </p:spPr>
         <p:txBody>
-          <a:bodyPr wrap="square" lIns="0" rIns="0" tIns="0" bIns="0" anchor="t">
+          <a:bodyPr wrap="square" lIns="0" tIns="0" rIns="0" bIns="0" anchor="t">
             <a:spAutoFit/>
           </a:bodyPr>
           <a:lstStyle/>
@@ -6146,7 +6266,7 @@
           <a:noFill/>
         </p:spPr>
         <p:txBody>
-          <a:bodyPr wrap="square" lIns="0" rIns="0" tIns="0" bIns="0" anchor="t">
+          <a:bodyPr wrap="square" lIns="0" tIns="0" rIns="0" bIns="0" anchor="t">
             <a:spAutoFit/>
           </a:bodyPr>
           <a:lstStyle/>
@@ -6205,6 +6325,7 @@
           <a:lstStyle/>
           <a:p>
             <a:pPr algn="ctr"/>
+            <a:endParaRPr/>
           </a:p>
         </p:txBody>
       </p:sp>
@@ -6249,6 +6370,7 @@
           <a:lstStyle/>
           <a:p>
             <a:pPr algn="ctr"/>
+            <a:endParaRPr/>
           </a:p>
         </p:txBody>
       </p:sp>
@@ -6269,7 +6391,7 @@
           <a:noFill/>
         </p:spPr>
         <p:txBody>
-          <a:bodyPr wrap="square" lIns="0" rIns="0" tIns="0" bIns="0" anchor="ctr">
+          <a:bodyPr wrap="square" lIns="0" tIns="0" rIns="0" bIns="0" anchor="ctr">
             <a:spAutoFit/>
           </a:bodyPr>
           <a:lstStyle/>
@@ -6306,19 +6428,67 @@
                 <a:tableStyleId>{5C22544A-7EE6-4342-B048-85BDC9FD1C3A}</a:tableStyleId>
               </a:tblPr>
               <a:tblGrid>
-                <a:gridCol w="2011680"/>
-                <a:gridCol w="1371600"/>
-                <a:gridCol w="1371600"/>
-                <a:gridCol w="1371600"/>
-                <a:gridCol w="1280160"/>
-                <a:gridCol w="1097280"/>
-                <a:gridCol w="1280160"/>
-                <a:gridCol w="1280160"/>
+                <a:gridCol w="2011680">
+                  <a:extLst>
+                    <a:ext uri="{9D8B030D-6E8A-4147-A177-3AD203B41FA5}">
+                      <a16:colId xmlns:a16="http://schemas.microsoft.com/office/drawing/2014/main" val="20000"/>
+                    </a:ext>
+                  </a:extLst>
+                </a:gridCol>
+                <a:gridCol w="1371600">
+                  <a:extLst>
+                    <a:ext uri="{9D8B030D-6E8A-4147-A177-3AD203B41FA5}">
+                      <a16:colId xmlns:a16="http://schemas.microsoft.com/office/drawing/2014/main" val="20001"/>
+                    </a:ext>
+                  </a:extLst>
+                </a:gridCol>
+                <a:gridCol w="1371600">
+                  <a:extLst>
+                    <a:ext uri="{9D8B030D-6E8A-4147-A177-3AD203B41FA5}">
+                      <a16:colId xmlns:a16="http://schemas.microsoft.com/office/drawing/2014/main" val="20002"/>
+                    </a:ext>
+                  </a:extLst>
+                </a:gridCol>
+                <a:gridCol w="1371600">
+                  <a:extLst>
+                    <a:ext uri="{9D8B030D-6E8A-4147-A177-3AD203B41FA5}">
+                      <a16:colId xmlns:a16="http://schemas.microsoft.com/office/drawing/2014/main" val="20003"/>
+                    </a:ext>
+                  </a:extLst>
+                </a:gridCol>
+                <a:gridCol w="1280160">
+                  <a:extLst>
+                    <a:ext uri="{9D8B030D-6E8A-4147-A177-3AD203B41FA5}">
+                      <a16:colId xmlns:a16="http://schemas.microsoft.com/office/drawing/2014/main" val="20004"/>
+                    </a:ext>
+                  </a:extLst>
+                </a:gridCol>
+                <a:gridCol w="1097280">
+                  <a:extLst>
+                    <a:ext uri="{9D8B030D-6E8A-4147-A177-3AD203B41FA5}">
+                      <a16:colId xmlns:a16="http://schemas.microsoft.com/office/drawing/2014/main" val="20005"/>
+                    </a:ext>
+                  </a:extLst>
+                </a:gridCol>
+                <a:gridCol w="1280160">
+                  <a:extLst>
+                    <a:ext uri="{9D8B030D-6E8A-4147-A177-3AD203B41FA5}">
+                      <a16:colId xmlns:a16="http://schemas.microsoft.com/office/drawing/2014/main" val="20006"/>
+                    </a:ext>
+                  </a:extLst>
+                </a:gridCol>
+                <a:gridCol w="1280160">
+                  <a:extLst>
+                    <a:ext uri="{9D8B030D-6E8A-4147-A177-3AD203B41FA5}">
+                      <a16:colId xmlns:a16="http://schemas.microsoft.com/office/drawing/2014/main" val="20007"/>
+                    </a:ext>
+                  </a:extLst>
+                </a:gridCol>
               </a:tblGrid>
               <a:tr h="571500">
                 <a:tc>
                   <a:txBody>
-                    <a:bodyPr wrap="square"/>
+                    <a:bodyPr/>
                     <a:lstStyle/>
                     <a:p>
                       <a:pPr algn="ctr"/>
@@ -6333,7 +6503,7 @@
                       </a:r>
                     </a:p>
                   </a:txBody>
-                  <a:tcPr marL="73152" marR="73152" marT="45720" marB="45720" anchor="ctr">
+                  <a:tcPr marL="73152" marR="73152" anchor="ctr">
                     <a:solidFill>
                       <a:srgbClr val="D8DDE6"/>
                     </a:solidFill>
@@ -6341,7 +6511,7 @@
                 </a:tc>
                 <a:tc>
                   <a:txBody>
-                    <a:bodyPr wrap="square"/>
+                    <a:bodyPr/>
                     <a:lstStyle/>
                     <a:p>
                       <a:pPr algn="ctr"/>
@@ -6357,7 +6527,7 @@
                       </a:r>
                     </a:p>
                   </a:txBody>
-                  <a:tcPr marL="73152" marR="73152" marT="45720" marB="45720" anchor="ctr">
+                  <a:tcPr marL="73152" marR="73152" anchor="ctr">
                     <a:solidFill>
                       <a:srgbClr val="D8DDE6"/>
                     </a:solidFill>
@@ -6365,7 +6535,7 @@
                 </a:tc>
                 <a:tc>
                   <a:txBody>
-                    <a:bodyPr wrap="square"/>
+                    <a:bodyPr/>
                     <a:lstStyle/>
                     <a:p>
                       <a:pPr algn="ctr"/>
@@ -6381,7 +6551,7 @@
                       </a:r>
                     </a:p>
                   </a:txBody>
-                  <a:tcPr marL="73152" marR="73152" marT="45720" marB="45720" anchor="ctr">
+                  <a:tcPr marL="73152" marR="73152" anchor="ctr">
                     <a:solidFill>
                       <a:srgbClr val="D8DDE6"/>
                     </a:solidFill>
@@ -6389,7 +6559,7 @@
                 </a:tc>
                 <a:tc>
                   <a:txBody>
-                    <a:bodyPr wrap="square"/>
+                    <a:bodyPr/>
                     <a:lstStyle/>
                     <a:p>
                       <a:pPr algn="ctr"/>
@@ -6405,7 +6575,7 @@
                       </a:r>
                     </a:p>
                   </a:txBody>
-                  <a:tcPr marL="73152" marR="73152" marT="45720" marB="45720" anchor="ctr">
+                  <a:tcPr marL="73152" marR="73152" anchor="ctr">
                     <a:solidFill>
                       <a:srgbClr val="D8DDE6"/>
                     </a:solidFill>
@@ -6413,7 +6583,7 @@
                 </a:tc>
                 <a:tc>
                   <a:txBody>
-                    <a:bodyPr wrap="square"/>
+                    <a:bodyPr/>
                     <a:lstStyle/>
                     <a:p>
                       <a:pPr algn="ctr"/>
@@ -6428,7 +6598,7 @@
                       </a:r>
                     </a:p>
                   </a:txBody>
-                  <a:tcPr marL="73152" marR="73152" marT="45720" marB="45720" anchor="ctr">
+                  <a:tcPr marL="73152" marR="73152" anchor="ctr">
                     <a:solidFill>
                       <a:srgbClr val="D8DDE6"/>
                     </a:solidFill>
@@ -6436,7 +6606,7 @@
                 </a:tc>
                 <a:tc>
                   <a:txBody>
-                    <a:bodyPr wrap="square"/>
+                    <a:bodyPr/>
                     <a:lstStyle/>
                     <a:p>
                       <a:pPr algn="ctr"/>
@@ -6451,7 +6621,7 @@
                       </a:r>
                     </a:p>
                   </a:txBody>
-                  <a:tcPr marL="73152" marR="73152" marT="45720" marB="45720" anchor="ctr">
+                  <a:tcPr marL="73152" marR="73152" anchor="ctr">
                     <a:solidFill>
                       <a:srgbClr val="D8DDE6"/>
                     </a:solidFill>
@@ -6459,7 +6629,7 @@
                 </a:tc>
                 <a:tc>
                   <a:txBody>
-                    <a:bodyPr wrap="square"/>
+                    <a:bodyPr/>
                     <a:lstStyle/>
                     <a:p>
                       <a:pPr algn="ctr"/>
@@ -6474,7 +6644,7 @@
                       </a:r>
                     </a:p>
                   </a:txBody>
-                  <a:tcPr marL="73152" marR="73152" marT="45720" marB="45720" anchor="ctr">
+                  <a:tcPr marL="73152" marR="73152" anchor="ctr">
                     <a:solidFill>
                       <a:srgbClr val="D8DDE6"/>
                     </a:solidFill>
@@ -6482,7 +6652,7 @@
                 </a:tc>
                 <a:tc>
                   <a:txBody>
-                    <a:bodyPr wrap="square"/>
+                    <a:bodyPr/>
                     <a:lstStyle/>
                     <a:p>
                       <a:pPr algn="ctr"/>
@@ -6497,17 +6667,22 @@
                       </a:r>
                     </a:p>
                   </a:txBody>
-                  <a:tcPr marL="73152" marR="73152" marT="45720" marB="45720" anchor="ctr">
+                  <a:tcPr marL="73152" marR="73152" anchor="ctr">
                     <a:solidFill>
                       <a:srgbClr val="D8DDE6"/>
                     </a:solidFill>
                   </a:tcPr>
                 </a:tc>
+                <a:extLst>
+                  <a:ext uri="{0D108BD9-81ED-4DB2-BD59-A6C34878D82A}">
+                    <a16:rowId xmlns:a16="http://schemas.microsoft.com/office/drawing/2014/main" val="10000"/>
+                  </a:ext>
+                </a:extLst>
               </a:tr>
               <a:tr h="571500">
                 <a:tc>
                   <a:txBody>
-                    <a:bodyPr wrap="square"/>
+                    <a:bodyPr/>
                     <a:lstStyle/>
                     <a:p>
                       <a:pPr algn="l"/>
@@ -6522,7 +6697,7 @@
                       </a:r>
                     </a:p>
                   </a:txBody>
-                  <a:tcPr marL="73152" marR="73152" marT="45720" marB="45720" anchor="ctr">
+                  <a:tcPr marL="73152" marR="73152" anchor="ctr">
                     <a:solidFill>
                       <a:srgbClr val="FFFFFF"/>
                     </a:solidFill>
@@ -6530,7 +6705,7 @@
                 </a:tc>
                 <a:tc>
                   <a:txBody>
-                    <a:bodyPr wrap="square"/>
+                    <a:bodyPr/>
                     <a:lstStyle/>
                     <a:p>
                       <a:pPr algn="l"/>
@@ -6545,7 +6720,7 @@
                       </a:r>
                     </a:p>
                   </a:txBody>
-                  <a:tcPr marL="73152" marR="73152" marT="45720" marB="45720" anchor="ctr">
+                  <a:tcPr marL="73152" marR="73152" anchor="ctr">
                     <a:solidFill>
                       <a:srgbClr val="FFFFFF"/>
                     </a:solidFill>
@@ -6553,7 +6728,7 @@
                 </a:tc>
                 <a:tc>
                   <a:txBody>
-                    <a:bodyPr wrap="square"/>
+                    <a:bodyPr/>
                     <a:lstStyle/>
                     <a:p>
                       <a:pPr algn="l"/>
@@ -6568,7 +6743,7 @@
                       </a:r>
                     </a:p>
                   </a:txBody>
-                  <a:tcPr marL="73152" marR="73152" marT="45720" marB="45720" anchor="ctr">
+                  <a:tcPr marL="73152" marR="73152" anchor="ctr">
                     <a:solidFill>
                       <a:srgbClr val="FFFFFF"/>
                     </a:solidFill>
@@ -6576,7 +6751,7 @@
                 </a:tc>
                 <a:tc>
                   <a:txBody>
-                    <a:bodyPr wrap="square"/>
+                    <a:bodyPr/>
                     <a:lstStyle/>
                     <a:p>
                       <a:pPr algn="l"/>
@@ -6591,7 +6766,7 @@
                       </a:r>
                     </a:p>
                   </a:txBody>
-                  <a:tcPr marL="73152" marR="73152" marT="45720" marB="45720" anchor="ctr">
+                  <a:tcPr marL="73152" marR="73152" anchor="ctr">
                     <a:solidFill>
                       <a:srgbClr val="FFFFFF"/>
                     </a:solidFill>
@@ -6599,7 +6774,7 @@
                 </a:tc>
                 <a:tc>
                   <a:txBody>
-                    <a:bodyPr wrap="square"/>
+                    <a:bodyPr/>
                     <a:lstStyle/>
                     <a:p>
                       <a:pPr algn="l"/>
@@ -6614,7 +6789,7 @@
                       </a:r>
                     </a:p>
                   </a:txBody>
-                  <a:tcPr marL="73152" marR="73152" marT="45720" marB="45720" anchor="ctr">
+                  <a:tcPr marL="73152" marR="73152" anchor="ctr">
                     <a:solidFill>
                       <a:srgbClr val="FFFFFF"/>
                     </a:solidFill>
@@ -6622,7 +6797,7 @@
                 </a:tc>
                 <a:tc>
                   <a:txBody>
-                    <a:bodyPr wrap="square"/>
+                    <a:bodyPr/>
                     <a:lstStyle/>
                     <a:p>
                       <a:pPr algn="l"/>
@@ -6637,7 +6812,7 @@
                       </a:r>
                     </a:p>
                   </a:txBody>
-                  <a:tcPr marL="73152" marR="73152" marT="45720" marB="45720" anchor="ctr">
+                  <a:tcPr marL="73152" marR="73152" anchor="ctr">
                     <a:solidFill>
                       <a:srgbClr val="FFFFFF"/>
                     </a:solidFill>
@@ -6645,7 +6820,7 @@
                 </a:tc>
                 <a:tc>
                   <a:txBody>
-                    <a:bodyPr wrap="square"/>
+                    <a:bodyPr/>
                     <a:lstStyle/>
                     <a:p>
                       <a:pPr algn="l"/>
@@ -6660,7 +6835,7 @@
                       </a:r>
                     </a:p>
                   </a:txBody>
-                  <a:tcPr marL="73152" marR="73152" marT="45720" marB="45720" anchor="ctr">
+                  <a:tcPr marL="73152" marR="73152" anchor="ctr">
                     <a:solidFill>
                       <a:srgbClr val="FFFFFF"/>
                     </a:solidFill>
@@ -6668,7 +6843,7 @@
                 </a:tc>
                 <a:tc>
                   <a:txBody>
-                    <a:bodyPr wrap="square"/>
+                    <a:bodyPr/>
                     <a:lstStyle/>
                     <a:p>
                       <a:pPr algn="l"/>
@@ -6683,17 +6858,22 @@
                       </a:r>
                     </a:p>
                   </a:txBody>
-                  <a:tcPr marL="73152" marR="73152" marT="45720" marB="45720" anchor="ctr">
+                  <a:tcPr marL="73152" marR="73152" anchor="ctr">
                     <a:solidFill>
                       <a:srgbClr val="FFFFFF"/>
                     </a:solidFill>
                   </a:tcPr>
                 </a:tc>
+                <a:extLst>
+                  <a:ext uri="{0D108BD9-81ED-4DB2-BD59-A6C34878D82A}">
+                    <a16:rowId xmlns:a16="http://schemas.microsoft.com/office/drawing/2014/main" val="10001"/>
+                  </a:ext>
+                </a:extLst>
               </a:tr>
               <a:tr h="571500">
                 <a:tc>
                   <a:txBody>
-                    <a:bodyPr wrap="square"/>
+                    <a:bodyPr/>
                     <a:lstStyle/>
                     <a:p>
                       <a:pPr algn="l"/>
@@ -6708,7 +6888,7 @@
                       </a:r>
                     </a:p>
                   </a:txBody>
-                  <a:tcPr marL="73152" marR="73152" marT="45720" marB="45720" anchor="ctr">
+                  <a:tcPr marL="73152" marR="73152" anchor="ctr">
                     <a:solidFill>
                       <a:srgbClr val="F1F3F6"/>
                     </a:solidFill>
@@ -6716,7 +6896,7 @@
                 </a:tc>
                 <a:tc>
                   <a:txBody>
-                    <a:bodyPr wrap="square"/>
+                    <a:bodyPr/>
                     <a:lstStyle/>
                     <a:p>
                       <a:pPr algn="l"/>
@@ -6731,7 +6911,7 @@
                       </a:r>
                     </a:p>
                   </a:txBody>
-                  <a:tcPr marL="73152" marR="73152" marT="45720" marB="45720" anchor="ctr">
+                  <a:tcPr marL="73152" marR="73152" anchor="ctr">
                     <a:solidFill>
                       <a:srgbClr val="F1F3F6"/>
                     </a:solidFill>
@@ -6739,7 +6919,7 @@
                 </a:tc>
                 <a:tc>
                   <a:txBody>
-                    <a:bodyPr wrap="square"/>
+                    <a:bodyPr/>
                     <a:lstStyle/>
                     <a:p>
                       <a:pPr algn="l"/>
@@ -6754,7 +6934,7 @@
                       </a:r>
                     </a:p>
                   </a:txBody>
-                  <a:tcPr marL="73152" marR="73152" marT="45720" marB="45720" anchor="ctr">
+                  <a:tcPr marL="73152" marR="73152" anchor="ctr">
                     <a:solidFill>
                       <a:srgbClr val="F1F3F6"/>
                     </a:solidFill>
@@ -6762,7 +6942,7 @@
                 </a:tc>
                 <a:tc>
                   <a:txBody>
-                    <a:bodyPr wrap="square"/>
+                    <a:bodyPr/>
                     <a:lstStyle/>
                     <a:p>
                       <a:pPr algn="l"/>
@@ -6777,7 +6957,7 @@
                       </a:r>
                     </a:p>
                   </a:txBody>
-                  <a:tcPr marL="73152" marR="73152" marT="45720" marB="45720" anchor="ctr">
+                  <a:tcPr marL="73152" marR="73152" anchor="ctr">
                     <a:solidFill>
                       <a:srgbClr val="F1F3F6"/>
                     </a:solidFill>
@@ -6785,7 +6965,7 @@
                 </a:tc>
                 <a:tc>
                   <a:txBody>
-                    <a:bodyPr wrap="square"/>
+                    <a:bodyPr/>
                     <a:lstStyle/>
                     <a:p>
                       <a:pPr algn="l"/>
@@ -6800,7 +6980,7 @@
                       </a:r>
                     </a:p>
                   </a:txBody>
-                  <a:tcPr marL="73152" marR="73152" marT="45720" marB="45720" anchor="ctr">
+                  <a:tcPr marL="73152" marR="73152" anchor="ctr">
                     <a:solidFill>
                       <a:srgbClr val="F1F3F6"/>
                     </a:solidFill>
@@ -6808,7 +6988,7 @@
                 </a:tc>
                 <a:tc>
                   <a:txBody>
-                    <a:bodyPr wrap="square"/>
+                    <a:bodyPr/>
                     <a:lstStyle/>
                     <a:p>
                       <a:pPr algn="l"/>
@@ -6823,7 +7003,7 @@
                       </a:r>
                     </a:p>
                   </a:txBody>
-                  <a:tcPr marL="73152" marR="73152" marT="45720" marB="45720" anchor="ctr">
+                  <a:tcPr marL="73152" marR="73152" anchor="ctr">
                     <a:solidFill>
                       <a:srgbClr val="F1F3F6"/>
                     </a:solidFill>
@@ -6831,7 +7011,7 @@
                 </a:tc>
                 <a:tc>
                   <a:txBody>
-                    <a:bodyPr wrap="square"/>
+                    <a:bodyPr/>
                     <a:lstStyle/>
                     <a:p>
                       <a:pPr algn="l"/>
@@ -6846,7 +7026,7 @@
                       </a:r>
                     </a:p>
                   </a:txBody>
-                  <a:tcPr marL="73152" marR="73152" marT="45720" marB="45720" anchor="ctr">
+                  <a:tcPr marL="73152" marR="73152" anchor="ctr">
                     <a:solidFill>
                       <a:srgbClr val="F1F3F6"/>
                     </a:solidFill>
@@ -6854,7 +7034,7 @@
                 </a:tc>
                 <a:tc>
                   <a:txBody>
-                    <a:bodyPr wrap="square"/>
+                    <a:bodyPr/>
                     <a:lstStyle/>
                     <a:p>
                       <a:pPr algn="l"/>
@@ -6869,17 +7049,22 @@
                       </a:r>
                     </a:p>
                   </a:txBody>
-                  <a:tcPr marL="73152" marR="73152" marT="45720" marB="45720" anchor="ctr">
+                  <a:tcPr marL="73152" marR="73152" anchor="ctr">
                     <a:solidFill>
                       <a:srgbClr val="F1F3F6"/>
                     </a:solidFill>
                   </a:tcPr>
                 </a:tc>
+                <a:extLst>
+                  <a:ext uri="{0D108BD9-81ED-4DB2-BD59-A6C34878D82A}">
+                    <a16:rowId xmlns:a16="http://schemas.microsoft.com/office/drawing/2014/main" val="10002"/>
+                  </a:ext>
+                </a:extLst>
               </a:tr>
               <a:tr h="571500">
                 <a:tc>
                   <a:txBody>
-                    <a:bodyPr wrap="square"/>
+                    <a:bodyPr/>
                     <a:lstStyle/>
                     <a:p>
                       <a:pPr algn="l"/>
@@ -6894,7 +7079,7 @@
                       </a:r>
                     </a:p>
                   </a:txBody>
-                  <a:tcPr marL="73152" marR="73152" marT="45720" marB="45720" anchor="ctr">
+                  <a:tcPr marL="73152" marR="73152" anchor="ctr">
                     <a:solidFill>
                       <a:srgbClr val="FFFFFF"/>
                     </a:solidFill>
@@ -6902,7 +7087,7 @@
                 </a:tc>
                 <a:tc>
                   <a:txBody>
-                    <a:bodyPr wrap="square"/>
+                    <a:bodyPr/>
                     <a:lstStyle/>
                     <a:p>
                       <a:pPr algn="l"/>
@@ -6917,7 +7102,7 @@
                       </a:r>
                     </a:p>
                   </a:txBody>
-                  <a:tcPr marL="73152" marR="73152" marT="45720" marB="45720" anchor="ctr">
+                  <a:tcPr marL="73152" marR="73152" anchor="ctr">
                     <a:solidFill>
                       <a:srgbClr val="FFFFFF"/>
                     </a:solidFill>
@@ -6925,7 +7110,7 @@
                 </a:tc>
                 <a:tc>
                   <a:txBody>
-                    <a:bodyPr wrap="square"/>
+                    <a:bodyPr/>
                     <a:lstStyle/>
                     <a:p>
                       <a:pPr algn="l"/>
@@ -6940,7 +7125,7 @@
                       </a:r>
                     </a:p>
                   </a:txBody>
-                  <a:tcPr marL="73152" marR="73152" marT="45720" marB="45720" anchor="ctr">
+                  <a:tcPr marL="73152" marR="73152" anchor="ctr">
                     <a:solidFill>
                       <a:srgbClr val="FFFFFF"/>
                     </a:solidFill>
@@ -6948,7 +7133,7 @@
                 </a:tc>
                 <a:tc>
                   <a:txBody>
-                    <a:bodyPr wrap="square"/>
+                    <a:bodyPr/>
                     <a:lstStyle/>
                     <a:p>
                       <a:pPr algn="l"/>
@@ -6963,7 +7148,7 @@
                       </a:r>
                     </a:p>
                   </a:txBody>
-                  <a:tcPr marL="73152" marR="73152" marT="45720" marB="45720" anchor="ctr">
+                  <a:tcPr marL="73152" marR="73152" anchor="ctr">
                     <a:solidFill>
                       <a:srgbClr val="FFFFFF"/>
                     </a:solidFill>
@@ -6971,7 +7156,7 @@
                 </a:tc>
                 <a:tc>
                   <a:txBody>
-                    <a:bodyPr wrap="square"/>
+                    <a:bodyPr/>
                     <a:lstStyle/>
                     <a:p>
                       <a:pPr algn="l"/>
@@ -6986,7 +7171,7 @@
                       </a:r>
                     </a:p>
                   </a:txBody>
-                  <a:tcPr marL="73152" marR="73152" marT="45720" marB="45720" anchor="ctr">
+                  <a:tcPr marL="73152" marR="73152" anchor="ctr">
                     <a:solidFill>
                       <a:srgbClr val="FFFFFF"/>
                     </a:solidFill>
@@ -6994,7 +7179,7 @@
                 </a:tc>
                 <a:tc>
                   <a:txBody>
-                    <a:bodyPr wrap="square"/>
+                    <a:bodyPr/>
                     <a:lstStyle/>
                     <a:p>
                       <a:pPr algn="l"/>
@@ -7009,7 +7194,7 @@
                       </a:r>
                     </a:p>
                   </a:txBody>
-                  <a:tcPr marL="73152" marR="73152" marT="45720" marB="45720" anchor="ctr">
+                  <a:tcPr marL="73152" marR="73152" anchor="ctr">
                     <a:solidFill>
                       <a:srgbClr val="FFFFFF"/>
                     </a:solidFill>
@@ -7017,7 +7202,7 @@
                 </a:tc>
                 <a:tc>
                   <a:txBody>
-                    <a:bodyPr wrap="square"/>
+                    <a:bodyPr/>
                     <a:lstStyle/>
                     <a:p>
                       <a:pPr algn="l"/>
@@ -7032,7 +7217,7 @@
                       </a:r>
                     </a:p>
                   </a:txBody>
-                  <a:tcPr marL="73152" marR="73152" marT="45720" marB="45720" anchor="ctr">
+                  <a:tcPr marL="73152" marR="73152" anchor="ctr">
                     <a:solidFill>
                       <a:srgbClr val="FFFFFF"/>
                     </a:solidFill>
@@ -7040,7 +7225,7 @@
                 </a:tc>
                 <a:tc>
                   <a:txBody>
-                    <a:bodyPr wrap="square"/>
+                    <a:bodyPr/>
                     <a:lstStyle/>
                     <a:p>
                       <a:pPr algn="l"/>
@@ -7055,12 +7240,17 @@
                       </a:r>
                     </a:p>
                   </a:txBody>
-                  <a:tcPr marL="73152" marR="73152" marT="45720" marB="45720" anchor="ctr">
+                  <a:tcPr marL="73152" marR="73152" anchor="ctr">
                     <a:solidFill>
                       <a:srgbClr val="FFFFFF"/>
                     </a:solidFill>
                   </a:tcPr>
                 </a:tc>
+                <a:extLst>
+                  <a:ext uri="{0D108BD9-81ED-4DB2-BD59-A6C34878D82A}">
+                    <a16:rowId xmlns:a16="http://schemas.microsoft.com/office/drawing/2014/main" val="10003"/>
+                  </a:ext>
+                </a:extLst>
               </a:tr>
             </a:tbl>
           </a:graphicData>
@@ -7083,7 +7273,7 @@
           <a:noFill/>
         </p:spPr>
         <p:txBody>
-          <a:bodyPr wrap="square" lIns="0" rIns="0" tIns="0" bIns="0" anchor="t">
+          <a:bodyPr wrap="square" lIns="0" tIns="0" rIns="0" bIns="0" anchor="t">
             <a:spAutoFit/>
           </a:bodyPr>
           <a:lstStyle/>
@@ -7110,7 +7300,7 @@
         <p:spPr>
           <a:xfrm>
             <a:off x="731520" y="4846320"/>
-            <a:ext cx="10972800" cy="1463040"/>
+            <a:ext cx="10972800" cy="923330"/>
           </a:xfrm>
           <a:prstGeom prst="rect">
             <a:avLst/>
@@ -7118,45 +7308,252 @@
           <a:noFill/>
         </p:spPr>
         <p:txBody>
-          <a:bodyPr wrap="square" lIns="0" rIns="0" tIns="0" bIns="0">
+          <a:bodyPr wrap="square" lIns="0" tIns="0" rIns="0" bIns="0">
             <a:spAutoFit/>
           </a:bodyPr>
           <a:lstStyle/>
           <a:p>
-            <a:pPr algn="l" indent="-228600" marL="228600">
+            <a:pPr marL="228600" indent="-228600" algn="l">
               <a:buChar char="•"/>
-              <a:buClr>
-                <a:srgbClr val="E74C3C"/>
-              </a:buClr>
             </a:pPr>
             <a:r>
-              <a:rPr sz="1500">
+              <a:rPr sz="1500" dirty="0" err="1">
                 <a:solidFill>
                   <a:srgbClr val="E8EAED"/>
                 </a:solidFill>
                 <a:latin typeface="PingFang TC"/>
               </a:rPr>
-              <a:t>TiDB / CockroachDB：K8s unlimit 保留率 81-87 %，屬可接受範圍；limit 情境大幅衰退反映資源壓縮</a:t>
-            </a:r>
-          </a:p>
-          <a:p>
-            <a:pPr algn="l" indent="-228600" marL="228600">
+              <a:t>TiDB</a:t>
+            </a:r>
+            <a:r>
+              <a:rPr sz="1500" dirty="0">
+                <a:solidFill>
+                  <a:srgbClr val="E8EAED"/>
+                </a:solidFill>
+                <a:latin typeface="PingFang TC"/>
+              </a:rPr>
+              <a:t> / CockroachDB：K8s </a:t>
+            </a:r>
+            <a:r>
+              <a:rPr sz="1500" dirty="0" err="1">
+                <a:solidFill>
+                  <a:srgbClr val="E8EAED"/>
+                </a:solidFill>
+                <a:latin typeface="PingFang TC"/>
+              </a:rPr>
+              <a:t>unlimit</a:t>
+            </a:r>
+            <a:r>
+              <a:rPr sz="1500" dirty="0">
+                <a:solidFill>
+                  <a:srgbClr val="E8EAED"/>
+                </a:solidFill>
+                <a:latin typeface="PingFang TC"/>
+              </a:rPr>
+              <a:t> </a:t>
+            </a:r>
+            <a:r>
+              <a:rPr sz="1500" dirty="0" err="1">
+                <a:solidFill>
+                  <a:srgbClr val="E8EAED"/>
+                </a:solidFill>
+                <a:latin typeface="PingFang TC"/>
+              </a:rPr>
+              <a:t>保留率</a:t>
+            </a:r>
+            <a:r>
+              <a:rPr sz="1500" dirty="0">
+                <a:solidFill>
+                  <a:srgbClr val="E8EAED"/>
+                </a:solidFill>
+                <a:latin typeface="PingFang TC"/>
+              </a:rPr>
+              <a:t> 81-87 %，</a:t>
+            </a:r>
+            <a:r>
+              <a:rPr sz="1500" dirty="0" err="1">
+                <a:solidFill>
+                  <a:srgbClr val="E8EAED"/>
+                </a:solidFill>
+                <a:latin typeface="PingFang TC"/>
+              </a:rPr>
+              <a:t>屬可接受範圍；limit</a:t>
+            </a:r>
+            <a:r>
+              <a:rPr sz="1500" dirty="0">
+                <a:solidFill>
+                  <a:srgbClr val="E8EAED"/>
+                </a:solidFill>
+                <a:latin typeface="PingFang TC"/>
+              </a:rPr>
+              <a:t> </a:t>
+            </a:r>
+            <a:r>
+              <a:rPr sz="1500" dirty="0" err="1">
+                <a:solidFill>
+                  <a:srgbClr val="E8EAED"/>
+                </a:solidFill>
+                <a:latin typeface="PingFang TC"/>
+              </a:rPr>
+              <a:t>情境大幅衰退反映資源壓縮</a:t>
+            </a:r>
+            <a:r>
+              <a:rPr lang="en-US" sz="1500" dirty="0" err="1">
+                <a:solidFill>
+                  <a:srgbClr val="E8EAED"/>
+                </a:solidFill>
+                <a:latin typeface="PingFang TC"/>
+              </a:rPr>
+              <a:t>，但可預期</a:t>
+            </a:r>
+            <a:r>
+              <a:rPr lang="en-US" sz="1500" dirty="0">
+                <a:solidFill>
+                  <a:srgbClr val="E8EAED"/>
+                </a:solidFill>
+                <a:latin typeface="PingFang TC"/>
+              </a:rPr>
+              <a:t> Scale </a:t>
+            </a:r>
+            <a:endParaRPr sz="1500" dirty="0">
+              <a:solidFill>
+                <a:srgbClr val="E8EAED"/>
+              </a:solidFill>
+              <a:latin typeface="PingFang TC"/>
+            </a:endParaRPr>
+          </a:p>
+          <a:p>
+            <a:pPr marL="228600" indent="-228600" algn="l">
               <a:buChar char="•"/>
-              <a:buClr>
-                <a:srgbClr val="E74C3C"/>
-              </a:buClr>
             </a:pPr>
             <a:r>
-              <a:rPr sz="1500" b="0">
+              <a:rPr sz="1500" b="0" dirty="0">
                 <a:solidFill>
                   <a:srgbClr val="E8EAED"/>
                 </a:solidFill>
                 <a:latin typeface="PingFang TC"/>
               </a:rPr>
-              <a:t>YugabyteDB：K8s unlimit 僅 19.2 %、p99 +669 %。成因推論：YSQL + DocDB 雙 process 在 K8s pod IPC + CPU contention 放大。</a:t>
-            </a:r>
-            <a:r>
-              <a:rPr sz="1500" b="1">
+              <a:t>YugabyteDB：K8s </a:t>
+            </a:r>
+            <a:r>
+              <a:rPr sz="1500" b="0" dirty="0" err="1">
+                <a:solidFill>
+                  <a:srgbClr val="E8EAED"/>
+                </a:solidFill>
+                <a:latin typeface="PingFang TC"/>
+              </a:rPr>
+              <a:t>unlimit</a:t>
+            </a:r>
+            <a:r>
+              <a:rPr sz="1500" b="0" dirty="0">
+                <a:solidFill>
+                  <a:srgbClr val="E8EAED"/>
+                </a:solidFill>
+                <a:latin typeface="PingFang TC"/>
+              </a:rPr>
+              <a:t> </a:t>
+            </a:r>
+            <a:r>
+              <a:rPr sz="1500" b="0" dirty="0" err="1">
+                <a:solidFill>
+                  <a:srgbClr val="E8EAED"/>
+                </a:solidFill>
+                <a:latin typeface="PingFang TC"/>
+              </a:rPr>
+              <a:t>僅</a:t>
+            </a:r>
+            <a:r>
+              <a:rPr sz="1500" b="0" dirty="0">
+                <a:solidFill>
+                  <a:srgbClr val="E8EAED"/>
+                </a:solidFill>
+                <a:latin typeface="PingFang TC"/>
+              </a:rPr>
+              <a:t> 19.2 %、p99 +669 %。</a:t>
+            </a:r>
+            <a:r>
+              <a:rPr sz="1500" b="0" dirty="0" err="1">
+                <a:solidFill>
+                  <a:srgbClr val="E8EAED"/>
+                </a:solidFill>
+                <a:latin typeface="PingFang TC"/>
+              </a:rPr>
+              <a:t>成因推論：YSQL</a:t>
+            </a:r>
+            <a:r>
+              <a:rPr sz="1500" b="0" dirty="0">
+                <a:solidFill>
+                  <a:srgbClr val="E8EAED"/>
+                </a:solidFill>
+                <a:latin typeface="PingFang TC"/>
+              </a:rPr>
+              <a:t> + </a:t>
+            </a:r>
+            <a:r>
+              <a:rPr sz="1500" b="0" dirty="0" err="1">
+                <a:solidFill>
+                  <a:srgbClr val="E8EAED"/>
+                </a:solidFill>
+                <a:latin typeface="PingFang TC"/>
+              </a:rPr>
+              <a:t>DocDB</a:t>
+            </a:r>
+            <a:r>
+              <a:rPr sz="1500" b="0" dirty="0">
+                <a:solidFill>
+                  <a:srgbClr val="E8EAED"/>
+                </a:solidFill>
+                <a:latin typeface="PingFang TC"/>
+              </a:rPr>
+              <a:t> </a:t>
+            </a:r>
+            <a:r>
+              <a:rPr sz="1500" b="0" dirty="0" err="1">
+                <a:solidFill>
+                  <a:srgbClr val="E8EAED"/>
+                </a:solidFill>
+                <a:latin typeface="PingFang TC"/>
+              </a:rPr>
+              <a:t>雙</a:t>
+            </a:r>
+            <a:r>
+              <a:rPr sz="1500" b="0" dirty="0">
+                <a:solidFill>
+                  <a:srgbClr val="E8EAED"/>
+                </a:solidFill>
+                <a:latin typeface="PingFang TC"/>
+              </a:rPr>
+              <a:t> process </a:t>
+            </a:r>
+            <a:r>
+              <a:rPr sz="1500" b="0" dirty="0" err="1">
+                <a:solidFill>
+                  <a:srgbClr val="E8EAED"/>
+                </a:solidFill>
+                <a:latin typeface="PingFang TC"/>
+              </a:rPr>
+              <a:t>在</a:t>
+            </a:r>
+            <a:r>
+              <a:rPr sz="1500" b="0" dirty="0">
+                <a:solidFill>
+                  <a:srgbClr val="E8EAED"/>
+                </a:solidFill>
+                <a:latin typeface="PingFang TC"/>
+              </a:rPr>
+              <a:t> K8s pod IPC + CPU contention </a:t>
+            </a:r>
+            <a:r>
+              <a:rPr sz="1500" b="0" dirty="0" err="1">
+                <a:solidFill>
+                  <a:srgbClr val="E8EAED"/>
+                </a:solidFill>
+                <a:latin typeface="PingFang TC"/>
+              </a:rPr>
+              <a:t>放大。</a:t>
+            </a:r>
+            <a:r>
+              <a:rPr sz="1500" b="1" dirty="0" err="1">
                 <a:solidFill>
                   <a:srgbClr val="B03A14"/>
                 </a:solidFill>
@@ -7164,22 +7561,43 @@
               </a:rPr>
               <a:t>成因未定位，列後續調校項</a:t>
             </a:r>
-          </a:p>
-          <a:p>
-            <a:pPr algn="l" indent="-228600" marL="228600">
+            <a:endParaRPr sz="1500" b="1" dirty="0">
+              <a:solidFill>
+                <a:srgbClr val="B03A14"/>
+              </a:solidFill>
+              <a:latin typeface="PingFang TC"/>
+            </a:endParaRPr>
+          </a:p>
+          <a:p>
+            <a:pPr marL="228600" indent="-228600" algn="l">
               <a:buChar char="•"/>
-              <a:buClr>
-                <a:srgbClr val="E74C3C"/>
-              </a:buClr>
             </a:pPr>
             <a:r>
-              <a:rPr sz="1500">
+              <a:rPr sz="1500" dirty="0">
                 <a:solidFill>
                   <a:srgbClr val="E8EAED"/>
                 </a:solidFill>
                 <a:latin typeface="PingFang TC"/>
               </a:rPr>
-              <a:t>S-BASE ↔ S-K8S 可直接比較（同 workload W=128 t=128）</a:t>
+              <a:t>S-BASE ↔ S-K8S </a:t>
+            </a:r>
+            <a:r>
+              <a:rPr sz="1500" dirty="0" err="1">
+                <a:solidFill>
+                  <a:srgbClr val="E8EAED"/>
+                </a:solidFill>
+                <a:latin typeface="PingFang TC"/>
+              </a:rPr>
+              <a:t>可直接比較（同</a:t>
+            </a:r>
+            <a:r>
+              <a:rPr sz="1500" dirty="0">
+                <a:solidFill>
+                  <a:srgbClr val="E8EAED"/>
+                </a:solidFill>
+                <a:latin typeface="PingFang TC"/>
+              </a:rPr>
+              <a:t> workload W=128 t=128）</a:t>
             </a:r>
           </a:p>
         </p:txBody>
@@ -7193,7 +7611,7 @@
 </file>
 
 <file path=ppt/slides/slide13.xml><?xml version="1.0" encoding="utf-8"?>
-<p:sld xmlns:a="http://schemas.openxmlformats.org/drawingml/2006/main" xmlns:p="http://schemas.openxmlformats.org/presentationml/2006/main" xmlns:r="http://schemas.openxmlformats.org/officeDocument/2006/relationships">
+<p:sld xmlns:a="http://schemas.openxmlformats.org/drawingml/2006/main" xmlns:r="http://schemas.openxmlformats.org/officeDocument/2006/relationships" xmlns:p="http://schemas.openxmlformats.org/presentationml/2006/main">
   <p:cSld>
     <p:bg>
       <p:bgPr>
@@ -7209,7 +7627,14 @@
         <p:cNvGrpSpPr/>
         <p:nvPr/>
       </p:nvGrpSpPr>
-      <p:grpSpPr/>
+      <p:grpSpPr>
+        <a:xfrm>
+          <a:off x="0" y="0"/>
+          <a:ext cx="0" cy="0"/>
+          <a:chOff x="0" y="0"/>
+          <a:chExt cx="0" cy="0"/>
+        </a:xfrm>
+      </p:grpSpPr>
       <p:sp>
         <p:nvSpPr>
           <p:cNvPr id="2" name="Rectangle 1"/>
@@ -7251,6 +7676,7 @@
           <a:lstStyle/>
           <a:p>
             <a:pPr algn="ctr"/>
+            <a:endParaRPr/>
           </a:p>
         </p:txBody>
       </p:sp>
@@ -7271,7 +7697,7 @@
           <a:noFill/>
         </p:spPr>
         <p:txBody>
-          <a:bodyPr wrap="square" lIns="0" rIns="0" tIns="0" bIns="0" anchor="t">
+          <a:bodyPr wrap="square" lIns="0" tIns="0" rIns="0" bIns="0" anchor="t">
             <a:spAutoFit/>
           </a:bodyPr>
           <a:lstStyle/>
@@ -7306,7 +7732,7 @@
           <a:noFill/>
         </p:spPr>
         <p:txBody>
-          <a:bodyPr wrap="square" lIns="0" rIns="0" tIns="0" bIns="0" anchor="t">
+          <a:bodyPr wrap="square" lIns="0" tIns="0" rIns="0" bIns="0" anchor="t">
             <a:spAutoFit/>
           </a:bodyPr>
           <a:lstStyle/>
@@ -7341,7 +7767,7 @@
           <a:noFill/>
         </p:spPr>
         <p:txBody>
-          <a:bodyPr wrap="square" lIns="0" rIns="0" tIns="0" bIns="0" anchor="t">
+          <a:bodyPr wrap="square" lIns="0" tIns="0" rIns="0" bIns="0" anchor="t">
             <a:spAutoFit/>
           </a:bodyPr>
           <a:lstStyle/>
@@ -7376,7 +7802,7 @@
           <a:noFill/>
         </p:spPr>
         <p:txBody>
-          <a:bodyPr wrap="square" lIns="0" rIns="0" tIns="0" bIns="0" anchor="t">
+          <a:bodyPr wrap="square" lIns="0" tIns="0" rIns="0" bIns="0" anchor="t">
             <a:spAutoFit/>
           </a:bodyPr>
           <a:lstStyle/>
@@ -7435,6 +7861,7 @@
           <a:lstStyle/>
           <a:p>
             <a:pPr algn="ctr"/>
+            <a:endParaRPr/>
           </a:p>
         </p:txBody>
       </p:sp>
@@ -7479,6 +7906,7 @@
           <a:lstStyle/>
           <a:p>
             <a:pPr algn="ctr"/>
+            <a:endParaRPr/>
           </a:p>
         </p:txBody>
       </p:sp>
@@ -7499,7 +7927,7 @@
           <a:noFill/>
         </p:spPr>
         <p:txBody>
-          <a:bodyPr wrap="square" lIns="0" rIns="0" tIns="0" bIns="0" anchor="ctr">
+          <a:bodyPr wrap="square" lIns="0" tIns="0" rIns="0" bIns="0" anchor="ctr">
             <a:spAutoFit/>
           </a:bodyPr>
           <a:lstStyle/>
@@ -7534,7 +7962,7 @@
           <a:noFill/>
         </p:spPr>
         <p:txBody>
-          <a:bodyPr wrap="square" lIns="0" rIns="0" tIns="0" bIns="0" anchor="t">
+          <a:bodyPr wrap="square" lIns="0" tIns="0" rIns="0" bIns="0" anchor="t">
             <a:spAutoFit/>
           </a:bodyPr>
           <a:lstStyle/>
@@ -7561,7 +7989,7 @@
         <p:spPr>
           <a:xfrm>
             <a:off x="822960" y="2286000"/>
-            <a:ext cx="10972800" cy="2011680"/>
+            <a:ext cx="10972800" cy="1723549"/>
           </a:xfrm>
           <a:prstGeom prst="rect">
             <a:avLst/>
@@ -7569,76 +7997,376 @@
           <a:noFill/>
         </p:spPr>
         <p:txBody>
-          <a:bodyPr wrap="square" lIns="0" rIns="0" tIns="0" bIns="0">
+          <a:bodyPr wrap="square" lIns="0" tIns="0" rIns="0" bIns="0">
             <a:spAutoFit/>
           </a:bodyPr>
           <a:lstStyle/>
           <a:p>
-            <a:pPr algn="l" indent="-228600" marL="228600">
+            <a:pPr marL="228600" indent="-228600" algn="l">
               <a:buChar char="•"/>
-              <a:buClr>
-                <a:srgbClr val="E74C3C"/>
-              </a:buClr>
             </a:pPr>
             <a:r>
-              <a:rPr sz="1600">
+              <a:rPr sz="1600" dirty="0" err="1">
                 <a:solidFill>
                   <a:srgbClr val="E8EAED"/>
                 </a:solidFill>
                 <a:latin typeface="PingFang TC"/>
               </a:rPr>
-              <a:t>技術議題定案（GCP 5 VM 拓樸、placement P-A/P-B、Chaos Engineering 等）</a:t>
-            </a:r>
-          </a:p>
-          <a:p>
-            <a:pPr algn="l" indent="-228600" marL="228600">
+              <a:t>技術議題定案（GCP</a:t>
+            </a:r>
+            <a:r>
+              <a:rPr sz="1600" dirty="0">
+                <a:solidFill>
+                  <a:srgbClr val="E8EAED"/>
+                </a:solidFill>
+                <a:latin typeface="PingFang TC"/>
+              </a:rPr>
+              <a:t> 5 VM </a:t>
+            </a:r>
+            <a:r>
+              <a:rPr sz="1600" dirty="0" err="1">
+                <a:solidFill>
+                  <a:srgbClr val="E8EAED"/>
+                </a:solidFill>
+                <a:latin typeface="PingFang TC"/>
+              </a:rPr>
+              <a:t>拓樸、placement</a:t>
+            </a:r>
+            <a:r>
+              <a:rPr sz="1600" dirty="0">
+                <a:solidFill>
+                  <a:srgbClr val="E8EAED"/>
+                </a:solidFill>
+                <a:latin typeface="PingFang TC"/>
+              </a:rPr>
+              <a:t> P-A/</a:t>
+            </a:r>
+            <a:r>
+              <a:rPr sz="1600" dirty="0" err="1">
+                <a:solidFill>
+                  <a:srgbClr val="E8EAED"/>
+                </a:solidFill>
+                <a:latin typeface="PingFang TC"/>
+              </a:rPr>
+              <a:t>P-B、Chaos</a:t>
+            </a:r>
+            <a:r>
+              <a:rPr sz="1600" dirty="0">
+                <a:solidFill>
+                  <a:srgbClr val="E8EAED"/>
+                </a:solidFill>
+                <a:latin typeface="PingFang TC"/>
+              </a:rPr>
+              <a:t> Engineering </a:t>
+            </a:r>
+            <a:r>
+              <a:rPr sz="1600" dirty="0" err="1">
+                <a:solidFill>
+                  <a:srgbClr val="E8EAED"/>
+                </a:solidFill>
+                <a:latin typeface="PingFang TC"/>
+              </a:rPr>
+              <a:t>等</a:t>
+            </a:r>
+            <a:r>
+              <a:rPr sz="1600" dirty="0">
+                <a:solidFill>
+                  <a:srgbClr val="E8EAED"/>
+                </a:solidFill>
+                <a:latin typeface="PingFang TC"/>
+              </a:rPr>
+              <a:t>）</a:t>
+            </a:r>
+            <a:endParaRPr lang="en-US" sz="1600" dirty="0">
+              <a:solidFill>
+                <a:srgbClr val="E8EAED"/>
+              </a:solidFill>
+              <a:latin typeface="PingFang TC"/>
+            </a:endParaRPr>
+          </a:p>
+          <a:p>
+            <a:pPr marL="228600" indent="-228600" algn="l">
               <a:buChar char="•"/>
-              <a:buClr>
-                <a:srgbClr val="E74C3C"/>
-              </a:buClr>
             </a:pPr>
-            <a:r>
-              <a:rPr sz="1600">
+            <a:endParaRPr sz="1600" dirty="0">
+              <a:solidFill>
+                <a:srgbClr val="E8EAED"/>
+              </a:solidFill>
+              <a:latin typeface="PingFang TC"/>
+            </a:endParaRPr>
+          </a:p>
+          <a:p>
+            <a:pPr marL="228600" indent="-228600">
+              <a:buChar char="•"/>
+            </a:pPr>
+            <a:r>
+              <a:rPr sz="1600" dirty="0" err="1">
                 <a:solidFill>
                   <a:srgbClr val="E8EAED"/>
                 </a:solidFill>
                 <a:latin typeface="PingFang TC"/>
               </a:rPr>
-              <a:t>IaC、playbook、suite scripts、chrony drift gate（drift_median 0.017 ms；時間偏移 between IDC &amp; GCP）</a:t>
-            </a:r>
-          </a:p>
-          <a:p>
-            <a:pPr algn="l" indent="-228600" marL="228600">
+              <a:t>IaC、playbook、suite</a:t>
+            </a:r>
+            <a:r>
+              <a:rPr sz="1600" dirty="0">
+                <a:solidFill>
+                  <a:srgbClr val="E8EAED"/>
+                </a:solidFill>
+                <a:latin typeface="PingFang TC"/>
+              </a:rPr>
+              <a:t> </a:t>
+            </a:r>
+            <a:r>
+              <a:rPr sz="1600" dirty="0" err="1">
+                <a:solidFill>
+                  <a:srgbClr val="E8EAED"/>
+                </a:solidFill>
+                <a:latin typeface="PingFang TC"/>
+              </a:rPr>
+              <a:t>scripts、chrony</a:t>
+            </a:r>
+            <a:r>
+              <a:rPr sz="1600" dirty="0">
+                <a:solidFill>
+                  <a:srgbClr val="E8EAED"/>
+                </a:solidFill>
+                <a:latin typeface="PingFang TC"/>
+              </a:rPr>
+              <a:t> drift </a:t>
+            </a:r>
+            <a:r>
+              <a:rPr sz="1600" dirty="0" err="1">
+                <a:solidFill>
+                  <a:srgbClr val="E8EAED"/>
+                </a:solidFill>
+                <a:latin typeface="PingFang TC"/>
+              </a:rPr>
+              <a:t>gate（IDC</a:t>
+            </a:r>
+            <a:r>
+              <a:rPr sz="1600" dirty="0">
+                <a:solidFill>
+                  <a:srgbClr val="E8EAED"/>
+                </a:solidFill>
+                <a:latin typeface="PingFang TC"/>
+              </a:rPr>
+              <a:t> &amp; GCP</a:t>
+            </a:r>
+            <a:r>
+              <a:rPr lang="en-US" sz="1600" dirty="0">
+                <a:solidFill>
+                  <a:srgbClr val="E8EAED"/>
+                </a:solidFill>
+                <a:latin typeface="PingFang TC"/>
+              </a:rPr>
+              <a:t> </a:t>
+            </a:r>
+            <a:r>
+              <a:rPr lang="zh-TW" altLang="en-US" sz="1600" dirty="0">
+                <a:solidFill>
+                  <a:srgbClr val="E8EAED"/>
+                </a:solidFill>
+                <a:latin typeface="PingFang TC"/>
+              </a:rPr>
+              <a:t>時間偏移</a:t>
+            </a:r>
+            <a:r>
+              <a:rPr lang="en-US" altLang="zh-TW" sz="1600" dirty="0">
+                <a:solidFill>
+                  <a:srgbClr val="E8EAED"/>
+                </a:solidFill>
+                <a:latin typeface="PingFang TC"/>
+              </a:rPr>
+              <a:t> </a:t>
+            </a:r>
+            <a:r>
+              <a:rPr lang="en" altLang="zh-TW" sz="1600" dirty="0">
+                <a:solidFill>
+                  <a:srgbClr val="E8EAED"/>
+                </a:solidFill>
+                <a:latin typeface="PingFang TC"/>
+              </a:rPr>
+              <a:t>0.017 </a:t>
+            </a:r>
+            <a:r>
+              <a:rPr lang="en" altLang="zh-TW" sz="1600" dirty="0" err="1">
+                <a:solidFill>
+                  <a:srgbClr val="E8EAED"/>
+                </a:solidFill>
+                <a:latin typeface="PingFang TC"/>
+              </a:rPr>
+              <a:t>ms</a:t>
+            </a:r>
+            <a:r>
+              <a:rPr sz="1600" dirty="0">
+                <a:solidFill>
+                  <a:srgbClr val="E8EAED"/>
+                </a:solidFill>
+                <a:latin typeface="PingFang TC"/>
+              </a:rPr>
+              <a:t>）</a:t>
+            </a:r>
+            <a:endParaRPr lang="en-US" sz="1600" dirty="0">
+              <a:solidFill>
+                <a:srgbClr val="E8EAED"/>
+              </a:solidFill>
+              <a:latin typeface="PingFang TC"/>
+            </a:endParaRPr>
+          </a:p>
+          <a:p>
+            <a:pPr marL="228600" indent="-228600" algn="l">
               <a:buChar char="•"/>
-              <a:buClr>
-                <a:srgbClr val="E74C3C"/>
-              </a:buClr>
             </a:pPr>
-            <a:r>
-              <a:rPr sz="1600">
+            <a:endParaRPr sz="1600" dirty="0">
+              <a:solidFill>
+                <a:srgbClr val="E8EAED"/>
+              </a:solidFill>
+              <a:latin typeface="PingFang TC"/>
+            </a:endParaRPr>
+          </a:p>
+          <a:p>
+            <a:pPr marL="228600" indent="-228600" algn="l">
+              <a:buChar char="•"/>
+            </a:pPr>
+            <a:r>
+              <a:rPr sz="1600" dirty="0">
                 <a:solidFill>
                   <a:srgbClr val="E8EAED"/>
                 </a:solidFill>
                 <a:latin typeface="PingFang TC"/>
               </a:rPr>
-              <a:t>06-18〜06-19：修正 IaC / 防火牆 / YugabyteDB placement，三家 DB / 六節點前期測試驗證</a:t>
-            </a:r>
-          </a:p>
-          <a:p>
-            <a:pPr algn="l" indent="-228600" marL="228600">
+              <a:t>06-18〜06-19：修正 </a:t>
+            </a:r>
+            <a:r>
+              <a:rPr sz="1600" dirty="0" err="1">
+                <a:solidFill>
+                  <a:srgbClr val="E8EAED"/>
+                </a:solidFill>
+                <a:latin typeface="PingFang TC"/>
+              </a:rPr>
+              <a:t>IaC</a:t>
+            </a:r>
+            <a:r>
+              <a:rPr sz="1600" dirty="0">
+                <a:solidFill>
+                  <a:srgbClr val="E8EAED"/>
+                </a:solidFill>
+                <a:latin typeface="PingFang TC"/>
+              </a:rPr>
+              <a:t> / </a:t>
+            </a:r>
+            <a:r>
+              <a:rPr sz="1600" dirty="0" err="1">
+                <a:solidFill>
+                  <a:srgbClr val="E8EAED"/>
+                </a:solidFill>
+                <a:latin typeface="PingFang TC"/>
+              </a:rPr>
+              <a:t>防火牆</a:t>
+            </a:r>
+            <a:r>
+              <a:rPr sz="1600" dirty="0">
+                <a:solidFill>
+                  <a:srgbClr val="E8EAED"/>
+                </a:solidFill>
+                <a:latin typeface="PingFang TC"/>
+              </a:rPr>
+              <a:t> / </a:t>
+            </a:r>
+            <a:r>
+              <a:rPr sz="1600" dirty="0" err="1">
+                <a:solidFill>
+                  <a:srgbClr val="E8EAED"/>
+                </a:solidFill>
+                <a:latin typeface="PingFang TC"/>
+              </a:rPr>
+              <a:t>YugabyteDB</a:t>
+            </a:r>
+            <a:r>
+              <a:rPr sz="1600" dirty="0">
+                <a:solidFill>
+                  <a:srgbClr val="E8EAED"/>
+                </a:solidFill>
+                <a:latin typeface="PingFang TC"/>
+              </a:rPr>
+              <a:t> </a:t>
+            </a:r>
+            <a:r>
+              <a:rPr sz="1600" dirty="0" err="1">
+                <a:solidFill>
+                  <a:srgbClr val="E8EAED"/>
+                </a:solidFill>
+                <a:latin typeface="PingFang TC"/>
+              </a:rPr>
+              <a:t>placement，三家</a:t>
+            </a:r>
+            <a:r>
+              <a:rPr sz="1600" dirty="0">
+                <a:solidFill>
+                  <a:srgbClr val="E8EAED"/>
+                </a:solidFill>
+                <a:latin typeface="PingFang TC"/>
+              </a:rPr>
+              <a:t> DB / </a:t>
+            </a:r>
+            <a:r>
+              <a:rPr sz="1600" dirty="0" err="1">
+                <a:solidFill>
+                  <a:srgbClr val="E8EAED"/>
+                </a:solidFill>
+                <a:latin typeface="PingFang TC"/>
+              </a:rPr>
+              <a:t>六節點前期測試驗證</a:t>
+            </a:r>
+            <a:endParaRPr lang="en-US" sz="1600" dirty="0">
+              <a:solidFill>
+                <a:srgbClr val="E8EAED"/>
+              </a:solidFill>
+              <a:latin typeface="PingFang TC"/>
+            </a:endParaRPr>
+          </a:p>
+          <a:p>
+            <a:pPr marL="228600" indent="-228600" algn="l">
               <a:buChar char="•"/>
-              <a:buClr>
-                <a:srgbClr val="E74C3C"/>
-              </a:buClr>
             </a:pPr>
-            <a:r>
-              <a:rPr sz="1600">
+            <a:endParaRPr sz="1600" dirty="0">
+              <a:solidFill>
+                <a:srgbClr val="E8EAED"/>
+              </a:solidFill>
+              <a:latin typeface="PingFang TC"/>
+            </a:endParaRPr>
+          </a:p>
+          <a:p>
+            <a:pPr marL="228600" indent="-228600" algn="l">
+              <a:buChar char="•"/>
+            </a:pPr>
+            <a:r>
+              <a:rPr sz="1600" dirty="0">
                 <a:solidFill>
                   <a:srgbClr val="E8EAED"/>
                 </a:solidFill>
                 <a:latin typeface="PingFang TC"/>
               </a:rPr>
-              <a:t>06-21〜06-22：Determinism v2 — 同 cluster R1-R5、scheduler / balancer freeze</a:t>
+              <a:t>06-21〜06-22：Determinism v2 — </a:t>
+            </a:r>
+            <a:r>
+              <a:rPr sz="1600" dirty="0" err="1">
+                <a:solidFill>
+                  <a:srgbClr val="E8EAED"/>
+                </a:solidFill>
+                <a:latin typeface="PingFang TC"/>
+              </a:rPr>
+              <a:t>同</a:t>
+            </a:r>
+            <a:r>
+              <a:rPr sz="1600" dirty="0">
+                <a:solidFill>
+                  <a:srgbClr val="E8EAED"/>
+                </a:solidFill>
+                <a:latin typeface="PingFang TC"/>
+              </a:rPr>
+              <a:t> cluster R1-R5、scheduler / balancer freeze</a:t>
             </a:r>
           </a:p>
         </p:txBody>
@@ -7660,7 +8388,7 @@
           <a:noFill/>
         </p:spPr>
         <p:txBody>
-          <a:bodyPr wrap="square" lIns="0" rIns="0" tIns="0" bIns="0" anchor="t">
+          <a:bodyPr wrap="square" lIns="0" tIns="0" rIns="0" bIns="0" anchor="t">
             <a:spAutoFit/>
           </a:bodyPr>
           <a:lstStyle/>
@@ -7687,7 +8415,7 @@
         <p:spPr>
           <a:xfrm>
             <a:off x="822960" y="4846320"/>
-            <a:ext cx="10972800" cy="1463040"/>
+            <a:ext cx="10972800" cy="1231106"/>
           </a:xfrm>
           <a:prstGeom prst="rect">
             <a:avLst/>
@@ -7695,60 +8423,226 @@
           <a:noFill/>
         </p:spPr>
         <p:txBody>
-          <a:bodyPr wrap="square" lIns="0" rIns="0" tIns="0" bIns="0">
+          <a:bodyPr wrap="square" lIns="0" tIns="0" rIns="0" bIns="0">
             <a:spAutoFit/>
           </a:bodyPr>
           <a:lstStyle/>
           <a:p>
-            <a:pPr algn="l" indent="-228600" marL="228600">
+            <a:pPr marL="228600" indent="-228600" algn="l">
               <a:buChar char="•"/>
-              <a:buClr>
-                <a:srgbClr val="E74C3C"/>
-              </a:buClr>
             </a:pPr>
             <a:r>
-              <a:rPr sz="1600">
+              <a:rPr sz="1600" dirty="0" err="1">
                 <a:solidFill>
                   <a:srgbClr val="E8EAED"/>
                 </a:solidFill>
                 <a:latin typeface="PingFang TC"/>
               </a:rPr>
-              <a:t>調度 scheduler (開/關)、round-only runner、Warmup、Placement (replica / lease 位置)、測試結果彙整</a:t>
-            </a:r>
-          </a:p>
-          <a:p>
-            <a:pPr algn="l" indent="-228600" marL="228600">
+              <a:t>調度</a:t>
+            </a:r>
+            <a:r>
+              <a:rPr sz="1600" dirty="0">
+                <a:solidFill>
+                  <a:srgbClr val="E8EAED"/>
+                </a:solidFill>
+                <a:latin typeface="PingFang TC"/>
+              </a:rPr>
+              <a:t> scheduler (</a:t>
+            </a:r>
+            <a:r>
+              <a:rPr sz="1600" dirty="0" err="1">
+                <a:solidFill>
+                  <a:srgbClr val="E8EAED"/>
+                </a:solidFill>
+                <a:latin typeface="PingFang TC"/>
+              </a:rPr>
+              <a:t>開</a:t>
+            </a:r>
+            <a:r>
+              <a:rPr sz="1600" dirty="0">
+                <a:solidFill>
+                  <a:srgbClr val="E8EAED"/>
+                </a:solidFill>
+                <a:latin typeface="PingFang TC"/>
+              </a:rPr>
+              <a:t>/</a:t>
+            </a:r>
+            <a:r>
+              <a:rPr sz="1600" dirty="0" err="1">
+                <a:solidFill>
+                  <a:srgbClr val="E8EAED"/>
+                </a:solidFill>
+                <a:latin typeface="PingFang TC"/>
+              </a:rPr>
+              <a:t>關</a:t>
+            </a:r>
+            <a:r>
+              <a:rPr sz="1600" dirty="0">
+                <a:solidFill>
+                  <a:srgbClr val="E8EAED"/>
+                </a:solidFill>
+                <a:latin typeface="PingFang TC"/>
+              </a:rPr>
+              <a:t>)、round-only </a:t>
+            </a:r>
+            <a:r>
+              <a:rPr sz="1600" dirty="0" err="1">
+                <a:solidFill>
+                  <a:srgbClr val="E8EAED"/>
+                </a:solidFill>
+                <a:latin typeface="PingFang TC"/>
+              </a:rPr>
+              <a:t>runner、Warmup、Placement</a:t>
+            </a:r>
+            <a:r>
+              <a:rPr sz="1600" dirty="0">
+                <a:solidFill>
+                  <a:srgbClr val="E8EAED"/>
+                </a:solidFill>
+                <a:latin typeface="PingFang TC"/>
+              </a:rPr>
+              <a:t> (replica / lease </a:t>
+            </a:r>
+            <a:r>
+              <a:rPr sz="1600" dirty="0" err="1">
+                <a:solidFill>
+                  <a:srgbClr val="E8EAED"/>
+                </a:solidFill>
+                <a:latin typeface="PingFang TC"/>
+              </a:rPr>
+              <a:t>位置</a:t>
+            </a:r>
+            <a:r>
+              <a:rPr sz="1600" dirty="0">
+                <a:solidFill>
+                  <a:srgbClr val="E8EAED"/>
+                </a:solidFill>
+                <a:latin typeface="PingFang TC"/>
+              </a:rPr>
+              <a:t>)、</a:t>
+            </a:r>
+            <a:r>
+              <a:rPr sz="1600" dirty="0" err="1">
+                <a:solidFill>
+                  <a:srgbClr val="E8EAED"/>
+                </a:solidFill>
+                <a:latin typeface="PingFang TC"/>
+              </a:rPr>
+              <a:t>測試結果彙整</a:t>
+            </a:r>
+            <a:endParaRPr lang="en-US" sz="1600" dirty="0">
+              <a:solidFill>
+                <a:srgbClr val="E8EAED"/>
+              </a:solidFill>
+              <a:latin typeface="PingFang TC"/>
+            </a:endParaRPr>
+          </a:p>
+          <a:p>
+            <a:pPr marL="228600" indent="-228600" algn="l">
               <a:buChar char="•"/>
-              <a:buClr>
-                <a:srgbClr val="E74C3C"/>
-              </a:buClr>
             </a:pPr>
-            <a:r>
-              <a:rPr sz="1600">
+            <a:endParaRPr sz="1600" dirty="0">
+              <a:solidFill>
+                <a:srgbClr val="E8EAED"/>
+              </a:solidFill>
+              <a:latin typeface="PingFang TC"/>
+            </a:endParaRPr>
+          </a:p>
+          <a:p>
+            <a:pPr marL="228600" indent="-228600" algn="l">
+              <a:buChar char="•"/>
+            </a:pPr>
+            <a:r>
+              <a:rPr sz="1600" dirty="0" err="1">
                 <a:solidFill>
                   <a:srgbClr val="E8EAED"/>
                 </a:solidFill>
                 <a:latin typeface="PingFang TC"/>
               </a:rPr>
-              <a:t>回到 W=128 正式基準量測</a:t>
-            </a:r>
-          </a:p>
-          <a:p>
-            <a:pPr algn="l" indent="-228600" marL="228600">
+              <a:t>回到</a:t>
+            </a:r>
+            <a:r>
+              <a:rPr sz="1600" dirty="0">
+                <a:solidFill>
+                  <a:srgbClr val="E8EAED"/>
+                </a:solidFill>
+                <a:latin typeface="PingFang TC"/>
+              </a:rPr>
+              <a:t> W=128 </a:t>
+            </a:r>
+            <a:r>
+              <a:rPr sz="1600" dirty="0" err="1">
+                <a:solidFill>
+                  <a:srgbClr val="E8EAED"/>
+                </a:solidFill>
+                <a:latin typeface="PingFang TC"/>
+              </a:rPr>
+              <a:t>正式基準量測</a:t>
+            </a:r>
+            <a:endParaRPr lang="en-US" sz="1600" dirty="0">
+              <a:solidFill>
+                <a:srgbClr val="E8EAED"/>
+              </a:solidFill>
+              <a:latin typeface="PingFang TC"/>
+            </a:endParaRPr>
+          </a:p>
+          <a:p>
+            <a:pPr marL="228600" indent="-228600" algn="l">
               <a:buChar char="•"/>
-              <a:buClr>
-                <a:srgbClr val="E74C3C"/>
-              </a:buClr>
             </a:pPr>
-            <a:r>
-              <a:rPr sz="1600">
+            <a:endParaRPr sz="1600" dirty="0">
+              <a:solidFill>
+                <a:srgbClr val="E8EAED"/>
+              </a:solidFill>
+              <a:latin typeface="PingFang TC"/>
+            </a:endParaRPr>
+          </a:p>
+          <a:p>
+            <a:pPr marL="228600" indent="-228600" algn="l">
+              <a:buChar char="•"/>
+            </a:pPr>
+            <a:r>
+              <a:rPr sz="1600" dirty="0">
                 <a:solidFill>
                   <a:srgbClr val="E8EAED"/>
                 </a:solidFill>
                 <a:latin typeface="PingFang TC"/>
               </a:rPr>
-              <a:t>Failover 與 Chaos Engineering 實際驗證</a:t>
-            </a:r>
+              <a:t>Failover </a:t>
+            </a:r>
+            <a:r>
+              <a:rPr sz="1600" dirty="0" err="1">
+                <a:solidFill>
+                  <a:srgbClr val="E8EAED"/>
+                </a:solidFill>
+                <a:latin typeface="PingFang TC"/>
+              </a:rPr>
+              <a:t>與</a:t>
+            </a:r>
+            <a:r>
+              <a:rPr sz="1600" dirty="0">
+                <a:solidFill>
+                  <a:srgbClr val="E8EAED"/>
+                </a:solidFill>
+                <a:latin typeface="PingFang TC"/>
+              </a:rPr>
+              <a:t> Chaos Engineering </a:t>
+            </a:r>
+            <a:r>
+              <a:rPr sz="1600" dirty="0" err="1">
+                <a:solidFill>
+                  <a:srgbClr val="E8EAED"/>
+                </a:solidFill>
+                <a:latin typeface="PingFang TC"/>
+              </a:rPr>
+              <a:t>實際驗證</a:t>
+            </a:r>
+            <a:endParaRPr sz="1600" dirty="0">
+              <a:solidFill>
+                <a:srgbClr val="E8EAED"/>
+              </a:solidFill>
+              <a:latin typeface="PingFang TC"/>
+            </a:endParaRPr>
           </a:p>
         </p:txBody>
       </p:sp>
@@ -7761,7 +8655,7 @@
 </file>
 
 <file path=ppt/slides/slide14.xml><?xml version="1.0" encoding="utf-8"?>
-<p:sld xmlns:a="http://schemas.openxmlformats.org/drawingml/2006/main" xmlns:p="http://schemas.openxmlformats.org/presentationml/2006/main" xmlns:r="http://schemas.openxmlformats.org/officeDocument/2006/relationships">
+<p:sld xmlns:a="http://schemas.openxmlformats.org/drawingml/2006/main" xmlns:r="http://schemas.openxmlformats.org/officeDocument/2006/relationships" xmlns:p="http://schemas.openxmlformats.org/presentationml/2006/main">
   <p:cSld>
     <p:bg>
       <p:bgPr>
@@ -7777,7 +8671,14 @@
         <p:cNvGrpSpPr/>
         <p:nvPr/>
       </p:nvGrpSpPr>
-      <p:grpSpPr/>
+      <p:grpSpPr>
+        <a:xfrm>
+          <a:off x="0" y="0"/>
+          <a:ext cx="0" cy="0"/>
+          <a:chOff x="0" y="0"/>
+          <a:chExt cx="0" cy="0"/>
+        </a:xfrm>
+      </p:grpSpPr>
       <p:sp>
         <p:nvSpPr>
           <p:cNvPr id="2" name="Rectangle 1"/>
@@ -7819,6 +8720,7 @@
           <a:lstStyle/>
           <a:p>
             <a:pPr algn="ctr"/>
+            <a:endParaRPr/>
           </a:p>
         </p:txBody>
       </p:sp>
@@ -7839,7 +8741,7 @@
           <a:noFill/>
         </p:spPr>
         <p:txBody>
-          <a:bodyPr wrap="square" lIns="0" rIns="0" tIns="0" bIns="0" anchor="t">
+          <a:bodyPr wrap="square" lIns="0" tIns="0" rIns="0" bIns="0" anchor="t">
             <a:spAutoFit/>
           </a:bodyPr>
           <a:lstStyle/>
@@ -7874,7 +8776,7 @@
           <a:noFill/>
         </p:spPr>
         <p:txBody>
-          <a:bodyPr wrap="square" lIns="0" rIns="0" tIns="0" bIns="0" anchor="t">
+          <a:bodyPr wrap="square" lIns="0" tIns="0" rIns="0" bIns="0" anchor="t">
             <a:spAutoFit/>
           </a:bodyPr>
           <a:lstStyle/>
@@ -7909,7 +8811,7 @@
           <a:noFill/>
         </p:spPr>
         <p:txBody>
-          <a:bodyPr wrap="square" lIns="0" rIns="0" tIns="0" bIns="0" anchor="t">
+          <a:bodyPr wrap="square" lIns="0" tIns="0" rIns="0" bIns="0" anchor="t">
             <a:spAutoFit/>
           </a:bodyPr>
           <a:lstStyle/>
@@ -7944,7 +8846,7 @@
           <a:noFill/>
         </p:spPr>
         <p:txBody>
-          <a:bodyPr wrap="square" lIns="0" rIns="0" tIns="0" bIns="0" anchor="t">
+          <a:bodyPr wrap="square" lIns="0" tIns="0" rIns="0" bIns="0" anchor="t">
             <a:spAutoFit/>
           </a:bodyPr>
           <a:lstStyle/>
@@ -8003,6 +8905,7 @@
           <a:lstStyle/>
           <a:p>
             <a:pPr algn="ctr"/>
+            <a:endParaRPr/>
           </a:p>
         </p:txBody>
       </p:sp>
@@ -8047,6 +8950,7 @@
           <a:lstStyle/>
           <a:p>
             <a:pPr algn="ctr"/>
+            <a:endParaRPr/>
           </a:p>
         </p:txBody>
       </p:sp>
@@ -8067,7 +8971,7 @@
           <a:noFill/>
         </p:spPr>
         <p:txBody>
-          <a:bodyPr wrap="square" lIns="0" rIns="0" tIns="0" bIns="0" anchor="ctr">
+          <a:bodyPr wrap="square" lIns="0" tIns="0" rIns="0" bIns="0" anchor="ctr">
             <a:spAutoFit/>
           </a:bodyPr>
           <a:lstStyle/>
@@ -8128,6 +9032,7 @@
           <a:lstStyle/>
           <a:p>
             <a:pPr algn="ctr"/>
+            <a:endParaRPr/>
           </a:p>
         </p:txBody>
       </p:sp>
@@ -8148,7 +9053,7 @@
           <a:noFill/>
         </p:spPr>
         <p:txBody>
-          <a:bodyPr wrap="square" lIns="0" rIns="0" tIns="0" bIns="0" anchor="t">
+          <a:bodyPr wrap="square" lIns="0" tIns="0" rIns="0" bIns="0" anchor="t">
             <a:spAutoFit/>
           </a:bodyPr>
           <a:lstStyle/>
@@ -8183,7 +9088,7 @@
           <a:noFill/>
         </p:spPr>
         <p:txBody>
-          <a:bodyPr wrap="square" lIns="0" rIns="0" tIns="0" bIns="0" anchor="t">
+          <a:bodyPr wrap="square" lIns="0" tIns="0" rIns="0" bIns="0" anchor="t">
             <a:spAutoFit/>
           </a:bodyPr>
           <a:lstStyle/>
@@ -8244,6 +9149,7 @@
           <a:lstStyle/>
           <a:p>
             <a:pPr algn="ctr"/>
+            <a:endParaRPr/>
           </a:p>
         </p:txBody>
       </p:sp>
@@ -8264,7 +9170,7 @@
           <a:noFill/>
         </p:spPr>
         <p:txBody>
-          <a:bodyPr wrap="square" lIns="0" rIns="0" tIns="0" bIns="0" anchor="ctr">
+          <a:bodyPr wrap="square" lIns="0" tIns="0" rIns="0" bIns="0" anchor="ctr">
             <a:spAutoFit/>
           </a:bodyPr>
           <a:lstStyle/>
@@ -8337,6 +9243,7 @@
           <a:lstStyle/>
           <a:p>
             <a:pPr algn="ctr"/>
+            <a:endParaRPr/>
           </a:p>
         </p:txBody>
       </p:sp>
@@ -8357,7 +9264,7 @@
           <a:noFill/>
         </p:spPr>
         <p:txBody>
-          <a:bodyPr wrap="square" lIns="0" rIns="0" tIns="0" bIns="0" anchor="ctr">
+          <a:bodyPr wrap="square" lIns="0" tIns="0" rIns="0" bIns="0" anchor="ctr">
             <a:spAutoFit/>
           </a:bodyPr>
           <a:lstStyle/>
@@ -8396,7 +9303,7 @@
         <p:spPr>
           <a:xfrm>
             <a:off x="777240" y="3657600"/>
-            <a:ext cx="5029200" cy="1188720"/>
+            <a:ext cx="5029200" cy="400110"/>
           </a:xfrm>
           <a:prstGeom prst="rect">
             <a:avLst/>
@@ -8404,68 +9311,99 @@
           <a:noFill/>
         </p:spPr>
         <p:txBody>
-          <a:bodyPr wrap="square" lIns="0" rIns="0" tIns="0" bIns="0">
+          <a:bodyPr wrap="square" lIns="0" tIns="0" rIns="0" bIns="0">
             <a:spAutoFit/>
           </a:bodyPr>
           <a:lstStyle/>
           <a:p>
-            <a:pPr algn="l" indent="-228600" marL="228600">
+            <a:pPr marL="228600" indent="-228600" algn="l">
               <a:buChar char="•"/>
-              <a:buClr>
-                <a:srgbClr val="E74C3C"/>
-              </a:buClr>
             </a:pPr>
             <a:r>
-              <a:rPr sz="1300">
+              <a:rPr sz="1300" dirty="0">
                 <a:solidFill>
                   <a:srgbClr val="E8EAED"/>
                 </a:solidFill>
                 <a:latin typeface="PingFang TC"/>
               </a:rPr>
-              <a:t>Quorum 在 IDC，GCP 不擋 commit</a:t>
-            </a:r>
-          </a:p>
-          <a:p>
-            <a:pPr algn="l" indent="-228600" marL="228600">
+              <a:t>Quorum </a:t>
+            </a:r>
+            <a:r>
+              <a:rPr sz="1300" dirty="0" err="1">
+                <a:solidFill>
+                  <a:srgbClr val="E8EAED"/>
+                </a:solidFill>
+                <a:latin typeface="PingFang TC"/>
+              </a:rPr>
+              <a:t>在</a:t>
+            </a:r>
+            <a:r>
+              <a:rPr sz="1300" dirty="0">
+                <a:solidFill>
+                  <a:srgbClr val="E8EAED"/>
+                </a:solidFill>
+                <a:latin typeface="PingFang TC"/>
+              </a:rPr>
+              <a:t> IDC，GCP </a:t>
+            </a:r>
+            <a:r>
+              <a:rPr sz="1300" dirty="0" err="1">
+                <a:solidFill>
+                  <a:srgbClr val="E8EAED"/>
+                </a:solidFill>
+                <a:latin typeface="PingFang TC"/>
+              </a:rPr>
+              <a:t>不擋</a:t>
+            </a:r>
+            <a:r>
+              <a:rPr sz="1300" dirty="0">
+                <a:solidFill>
+                  <a:srgbClr val="E8EAED"/>
+                </a:solidFill>
+                <a:latin typeface="PingFang TC"/>
+              </a:rPr>
+              <a:t> commit</a:t>
+            </a:r>
+          </a:p>
+          <a:p>
+            <a:pPr marL="228600" indent="-228600" algn="l">
               <a:buChar char="•"/>
-              <a:buClr>
-                <a:srgbClr val="E74C3C"/>
-              </a:buClr>
             </a:pPr>
             <a:r>
-              <a:rPr sz="1300">
+              <a:rPr sz="1300" dirty="0" err="1">
                 <a:solidFill>
                   <a:srgbClr val="E8EAED"/>
                 </a:solidFill>
                 <a:latin typeface="PingFang TC"/>
               </a:rPr>
-              <a:t>適用 workload：A-S（IDC main / GCP standby）</a:t>
-            </a:r>
-          </a:p>
-          <a:p>
-            <a:pPr algn="l" indent="-228600" marL="228600">
-              <a:buChar char="•"/>
-              <a:buClr>
-                <a:srgbClr val="E74C3C"/>
-              </a:buClr>
-            </a:pPr>
-            <a:r>
-              <a:rPr sz="1300" b="0">
+              <a:t>適用</a:t>
+            </a:r>
+            <a:r>
+              <a:rPr sz="1300" dirty="0">
                 <a:solidFill>
                   <a:srgbClr val="E8EAED"/>
                 </a:solidFill>
                 <a:latin typeface="PingFang TC"/>
               </a:rPr>
-              <a:t>預期 tpmC 衝擊：</a:t>
-            </a:r>
-            <a:r>
-              <a:rPr sz="1300" b="1">
-                <a:solidFill>
-                  <a:srgbClr val="F39C12"/>
-                </a:solidFill>
-                <a:latin typeface="PingFang TC"/>
-              </a:rPr>
-              <a:t>約 −10〜30 %</a:t>
+              <a:t> </a:t>
+            </a:r>
+            <a:r>
+              <a:rPr sz="1300" dirty="0" err="1">
+                <a:solidFill>
+                  <a:srgbClr val="E8EAED"/>
+                </a:solidFill>
+                <a:latin typeface="PingFang TC"/>
+              </a:rPr>
+              <a:t>workload：A-S（IDC</a:t>
+            </a:r>
+            <a:r>
+              <a:rPr sz="1300" dirty="0">
+                <a:solidFill>
+                  <a:srgbClr val="E8EAED"/>
+                </a:solidFill>
+                <a:latin typeface="PingFang TC"/>
+              </a:rPr>
+              <a:t> main / GCP standby）</a:t>
             </a:r>
           </a:p>
         </p:txBody>
@@ -8513,6 +9451,7 @@
           <a:lstStyle/>
           <a:p>
             <a:pPr algn="ctr"/>
+            <a:endParaRPr/>
           </a:p>
         </p:txBody>
       </p:sp>
@@ -8533,7 +9472,7 @@
           <a:noFill/>
         </p:spPr>
         <p:txBody>
-          <a:bodyPr wrap="square" lIns="0" rIns="0" tIns="0" bIns="0" anchor="t">
+          <a:bodyPr wrap="square" lIns="0" tIns="0" rIns="0" bIns="0" anchor="t">
             <a:spAutoFit/>
           </a:bodyPr>
           <a:lstStyle/>
@@ -8568,7 +9507,7 @@
           <a:noFill/>
         </p:spPr>
         <p:txBody>
-          <a:bodyPr wrap="square" lIns="0" rIns="0" tIns="0" bIns="0" anchor="t">
+          <a:bodyPr wrap="square" lIns="0" tIns="0" rIns="0" bIns="0" anchor="t">
             <a:spAutoFit/>
           </a:bodyPr>
           <a:lstStyle/>
@@ -8629,6 +9568,7 @@
           <a:lstStyle/>
           <a:p>
             <a:pPr algn="ctr"/>
+            <a:endParaRPr/>
           </a:p>
         </p:txBody>
       </p:sp>
@@ -8649,7 +9589,7 @@
           <a:noFill/>
         </p:spPr>
         <p:txBody>
-          <a:bodyPr wrap="square" lIns="0" rIns="0" tIns="0" bIns="0" anchor="ctr">
+          <a:bodyPr wrap="square" lIns="0" tIns="0" rIns="0" bIns="0" anchor="ctr">
             <a:spAutoFit/>
           </a:bodyPr>
           <a:lstStyle/>
@@ -8722,6 +9662,7 @@
           <a:lstStyle/>
           <a:p>
             <a:pPr algn="ctr"/>
+            <a:endParaRPr/>
           </a:p>
         </p:txBody>
       </p:sp>
@@ -8742,7 +9683,7 @@
           <a:noFill/>
         </p:spPr>
         <p:txBody>
-          <a:bodyPr wrap="square" lIns="0" rIns="0" tIns="0" bIns="0" anchor="ctr">
+          <a:bodyPr wrap="square" lIns="0" tIns="0" rIns="0" bIns="0" anchor="ctr">
             <a:spAutoFit/>
           </a:bodyPr>
           <a:lstStyle/>
@@ -8789,7 +9730,7 @@
           <a:noFill/>
         </p:spPr>
         <p:txBody>
-          <a:bodyPr wrap="square" lIns="0" rIns="0" tIns="0" bIns="0" anchor="t">
+          <a:bodyPr wrap="square" lIns="0" tIns="0" rIns="0" bIns="0" anchor="t">
             <a:spAutoFit/>
           </a:bodyPr>
           <a:lstStyle/>
@@ -8816,7 +9757,7 @@
         <p:spPr>
           <a:xfrm>
             <a:off x="6629400" y="3657600"/>
-            <a:ext cx="4846320" cy="1188720"/>
+            <a:ext cx="4846320" cy="400110"/>
           </a:xfrm>
           <a:prstGeom prst="rect">
             <a:avLst/>
@@ -8824,68 +9765,90 @@
           <a:noFill/>
         </p:spPr>
         <p:txBody>
-          <a:bodyPr wrap="square" lIns="0" rIns="0" tIns="0" bIns="0">
+          <a:bodyPr wrap="square" lIns="0" tIns="0" rIns="0" bIns="0">
             <a:spAutoFit/>
           </a:bodyPr>
           <a:lstStyle/>
           <a:p>
-            <a:pPr algn="l" indent="-228600" marL="228600">
+            <a:pPr marL="228600" indent="-228600" algn="l">
               <a:buChar char="•"/>
-              <a:buClr>
-                <a:srgbClr val="E74C3C"/>
-              </a:buClr>
             </a:pPr>
             <a:r>
-              <a:rPr sz="1300">
+              <a:rPr sz="1300" dirty="0" err="1">
                 <a:solidFill>
                   <a:srgbClr val="E8EAED"/>
                 </a:solidFill>
                 <a:latin typeface="PingFang TC"/>
               </a:rPr>
-              <a:t>寫入需 WAN quorum，commit latency = RTT</a:t>
-            </a:r>
-          </a:p>
-          <a:p>
-            <a:pPr algn="l" indent="-228600" marL="228600">
+              <a:t>寫入需</a:t>
+            </a:r>
+            <a:r>
+              <a:rPr sz="1300" dirty="0">
+                <a:solidFill>
+                  <a:srgbClr val="E8EAED"/>
+                </a:solidFill>
+                <a:latin typeface="PingFang TC"/>
+              </a:rPr>
+              <a:t> WAN </a:t>
+            </a:r>
+            <a:r>
+              <a:rPr sz="1300" dirty="0" err="1">
+                <a:solidFill>
+                  <a:srgbClr val="E8EAED"/>
+                </a:solidFill>
+                <a:latin typeface="PingFang TC"/>
+              </a:rPr>
+              <a:t>quorum，commit</a:t>
+            </a:r>
+            <a:r>
+              <a:rPr sz="1300" dirty="0">
+                <a:solidFill>
+                  <a:srgbClr val="E8EAED"/>
+                </a:solidFill>
+                <a:latin typeface="PingFang TC"/>
+              </a:rPr>
+              <a:t> latency = RTT</a:t>
+            </a:r>
+          </a:p>
+          <a:p>
+            <a:pPr marL="228600" indent="-228600" algn="l">
               <a:buChar char="•"/>
-              <a:buClr>
-                <a:srgbClr val="E74C3C"/>
-              </a:buClr>
             </a:pPr>
             <a:r>
-              <a:rPr sz="1300">
+              <a:rPr sz="1300" dirty="0" err="1">
                 <a:solidFill>
                   <a:srgbClr val="E8EAED"/>
                 </a:solidFill>
                 <a:latin typeface="PingFang TC"/>
               </a:rPr>
-              <a:t>適用 workload：A-A（雙寫）/ A-A-RO（IDC write, GCP read）</a:t>
-            </a:r>
-          </a:p>
-          <a:p>
-            <a:pPr algn="l" indent="-228600" marL="228600">
-              <a:buChar char="•"/>
-              <a:buClr>
-                <a:srgbClr val="E74C3C"/>
-              </a:buClr>
-            </a:pPr>
-            <a:r>
-              <a:rPr sz="1300" b="0">
+              <a:t>適用</a:t>
+            </a:r>
+            <a:r>
+              <a:rPr sz="1300" dirty="0">
                 <a:solidFill>
                   <a:srgbClr val="E8EAED"/>
                 </a:solidFill>
                 <a:latin typeface="PingFang TC"/>
               </a:rPr>
-              <a:t>預期 tpmC 衝擊：</a:t>
-            </a:r>
-            <a:r>
-              <a:rPr sz="1300" b="1">
-                <a:solidFill>
-                  <a:srgbClr val="B03A14"/>
-                </a:solidFill>
-                <a:latin typeface="PingFang TC"/>
-              </a:rPr>
-              <a:t>約 −30〜60 %</a:t>
+              <a:t> </a:t>
+            </a:r>
+            <a:r>
+              <a:rPr sz="1300" dirty="0" err="1">
+                <a:solidFill>
+                  <a:srgbClr val="E8EAED"/>
+                </a:solidFill>
+                <a:latin typeface="PingFang TC"/>
+              </a:rPr>
+              <a:t>workload：A-A（雙寫</a:t>
+            </a:r>
+            <a:r>
+              <a:rPr sz="1300" dirty="0">
+                <a:solidFill>
+                  <a:srgbClr val="E8EAED"/>
+                </a:solidFill>
+                <a:latin typeface="PingFang TC"/>
+              </a:rPr>
+              <a:t>）/ A-A-RO（IDC write, GCP read）</a:t>
             </a:r>
           </a:p>
         </p:txBody>
@@ -8907,7 +9870,7 @@
           <a:noFill/>
         </p:spPr>
         <p:txBody>
-          <a:bodyPr wrap="square" lIns="0" rIns="0" tIns="0" bIns="0" anchor="t">
+          <a:bodyPr wrap="square" lIns="0" tIns="0" rIns="0" bIns="0" anchor="t">
             <a:spAutoFit/>
           </a:bodyPr>
           <a:lstStyle/>
@@ -8930,41 +9893,6 @@
                 <a:latin typeface="PingFang TC"/>
               </a:rPr>
               <a:t>P-A 量「正常營運下的跨區 cost」；P-B 量「退化/failover 後的跨區 cost」</a:t>
-            </a:r>
-          </a:p>
-        </p:txBody>
-      </p:sp>
-      <p:sp>
-        <p:nvSpPr>
-          <p:cNvPr id="28" name="TextBox 27"/>
-          <p:cNvSpPr txBox="1"/>
-          <p:nvPr/>
-        </p:nvSpPr>
-        <p:spPr>
-          <a:xfrm>
-            <a:off x="548640" y="5623560"/>
-            <a:ext cx="11430000" cy="365760"/>
-          </a:xfrm>
-          <a:prstGeom prst="rect">
-            <a:avLst/>
-          </a:prstGeom>
-          <a:noFill/>
-        </p:spPr>
-        <p:txBody>
-          <a:bodyPr wrap="square" lIns="0" rIns="0" tIns="0" bIns="0" anchor="t">
-            <a:spAutoFit/>
-          </a:bodyPr>
-          <a:lstStyle/>
-          <a:p>
-            <a:pPr algn="l"/>
-            <a:r>
-              <a:rPr sz="1300" b="0">
-                <a:solidFill>
-                  <a:srgbClr val="A0A8B8"/>
-                </a:solidFill>
-                <a:latin typeface="PingFang TC"/>
-              </a:rPr>
-              <a:t>兩者相減 ≈ failover 觸發時的額外吞吐損失</a:t>
             </a:r>
           </a:p>
         </p:txBody>
@@ -8978,7 +9906,7 @@
 </file>
 
 <file path=ppt/slides/slide15.xml><?xml version="1.0" encoding="utf-8"?>
-<p:sld xmlns:a="http://schemas.openxmlformats.org/drawingml/2006/main" xmlns:p="http://schemas.openxmlformats.org/presentationml/2006/main" xmlns:r="http://schemas.openxmlformats.org/officeDocument/2006/relationships">
+<p:sld xmlns:a="http://schemas.openxmlformats.org/drawingml/2006/main" xmlns:r="http://schemas.openxmlformats.org/officeDocument/2006/relationships" xmlns:p="http://schemas.openxmlformats.org/presentationml/2006/main">
   <p:cSld>
     <p:bg>
       <p:bgPr>
@@ -8994,7 +9922,14 @@
         <p:cNvGrpSpPr/>
         <p:nvPr/>
       </p:nvGrpSpPr>
-      <p:grpSpPr/>
+      <p:grpSpPr>
+        <a:xfrm>
+          <a:off x="0" y="0"/>
+          <a:ext cx="0" cy="0"/>
+          <a:chOff x="0" y="0"/>
+          <a:chExt cx="0" cy="0"/>
+        </a:xfrm>
+      </p:grpSpPr>
       <p:sp>
         <p:nvSpPr>
           <p:cNvPr id="2" name="Rectangle 1"/>
@@ -9036,6 +9971,7 @@
           <a:lstStyle/>
           <a:p>
             <a:pPr algn="ctr"/>
+            <a:endParaRPr/>
           </a:p>
         </p:txBody>
       </p:sp>
@@ -9056,7 +9992,7 @@
           <a:noFill/>
         </p:spPr>
         <p:txBody>
-          <a:bodyPr wrap="square" lIns="0" rIns="0" tIns="0" bIns="0" anchor="t">
+          <a:bodyPr wrap="square" lIns="0" tIns="0" rIns="0" bIns="0" anchor="t">
             <a:spAutoFit/>
           </a:bodyPr>
           <a:lstStyle/>
@@ -9091,7 +10027,7 @@
           <a:noFill/>
         </p:spPr>
         <p:txBody>
-          <a:bodyPr wrap="square" lIns="0" rIns="0" tIns="0" bIns="0" anchor="t">
+          <a:bodyPr wrap="square" lIns="0" tIns="0" rIns="0" bIns="0" anchor="t">
             <a:spAutoFit/>
           </a:bodyPr>
           <a:lstStyle/>
@@ -9126,7 +10062,7 @@
           <a:noFill/>
         </p:spPr>
         <p:txBody>
-          <a:bodyPr wrap="square" lIns="0" rIns="0" tIns="0" bIns="0" anchor="t">
+          <a:bodyPr wrap="square" lIns="0" tIns="0" rIns="0" bIns="0" anchor="t">
             <a:spAutoFit/>
           </a:bodyPr>
           <a:lstStyle/>
@@ -9161,7 +10097,7 @@
           <a:noFill/>
         </p:spPr>
         <p:txBody>
-          <a:bodyPr wrap="square" lIns="0" rIns="0" tIns="0" bIns="0" anchor="t">
+          <a:bodyPr wrap="square" lIns="0" tIns="0" rIns="0" bIns="0" anchor="t">
             <a:spAutoFit/>
           </a:bodyPr>
           <a:lstStyle/>
@@ -9220,6 +10156,7 @@
           <a:lstStyle/>
           <a:p>
             <a:pPr algn="ctr"/>
+            <a:endParaRPr/>
           </a:p>
         </p:txBody>
       </p:sp>
@@ -9264,6 +10201,7 @@
           <a:lstStyle/>
           <a:p>
             <a:pPr algn="ctr"/>
+            <a:endParaRPr/>
           </a:p>
         </p:txBody>
       </p:sp>
@@ -9284,7 +10222,7 @@
           <a:noFill/>
         </p:spPr>
         <p:txBody>
-          <a:bodyPr wrap="square" lIns="0" rIns="0" tIns="0" bIns="0" anchor="ctr">
+          <a:bodyPr wrap="square" lIns="0" tIns="0" rIns="0" bIns="0" anchor="ctr">
             <a:spAutoFit/>
           </a:bodyPr>
           <a:lstStyle/>
@@ -9321,19 +10259,67 @@
                 <a:tableStyleId>{5C22544A-7EE6-4342-B048-85BDC9FD1C3A}</a:tableStyleId>
               </a:tblPr>
               <a:tblGrid>
-                <a:gridCol w="2309058"/>
-                <a:gridCol w="1058318"/>
-                <a:gridCol w="1058318"/>
-                <a:gridCol w="1058318"/>
-                <a:gridCol w="1058318"/>
-                <a:gridCol w="1058318"/>
-                <a:gridCol w="2212847"/>
-                <a:gridCol w="1250740"/>
+                <a:gridCol w="2309058">
+                  <a:extLst>
+                    <a:ext uri="{9D8B030D-6E8A-4147-A177-3AD203B41FA5}">
+                      <a16:colId xmlns:a16="http://schemas.microsoft.com/office/drawing/2014/main" val="20000"/>
+                    </a:ext>
+                  </a:extLst>
+                </a:gridCol>
+                <a:gridCol w="1058318">
+                  <a:extLst>
+                    <a:ext uri="{9D8B030D-6E8A-4147-A177-3AD203B41FA5}">
+                      <a16:colId xmlns:a16="http://schemas.microsoft.com/office/drawing/2014/main" val="20001"/>
+                    </a:ext>
+                  </a:extLst>
+                </a:gridCol>
+                <a:gridCol w="1058318">
+                  <a:extLst>
+                    <a:ext uri="{9D8B030D-6E8A-4147-A177-3AD203B41FA5}">
+                      <a16:colId xmlns:a16="http://schemas.microsoft.com/office/drawing/2014/main" val="20002"/>
+                    </a:ext>
+                  </a:extLst>
+                </a:gridCol>
+                <a:gridCol w="1058318">
+                  <a:extLst>
+                    <a:ext uri="{9D8B030D-6E8A-4147-A177-3AD203B41FA5}">
+                      <a16:colId xmlns:a16="http://schemas.microsoft.com/office/drawing/2014/main" val="20003"/>
+                    </a:ext>
+                  </a:extLst>
+                </a:gridCol>
+                <a:gridCol w="1058318">
+                  <a:extLst>
+                    <a:ext uri="{9D8B030D-6E8A-4147-A177-3AD203B41FA5}">
+                      <a16:colId xmlns:a16="http://schemas.microsoft.com/office/drawing/2014/main" val="20004"/>
+                    </a:ext>
+                  </a:extLst>
+                </a:gridCol>
+                <a:gridCol w="1058318">
+                  <a:extLst>
+                    <a:ext uri="{9D8B030D-6E8A-4147-A177-3AD203B41FA5}">
+                      <a16:colId xmlns:a16="http://schemas.microsoft.com/office/drawing/2014/main" val="20005"/>
+                    </a:ext>
+                  </a:extLst>
+                </a:gridCol>
+                <a:gridCol w="2212847">
+                  <a:extLst>
+                    <a:ext uri="{9D8B030D-6E8A-4147-A177-3AD203B41FA5}">
+                      <a16:colId xmlns:a16="http://schemas.microsoft.com/office/drawing/2014/main" val="20006"/>
+                    </a:ext>
+                  </a:extLst>
+                </a:gridCol>
+                <a:gridCol w="1250740">
+                  <a:extLst>
+                    <a:ext uri="{9D8B030D-6E8A-4147-A177-3AD203B41FA5}">
+                      <a16:colId xmlns:a16="http://schemas.microsoft.com/office/drawing/2014/main" val="20007"/>
+                    </a:ext>
+                  </a:extLst>
+                </a:gridCol>
               </a:tblGrid>
               <a:tr h="480060">
                 <a:tc>
                   <a:txBody>
-                    <a:bodyPr wrap="square"/>
+                    <a:bodyPr/>
                     <a:lstStyle/>
                     <a:p>
                       <a:pPr algn="ctr"/>
@@ -9348,7 +10334,7 @@
                       </a:r>
                     </a:p>
                   </a:txBody>
-                  <a:tcPr marL="73152" marR="73152" marT="45720" marB="45720" anchor="ctr">
+                  <a:tcPr marL="73152" marR="73152" anchor="ctr">
                     <a:solidFill>
                       <a:srgbClr val="D8DDE6"/>
                     </a:solidFill>
@@ -9356,7 +10342,7 @@
                 </a:tc>
                 <a:tc>
                   <a:txBody>
-                    <a:bodyPr wrap="square"/>
+                    <a:bodyPr/>
                     <a:lstStyle/>
                     <a:p>
                       <a:pPr algn="ctr"/>
@@ -9371,7 +10357,7 @@
                       </a:r>
                     </a:p>
                   </a:txBody>
-                  <a:tcPr marL="73152" marR="73152" marT="45720" marB="45720" anchor="ctr">
+                  <a:tcPr marL="73152" marR="73152" anchor="ctr">
                     <a:solidFill>
                       <a:srgbClr val="D8DDE6"/>
                     </a:solidFill>
@@ -9379,7 +10365,7 @@
                 </a:tc>
                 <a:tc>
                   <a:txBody>
-                    <a:bodyPr wrap="square"/>
+                    <a:bodyPr/>
                     <a:lstStyle/>
                     <a:p>
                       <a:pPr algn="ctr"/>
@@ -9394,7 +10380,7 @@
                       </a:r>
                     </a:p>
                   </a:txBody>
-                  <a:tcPr marL="73152" marR="73152" marT="45720" marB="45720" anchor="ctr">
+                  <a:tcPr marL="73152" marR="73152" anchor="ctr">
                     <a:solidFill>
                       <a:srgbClr val="D8DDE6"/>
                     </a:solidFill>
@@ -9402,7 +10388,7 @@
                 </a:tc>
                 <a:tc>
                   <a:txBody>
-                    <a:bodyPr wrap="square"/>
+                    <a:bodyPr/>
                     <a:lstStyle/>
                     <a:p>
                       <a:pPr algn="ctr"/>
@@ -9417,7 +10403,7 @@
                       </a:r>
                     </a:p>
                   </a:txBody>
-                  <a:tcPr marL="73152" marR="73152" marT="45720" marB="45720" anchor="ctr">
+                  <a:tcPr marL="73152" marR="73152" anchor="ctr">
                     <a:solidFill>
                       <a:srgbClr val="D8DDE6"/>
                     </a:solidFill>
@@ -9425,7 +10411,7 @@
                 </a:tc>
                 <a:tc>
                   <a:txBody>
-                    <a:bodyPr wrap="square"/>
+                    <a:bodyPr/>
                     <a:lstStyle/>
                     <a:p>
                       <a:pPr algn="ctr"/>
@@ -9440,7 +10426,7 @@
                       </a:r>
                     </a:p>
                   </a:txBody>
-                  <a:tcPr marL="73152" marR="73152" marT="45720" marB="45720" anchor="ctr">
+                  <a:tcPr marL="73152" marR="73152" anchor="ctr">
                     <a:solidFill>
                       <a:srgbClr val="D8DDE6"/>
                     </a:solidFill>
@@ -9448,7 +10434,7 @@
                 </a:tc>
                 <a:tc>
                   <a:txBody>
-                    <a:bodyPr wrap="square"/>
+                    <a:bodyPr/>
                     <a:lstStyle/>
                     <a:p>
                       <a:pPr algn="ctr"/>
@@ -9463,7 +10449,7 @@
                       </a:r>
                     </a:p>
                   </a:txBody>
-                  <a:tcPr marL="73152" marR="73152" marT="45720" marB="45720" anchor="ctr">
+                  <a:tcPr marL="73152" marR="73152" anchor="ctr">
                     <a:solidFill>
                       <a:srgbClr val="D8DDE6"/>
                     </a:solidFill>
@@ -9471,7 +10457,7 @@
                 </a:tc>
                 <a:tc>
                   <a:txBody>
-                    <a:bodyPr wrap="square"/>
+                    <a:bodyPr/>
                     <a:lstStyle/>
                     <a:p>
                       <a:pPr algn="ctr"/>
@@ -9486,7 +10472,7 @@
                       </a:r>
                     </a:p>
                   </a:txBody>
-                  <a:tcPr marL="73152" marR="73152" marT="45720" marB="45720" anchor="ctr">
+                  <a:tcPr marL="73152" marR="73152" anchor="ctr">
                     <a:solidFill>
                       <a:srgbClr val="D8DDE6"/>
                     </a:solidFill>
@@ -9494,7 +10480,7 @@
                 </a:tc>
                 <a:tc>
                   <a:txBody>
-                    <a:bodyPr wrap="square"/>
+                    <a:bodyPr/>
                     <a:lstStyle/>
                     <a:p>
                       <a:pPr algn="ctr"/>
@@ -9509,17 +10495,22 @@
                       </a:r>
                     </a:p>
                   </a:txBody>
-                  <a:tcPr marL="73152" marR="73152" marT="45720" marB="45720" anchor="ctr">
+                  <a:tcPr marL="73152" marR="73152" anchor="ctr">
                     <a:solidFill>
                       <a:srgbClr val="D8DDE6"/>
                     </a:solidFill>
                   </a:tcPr>
                 </a:tc>
+                <a:extLst>
+                  <a:ext uri="{0D108BD9-81ED-4DB2-BD59-A6C34878D82A}">
+                    <a16:rowId xmlns:a16="http://schemas.microsoft.com/office/drawing/2014/main" val="10000"/>
+                  </a:ext>
+                </a:extLst>
               </a:tr>
               <a:tr h="480060">
                 <a:tc>
                   <a:txBody>
-                    <a:bodyPr wrap="square"/>
+                    <a:bodyPr/>
                     <a:lstStyle/>
                     <a:p>
                       <a:pPr algn="l"/>
@@ -9534,7 +10525,7 @@
                       </a:r>
                     </a:p>
                   </a:txBody>
-                  <a:tcPr marL="73152" marR="73152" marT="45720" marB="45720" anchor="ctr">
+                  <a:tcPr marL="73152" marR="73152" anchor="ctr">
                     <a:solidFill>
                       <a:srgbClr val="FFFFFF"/>
                     </a:solidFill>
@@ -9542,7 +10533,7 @@
                 </a:tc>
                 <a:tc>
                   <a:txBody>
-                    <a:bodyPr wrap="square"/>
+                    <a:bodyPr/>
                     <a:lstStyle/>
                     <a:p>
                       <a:pPr algn="l"/>
@@ -9557,7 +10548,7 @@
                       </a:r>
                     </a:p>
                   </a:txBody>
-                  <a:tcPr marL="73152" marR="73152" marT="45720" marB="45720" anchor="ctr">
+                  <a:tcPr marL="73152" marR="73152" anchor="ctr">
                     <a:solidFill>
                       <a:srgbClr val="FFFFFF"/>
                     </a:solidFill>
@@ -9565,7 +10556,7 @@
                 </a:tc>
                 <a:tc>
                   <a:txBody>
-                    <a:bodyPr wrap="square"/>
+                    <a:bodyPr/>
                     <a:lstStyle/>
                     <a:p>
                       <a:pPr algn="l"/>
@@ -9580,7 +10571,7 @@
                       </a:r>
                     </a:p>
                   </a:txBody>
-                  <a:tcPr marL="73152" marR="73152" marT="45720" marB="45720" anchor="ctr">
+                  <a:tcPr marL="73152" marR="73152" anchor="ctr">
                     <a:solidFill>
                       <a:srgbClr val="FFFFFF"/>
                     </a:solidFill>
@@ -9588,7 +10579,7 @@
                 </a:tc>
                 <a:tc>
                   <a:txBody>
-                    <a:bodyPr wrap="square"/>
+                    <a:bodyPr/>
                     <a:lstStyle/>
                     <a:p>
                       <a:pPr algn="l"/>
@@ -9603,7 +10594,7 @@
                       </a:r>
                     </a:p>
                   </a:txBody>
-                  <a:tcPr marL="73152" marR="73152" marT="45720" marB="45720" anchor="ctr">
+                  <a:tcPr marL="73152" marR="73152" anchor="ctr">
                     <a:solidFill>
                       <a:srgbClr val="FFFFFF"/>
                     </a:solidFill>
@@ -9611,7 +10602,7 @@
                 </a:tc>
                 <a:tc>
                   <a:txBody>
-                    <a:bodyPr wrap="square"/>
+                    <a:bodyPr/>
                     <a:lstStyle/>
                     <a:p>
                       <a:pPr algn="l"/>
@@ -9626,7 +10617,7 @@
                       </a:r>
                     </a:p>
                   </a:txBody>
-                  <a:tcPr marL="73152" marR="73152" marT="45720" marB="45720" anchor="ctr">
+                  <a:tcPr marL="73152" marR="73152" anchor="ctr">
                     <a:solidFill>
                       <a:srgbClr val="FFFFFF"/>
                     </a:solidFill>
@@ -9634,7 +10625,7 @@
                 </a:tc>
                 <a:tc>
                   <a:txBody>
-                    <a:bodyPr wrap="square"/>
+                    <a:bodyPr/>
                     <a:lstStyle/>
                     <a:p>
                       <a:pPr algn="l"/>
@@ -9649,7 +10640,7 @@
                       </a:r>
                     </a:p>
                   </a:txBody>
-                  <a:tcPr marL="73152" marR="73152" marT="45720" marB="45720" anchor="ctr">
+                  <a:tcPr marL="73152" marR="73152" anchor="ctr">
                     <a:solidFill>
                       <a:srgbClr val="FFFFFF"/>
                     </a:solidFill>
@@ -9657,7 +10648,7 @@
                 </a:tc>
                 <a:tc>
                   <a:txBody>
-                    <a:bodyPr wrap="square"/>
+                    <a:bodyPr/>
                     <a:lstStyle/>
                     <a:p>
                       <a:pPr algn="l"/>
@@ -9672,7 +10663,7 @@
                       </a:r>
                     </a:p>
                   </a:txBody>
-                  <a:tcPr marL="73152" marR="73152" marT="45720" marB="45720" anchor="ctr">
+                  <a:tcPr marL="73152" marR="73152" anchor="ctr">
                     <a:solidFill>
                       <a:srgbClr val="FFFFFF"/>
                     </a:solidFill>
@@ -9680,7 +10671,7 @@
                 </a:tc>
                 <a:tc>
                   <a:txBody>
-                    <a:bodyPr wrap="square"/>
+                    <a:bodyPr/>
                     <a:lstStyle/>
                     <a:p>
                       <a:pPr algn="l"/>
@@ -9695,17 +10686,22 @@
                       </a:r>
                     </a:p>
                   </a:txBody>
-                  <a:tcPr marL="73152" marR="73152" marT="45720" marB="45720" anchor="ctr">
+                  <a:tcPr marL="73152" marR="73152" anchor="ctr">
                     <a:solidFill>
                       <a:srgbClr val="FFFFFF"/>
                     </a:solidFill>
                   </a:tcPr>
                 </a:tc>
+                <a:extLst>
+                  <a:ext uri="{0D108BD9-81ED-4DB2-BD59-A6C34878D82A}">
+                    <a16:rowId xmlns:a16="http://schemas.microsoft.com/office/drawing/2014/main" val="10001"/>
+                  </a:ext>
+                </a:extLst>
               </a:tr>
               <a:tr h="480060">
                 <a:tc>
                   <a:txBody>
-                    <a:bodyPr wrap="square"/>
+                    <a:bodyPr/>
                     <a:lstStyle/>
                     <a:p>
                       <a:pPr algn="l"/>
@@ -9720,7 +10716,7 @@
                       </a:r>
                     </a:p>
                   </a:txBody>
-                  <a:tcPr marL="73152" marR="73152" marT="45720" marB="45720" anchor="ctr">
+                  <a:tcPr marL="73152" marR="73152" anchor="ctr">
                     <a:solidFill>
                       <a:srgbClr val="F1F3F6"/>
                     </a:solidFill>
@@ -9728,7 +10724,7 @@
                 </a:tc>
                 <a:tc>
                   <a:txBody>
-                    <a:bodyPr wrap="square"/>
+                    <a:bodyPr/>
                     <a:lstStyle/>
                     <a:p>
                       <a:pPr algn="l"/>
@@ -9743,7 +10739,7 @@
                       </a:r>
                     </a:p>
                   </a:txBody>
-                  <a:tcPr marL="73152" marR="73152" marT="45720" marB="45720" anchor="ctr">
+                  <a:tcPr marL="73152" marR="73152" anchor="ctr">
                     <a:solidFill>
                       <a:srgbClr val="F1F3F6"/>
                     </a:solidFill>
@@ -9751,7 +10747,7 @@
                 </a:tc>
                 <a:tc>
                   <a:txBody>
-                    <a:bodyPr wrap="square"/>
+                    <a:bodyPr/>
                     <a:lstStyle/>
                     <a:p>
                       <a:pPr algn="l"/>
@@ -9766,7 +10762,7 @@
                       </a:r>
                     </a:p>
                   </a:txBody>
-                  <a:tcPr marL="73152" marR="73152" marT="45720" marB="45720" anchor="ctr">
+                  <a:tcPr marL="73152" marR="73152" anchor="ctr">
                     <a:solidFill>
                       <a:srgbClr val="F1F3F6"/>
                     </a:solidFill>
@@ -9774,7 +10770,7 @@
                 </a:tc>
                 <a:tc>
                   <a:txBody>
-                    <a:bodyPr wrap="square"/>
+                    <a:bodyPr/>
                     <a:lstStyle/>
                     <a:p>
                       <a:pPr algn="l"/>
@@ -9789,7 +10785,7 @@
                       </a:r>
                     </a:p>
                   </a:txBody>
-                  <a:tcPr marL="73152" marR="73152" marT="45720" marB="45720" anchor="ctr">
+                  <a:tcPr marL="73152" marR="73152" anchor="ctr">
                     <a:solidFill>
                       <a:srgbClr val="F1F3F6"/>
                     </a:solidFill>
@@ -9797,7 +10793,7 @@
                 </a:tc>
                 <a:tc>
                   <a:txBody>
-                    <a:bodyPr wrap="square"/>
+                    <a:bodyPr/>
                     <a:lstStyle/>
                     <a:p>
                       <a:pPr algn="l"/>
@@ -9812,7 +10808,7 @@
                       </a:r>
                     </a:p>
                   </a:txBody>
-                  <a:tcPr marL="73152" marR="73152" marT="45720" marB="45720" anchor="ctr">
+                  <a:tcPr marL="73152" marR="73152" anchor="ctr">
                     <a:solidFill>
                       <a:srgbClr val="F1F3F6"/>
                     </a:solidFill>
@@ -9820,7 +10816,7 @@
                 </a:tc>
                 <a:tc>
                   <a:txBody>
-                    <a:bodyPr wrap="square"/>
+                    <a:bodyPr/>
                     <a:lstStyle/>
                     <a:p>
                       <a:pPr algn="l"/>
@@ -9835,7 +10831,7 @@
                       </a:r>
                     </a:p>
                   </a:txBody>
-                  <a:tcPr marL="73152" marR="73152" marT="45720" marB="45720" anchor="ctr">
+                  <a:tcPr marL="73152" marR="73152" anchor="ctr">
                     <a:solidFill>
                       <a:srgbClr val="F1F3F6"/>
                     </a:solidFill>
@@ -9843,7 +10839,7 @@
                 </a:tc>
                 <a:tc>
                   <a:txBody>
-                    <a:bodyPr wrap="square"/>
+                    <a:bodyPr/>
                     <a:lstStyle/>
                     <a:p>
                       <a:pPr algn="l"/>
@@ -9858,7 +10854,7 @@
                       </a:r>
                     </a:p>
                   </a:txBody>
-                  <a:tcPr marL="73152" marR="73152" marT="45720" marB="45720" anchor="ctr">
+                  <a:tcPr marL="73152" marR="73152" anchor="ctr">
                     <a:solidFill>
                       <a:srgbClr val="F1F3F6"/>
                     </a:solidFill>
@@ -9866,7 +10862,7 @@
                 </a:tc>
                 <a:tc>
                   <a:txBody>
-                    <a:bodyPr wrap="square"/>
+                    <a:bodyPr/>
                     <a:lstStyle/>
                     <a:p>
                       <a:pPr algn="l"/>
@@ -9881,17 +10877,22 @@
                       </a:r>
                     </a:p>
                   </a:txBody>
-                  <a:tcPr marL="73152" marR="73152" marT="45720" marB="45720" anchor="ctr">
+                  <a:tcPr marL="73152" marR="73152" anchor="ctr">
                     <a:solidFill>
                       <a:srgbClr val="F1F3F6"/>
                     </a:solidFill>
                   </a:tcPr>
                 </a:tc>
+                <a:extLst>
+                  <a:ext uri="{0D108BD9-81ED-4DB2-BD59-A6C34878D82A}">
+                    <a16:rowId xmlns:a16="http://schemas.microsoft.com/office/drawing/2014/main" val="10002"/>
+                  </a:ext>
+                </a:extLst>
               </a:tr>
               <a:tr h="480060">
                 <a:tc>
                   <a:txBody>
-                    <a:bodyPr wrap="square"/>
+                    <a:bodyPr/>
                     <a:lstStyle/>
                     <a:p>
                       <a:pPr algn="l"/>
@@ -9906,7 +10907,7 @@
                       </a:r>
                     </a:p>
                   </a:txBody>
-                  <a:tcPr marL="73152" marR="73152" marT="45720" marB="45720" anchor="ctr">
+                  <a:tcPr marL="73152" marR="73152" anchor="ctr">
                     <a:solidFill>
                       <a:srgbClr val="FFFFFF"/>
                     </a:solidFill>
@@ -9914,7 +10915,7 @@
                 </a:tc>
                 <a:tc>
                   <a:txBody>
-                    <a:bodyPr wrap="square"/>
+                    <a:bodyPr/>
                     <a:lstStyle/>
                     <a:p>
                       <a:pPr algn="l"/>
@@ -9929,7 +10930,7 @@
                       </a:r>
                     </a:p>
                   </a:txBody>
-                  <a:tcPr marL="73152" marR="73152" marT="45720" marB="45720" anchor="ctr">
+                  <a:tcPr marL="73152" marR="73152" anchor="ctr">
                     <a:solidFill>
                       <a:srgbClr val="FFFFFF"/>
                     </a:solidFill>
@@ -9937,7 +10938,7 @@
                 </a:tc>
                 <a:tc>
                   <a:txBody>
-                    <a:bodyPr wrap="square"/>
+                    <a:bodyPr/>
                     <a:lstStyle/>
                     <a:p>
                       <a:pPr algn="l"/>
@@ -9952,7 +10953,7 @@
                       </a:r>
                     </a:p>
                   </a:txBody>
-                  <a:tcPr marL="73152" marR="73152" marT="45720" marB="45720" anchor="ctr">
+                  <a:tcPr marL="73152" marR="73152" anchor="ctr">
                     <a:solidFill>
                       <a:srgbClr val="FFFFFF"/>
                     </a:solidFill>
@@ -9960,7 +10961,7 @@
                 </a:tc>
                 <a:tc>
                   <a:txBody>
-                    <a:bodyPr wrap="square"/>
+                    <a:bodyPr/>
                     <a:lstStyle/>
                     <a:p>
                       <a:pPr algn="l"/>
@@ -9975,7 +10976,7 @@
                       </a:r>
                     </a:p>
                   </a:txBody>
-                  <a:tcPr marL="73152" marR="73152" marT="45720" marB="45720" anchor="ctr">
+                  <a:tcPr marL="73152" marR="73152" anchor="ctr">
                     <a:solidFill>
                       <a:srgbClr val="FFFFFF"/>
                     </a:solidFill>
@@ -9983,7 +10984,7 @@
                 </a:tc>
                 <a:tc>
                   <a:txBody>
-                    <a:bodyPr wrap="square"/>
+                    <a:bodyPr/>
                     <a:lstStyle/>
                     <a:p>
                       <a:pPr algn="l"/>
@@ -9998,7 +10999,7 @@
                       </a:r>
                     </a:p>
                   </a:txBody>
-                  <a:tcPr marL="73152" marR="73152" marT="45720" marB="45720" anchor="ctr">
+                  <a:tcPr marL="73152" marR="73152" anchor="ctr">
                     <a:solidFill>
                       <a:srgbClr val="FFFFFF"/>
                     </a:solidFill>
@@ -10006,7 +11007,7 @@
                 </a:tc>
                 <a:tc>
                   <a:txBody>
-                    <a:bodyPr wrap="square"/>
+                    <a:bodyPr/>
                     <a:lstStyle/>
                     <a:p>
                       <a:pPr algn="l"/>
@@ -10021,7 +11022,7 @@
                       </a:r>
                     </a:p>
                   </a:txBody>
-                  <a:tcPr marL="73152" marR="73152" marT="45720" marB="45720" anchor="ctr">
+                  <a:tcPr marL="73152" marR="73152" anchor="ctr">
                     <a:solidFill>
                       <a:srgbClr val="FFFFFF"/>
                     </a:solidFill>
@@ -10029,7 +11030,7 @@
                 </a:tc>
                 <a:tc>
                   <a:txBody>
-                    <a:bodyPr wrap="square"/>
+                    <a:bodyPr/>
                     <a:lstStyle/>
                     <a:p>
                       <a:pPr algn="l"/>
@@ -10044,7 +11045,7 @@
                       </a:r>
                     </a:p>
                   </a:txBody>
-                  <a:tcPr marL="73152" marR="73152" marT="45720" marB="45720" anchor="ctr">
+                  <a:tcPr marL="73152" marR="73152" anchor="ctr">
                     <a:solidFill>
                       <a:srgbClr val="FFFFFF"/>
                     </a:solidFill>
@@ -10052,7 +11053,7 @@
                 </a:tc>
                 <a:tc>
                   <a:txBody>
-                    <a:bodyPr wrap="square"/>
+                    <a:bodyPr/>
                     <a:lstStyle/>
                     <a:p>
                       <a:pPr algn="l"/>
@@ -10067,12 +11068,17 @@
                       </a:r>
                     </a:p>
                   </a:txBody>
-                  <a:tcPr marL="73152" marR="73152" marT="45720" marB="45720" anchor="ctr">
+                  <a:tcPr marL="73152" marR="73152" anchor="ctr">
                     <a:solidFill>
                       <a:srgbClr val="FFFFFF"/>
                     </a:solidFill>
                   </a:tcPr>
                 </a:tc>
+                <a:extLst>
+                  <a:ext uri="{0D108BD9-81ED-4DB2-BD59-A6C34878D82A}">
+                    <a16:rowId xmlns:a16="http://schemas.microsoft.com/office/drawing/2014/main" val="10003"/>
+                  </a:ext>
+                </a:extLst>
               </a:tr>
             </a:tbl>
           </a:graphicData>
@@ -10095,7 +11101,7 @@
           <a:noFill/>
         </p:spPr>
         <p:txBody>
-          <a:bodyPr wrap="square" lIns="0" rIns="0" tIns="0" bIns="0" anchor="t">
+          <a:bodyPr wrap="square" lIns="0" tIns="0" rIns="0" bIns="0" anchor="t">
             <a:spAutoFit/>
           </a:bodyPr>
           <a:lstStyle/>
@@ -10130,16 +11136,13 @@
           <a:noFill/>
         </p:spPr>
         <p:txBody>
-          <a:bodyPr wrap="square" lIns="0" rIns="0" tIns="0" bIns="0">
+          <a:bodyPr wrap="square" lIns="0" tIns="0" rIns="0" bIns="0">
             <a:spAutoFit/>
           </a:bodyPr>
           <a:lstStyle/>
           <a:p>
-            <a:pPr algn="l" indent="-228600" marL="228600">
+            <a:pPr marL="228600" indent="-228600" algn="l">
               <a:buChar char="•"/>
-              <a:buClr>
-                <a:srgbClr val="E74C3C"/>
-              </a:buClr>
             </a:pPr>
             <a:r>
               <a:rPr sz="1300">
@@ -10152,11 +11155,8 @@
             </a:r>
           </a:p>
           <a:p>
-            <a:pPr algn="l" indent="-228600" marL="228600">
+            <a:pPr marL="228600" indent="-228600" algn="l">
               <a:buChar char="•"/>
-              <a:buClr>
-                <a:srgbClr val="E74C3C"/>
-              </a:buClr>
             </a:pPr>
             <a:r>
               <a:rPr sz="1300">
@@ -10169,11 +11169,8 @@
             </a:r>
           </a:p>
           <a:p>
-            <a:pPr algn="l" indent="-228600" marL="228600">
+            <a:pPr marL="228600" indent="-228600" algn="l">
               <a:buChar char="•"/>
-              <a:buClr>
-                <a:srgbClr val="E74C3C"/>
-              </a:buClr>
             </a:pPr>
             <a:r>
               <a:rPr sz="1300">
@@ -10186,11 +11183,8 @@
             </a:r>
           </a:p>
           <a:p>
-            <a:pPr algn="l" indent="-228600" marL="228600">
+            <a:pPr marL="228600" indent="-228600" algn="l">
               <a:buChar char="•"/>
-              <a:buClr>
-                <a:srgbClr val="E74C3C"/>
-              </a:buClr>
             </a:pPr>
             <a:r>
               <a:rPr sz="1300">
@@ -10213,7 +11207,7 @@
         <p:spPr>
           <a:xfrm>
             <a:off x="548640" y="6035040"/>
-            <a:ext cx="11430000" cy="365760"/>
+            <a:ext cx="11430000" cy="200055"/>
           </a:xfrm>
           <a:prstGeom prst="rect">
             <a:avLst/>
@@ -10221,47 +11215,83 @@
           <a:noFill/>
         </p:spPr>
         <p:txBody>
-          <a:bodyPr wrap="square" lIns="0" rIns="0" tIns="0" bIns="0" anchor="t">
+          <a:bodyPr wrap="square" lIns="0" tIns="0" rIns="0" bIns="0" anchor="t">
             <a:spAutoFit/>
           </a:bodyPr>
           <a:lstStyle/>
           <a:p>
             <a:pPr algn="l"/>
             <a:r>
-              <a:rPr sz="1300" b="1">
+              <a:rPr sz="1300" b="1" dirty="0">
                 <a:solidFill>
                   <a:srgbClr val="F1C40F"/>
                 </a:solidFill>
                 <a:latin typeface="PingFang TC"/>
               </a:rPr>
-              <a:t>⚠ Caveat：</a:t>
-            </a:r>
-            <a:r>
-              <a:rPr sz="1300" b="0">
+              <a:t>⚠ </a:t>
+            </a:r>
+            <a:r>
+              <a:rPr sz="1300" b="1" dirty="0" err="1">
+                <a:solidFill>
+                  <a:srgbClr val="F1C40F"/>
+                </a:solidFill>
+                <a:latin typeface="PingFang TC"/>
+              </a:rPr>
+              <a:t>Caveat：</a:t>
+            </a:r>
+            <a:r>
+              <a:rPr sz="1300" b="0" dirty="0" err="1">
                 <a:solidFill>
                   <a:srgbClr val="A0A8B8"/>
                 </a:solidFill>
                 <a:latin typeface="PingFang TC"/>
               </a:rPr>
-              <a:t>W=4 framework / contention 驗證 ≠ 正式基準；R2-R5（YBDB R3-R5）CV ≤ 5 % 已建立但</a:t>
-            </a:r>
-            <a:r>
-              <a:rPr sz="1300" b="1">
-                <a:solidFill>
-                  <a:srgbClr val="B03A14"/>
-                </a:solidFill>
-                <a:latin typeface="PingFang TC"/>
-              </a:rPr>
-              <a:t>不可作跨家排名</a:t>
-            </a:r>
-            <a:r>
-              <a:rPr sz="1300" b="0">
+              <a:t>W</a:t>
+            </a:r>
+            <a:r>
+              <a:rPr sz="1300" b="0" dirty="0">
                 <a:solidFill>
                   <a:srgbClr val="A0A8B8"/>
                 </a:solidFill>
                 <a:latin typeface="PingFang TC"/>
               </a:rPr>
-              <a:t>；後續需回 W=128。</a:t>
+              <a:t>=4 framework </a:t>
+            </a:r>
+            <a:r>
+              <a:rPr sz="1300" b="0" dirty="0" err="1">
+                <a:solidFill>
+                  <a:srgbClr val="A0A8B8"/>
+                </a:solidFill>
+                <a:latin typeface="PingFang TC"/>
+              </a:rPr>
+              <a:t>驗證</a:t>
+            </a:r>
+            <a:r>
+              <a:rPr sz="1300" b="0" dirty="0">
+                <a:solidFill>
+                  <a:srgbClr val="A0A8B8"/>
+                </a:solidFill>
+                <a:latin typeface="PingFang TC"/>
+              </a:rPr>
+              <a:t> ≠ 正式基準；R2-R5（YBDB R3-R5）CV ≤ 5 % </a:t>
+            </a:r>
+            <a:r>
+              <a:rPr sz="1300" b="0" dirty="0" err="1">
+                <a:solidFill>
+                  <a:srgbClr val="A0A8B8"/>
+                </a:solidFill>
+                <a:latin typeface="PingFang TC"/>
+              </a:rPr>
+              <a:t>已建立；後續需回</a:t>
+            </a:r>
+            <a:r>
+              <a:rPr sz="1300" b="0" dirty="0">
+                <a:solidFill>
+                  <a:srgbClr val="A0A8B8"/>
+                </a:solidFill>
+                <a:latin typeface="PingFang TC"/>
+              </a:rPr>
+              <a:t> W=128。</a:t>
             </a:r>
           </a:p>
         </p:txBody>
@@ -10275,7 +11305,7 @@
 </file>
 
 <file path=ppt/slides/slide16.xml><?xml version="1.0" encoding="utf-8"?>
-<p:sld xmlns:a="http://schemas.openxmlformats.org/drawingml/2006/main" xmlns:p="http://schemas.openxmlformats.org/presentationml/2006/main" xmlns:r="http://schemas.openxmlformats.org/officeDocument/2006/relationships">
+<p:sld xmlns:a="http://schemas.openxmlformats.org/drawingml/2006/main" xmlns:r="http://schemas.openxmlformats.org/officeDocument/2006/relationships" xmlns:p="http://schemas.openxmlformats.org/presentationml/2006/main">
   <p:cSld>
     <p:bg>
       <p:bgPr>
@@ -10291,7 +11321,14 @@
         <p:cNvGrpSpPr/>
         <p:nvPr/>
       </p:nvGrpSpPr>
-      <p:grpSpPr/>
+      <p:grpSpPr>
+        <a:xfrm>
+          <a:off x="0" y="0"/>
+          <a:ext cx="0" cy="0"/>
+          <a:chOff x="0" y="0"/>
+          <a:chExt cx="0" cy="0"/>
+        </a:xfrm>
+      </p:grpSpPr>
       <p:sp>
         <p:nvSpPr>
           <p:cNvPr id="2" name="Rectangle 1"/>
@@ -10333,6 +11370,7 @@
           <a:lstStyle/>
           <a:p>
             <a:pPr algn="ctr"/>
+            <a:endParaRPr/>
           </a:p>
         </p:txBody>
       </p:sp>
@@ -10353,7 +11391,7 @@
           <a:noFill/>
         </p:spPr>
         <p:txBody>
-          <a:bodyPr wrap="square" lIns="0" rIns="0" tIns="0" bIns="0" anchor="t">
+          <a:bodyPr wrap="square" lIns="0" tIns="0" rIns="0" bIns="0" anchor="t">
             <a:spAutoFit/>
           </a:bodyPr>
           <a:lstStyle/>
@@ -10388,7 +11426,7 @@
           <a:noFill/>
         </p:spPr>
         <p:txBody>
-          <a:bodyPr wrap="square" lIns="0" rIns="0" tIns="0" bIns="0" anchor="t">
+          <a:bodyPr wrap="square" lIns="0" tIns="0" rIns="0" bIns="0" anchor="t">
             <a:spAutoFit/>
           </a:bodyPr>
           <a:lstStyle/>
@@ -10423,7 +11461,7 @@
           <a:noFill/>
         </p:spPr>
         <p:txBody>
-          <a:bodyPr wrap="square" lIns="0" rIns="0" tIns="0" bIns="0" anchor="t">
+          <a:bodyPr wrap="square" lIns="0" tIns="0" rIns="0" bIns="0" anchor="t">
             <a:spAutoFit/>
           </a:bodyPr>
           <a:lstStyle/>
@@ -10458,7 +11496,7 @@
           <a:noFill/>
         </p:spPr>
         <p:txBody>
-          <a:bodyPr wrap="square" lIns="0" rIns="0" tIns="0" bIns="0" anchor="t">
+          <a:bodyPr wrap="square" lIns="0" tIns="0" rIns="0" bIns="0" anchor="t">
             <a:spAutoFit/>
           </a:bodyPr>
           <a:lstStyle/>
@@ -10517,6 +11555,7 @@
           <a:lstStyle/>
           <a:p>
             <a:pPr algn="ctr"/>
+            <a:endParaRPr/>
           </a:p>
         </p:txBody>
       </p:sp>
@@ -10561,6 +11600,7 @@
           <a:lstStyle/>
           <a:p>
             <a:pPr algn="ctr"/>
+            <a:endParaRPr/>
           </a:p>
         </p:txBody>
       </p:sp>
@@ -10581,7 +11621,7 @@
           <a:noFill/>
         </p:spPr>
         <p:txBody>
-          <a:bodyPr wrap="square" lIns="0" rIns="0" tIns="0" bIns="0" anchor="ctr">
+          <a:bodyPr wrap="square" lIns="0" tIns="0" rIns="0" bIns="0" anchor="ctr">
             <a:spAutoFit/>
           </a:bodyPr>
           <a:lstStyle/>
@@ -10618,14 +11658,32 @@
                 <a:tableStyleId>{5C22544A-7EE6-4342-B048-85BDC9FD1C3A}</a:tableStyleId>
               </a:tblPr>
               <a:tblGrid>
-                <a:gridCol w="1645920"/>
-                <a:gridCol w="3200400"/>
-                <a:gridCol w="6217920"/>
+                <a:gridCol w="1645920">
+                  <a:extLst>
+                    <a:ext uri="{9D8B030D-6E8A-4147-A177-3AD203B41FA5}">
+                      <a16:colId xmlns:a16="http://schemas.microsoft.com/office/drawing/2014/main" val="20000"/>
+                    </a:ext>
+                  </a:extLst>
+                </a:gridCol>
+                <a:gridCol w="3200400">
+                  <a:extLst>
+                    <a:ext uri="{9D8B030D-6E8A-4147-A177-3AD203B41FA5}">
+                      <a16:colId xmlns:a16="http://schemas.microsoft.com/office/drawing/2014/main" val="20001"/>
+                    </a:ext>
+                  </a:extLst>
+                </a:gridCol>
+                <a:gridCol w="6217920">
+                  <a:extLst>
+                    <a:ext uri="{9D8B030D-6E8A-4147-A177-3AD203B41FA5}">
+                      <a16:colId xmlns:a16="http://schemas.microsoft.com/office/drawing/2014/main" val="20002"/>
+                    </a:ext>
+                  </a:extLst>
+                </a:gridCol>
               </a:tblGrid>
               <a:tr h="365760">
                 <a:tc>
                   <a:txBody>
-                    <a:bodyPr wrap="square"/>
+                    <a:bodyPr/>
                     <a:lstStyle/>
                     <a:p>
                       <a:pPr algn="ctr"/>
@@ -10640,7 +11698,7 @@
                       </a:r>
                     </a:p>
                   </a:txBody>
-                  <a:tcPr marL="73152" marR="73152" marT="45720" marB="45720" anchor="ctr">
+                  <a:tcPr marL="73152" marR="73152" anchor="ctr">
                     <a:solidFill>
                       <a:srgbClr val="D8DDE6"/>
                     </a:solidFill>
@@ -10648,7 +11706,7 @@
                 </a:tc>
                 <a:tc>
                   <a:txBody>
-                    <a:bodyPr wrap="square"/>
+                    <a:bodyPr/>
                     <a:lstStyle/>
                     <a:p>
                       <a:pPr algn="ctr"/>
@@ -10663,7 +11721,7 @@
                       </a:r>
                     </a:p>
                   </a:txBody>
-                  <a:tcPr marL="73152" marR="73152" marT="45720" marB="45720" anchor="ctr">
+                  <a:tcPr marL="73152" marR="73152" anchor="ctr">
                     <a:solidFill>
                       <a:srgbClr val="D8DDE6"/>
                     </a:solidFill>
@@ -10671,7 +11729,7 @@
                 </a:tc>
                 <a:tc>
                   <a:txBody>
-                    <a:bodyPr wrap="square"/>
+                    <a:bodyPr/>
                     <a:lstStyle/>
                     <a:p>
                       <a:pPr algn="ctr"/>
@@ -10686,17 +11744,22 @@
                       </a:r>
                     </a:p>
                   </a:txBody>
-                  <a:tcPr marL="73152" marR="73152" marT="45720" marB="45720" anchor="ctr">
+                  <a:tcPr marL="73152" marR="73152" anchor="ctr">
                     <a:solidFill>
                       <a:srgbClr val="D8DDE6"/>
                     </a:solidFill>
                   </a:tcPr>
                 </a:tc>
+                <a:extLst>
+                  <a:ext uri="{0D108BD9-81ED-4DB2-BD59-A6C34878D82A}">
+                    <a16:rowId xmlns:a16="http://schemas.microsoft.com/office/drawing/2014/main" val="10000"/>
+                  </a:ext>
+                </a:extLst>
               </a:tr>
               <a:tr h="365760">
                 <a:tc>
                   <a:txBody>
-                    <a:bodyPr wrap="square"/>
+                    <a:bodyPr/>
                     <a:lstStyle/>
                     <a:p>
                       <a:pPr algn="l"/>
@@ -10711,7 +11774,7 @@
                       </a:r>
                     </a:p>
                   </a:txBody>
-                  <a:tcPr marL="73152" marR="73152" marT="45720" marB="45720" anchor="ctr">
+                  <a:tcPr marL="73152" marR="73152" anchor="ctr">
                     <a:solidFill>
                       <a:srgbClr val="FFFFFF"/>
                     </a:solidFill>
@@ -10719,7 +11782,7 @@
                 </a:tc>
                 <a:tc>
                   <a:txBody>
-                    <a:bodyPr wrap="square"/>
+                    <a:bodyPr/>
                     <a:lstStyle/>
                     <a:p>
                       <a:pPr algn="l"/>
@@ -10734,7 +11797,7 @@
                       </a:r>
                     </a:p>
                   </a:txBody>
-                  <a:tcPr marL="73152" marR="73152" marT="45720" marB="45720" anchor="ctr">
+                  <a:tcPr marL="73152" marR="73152" anchor="ctr">
                     <a:solidFill>
                       <a:srgbClr val="FFFFFF"/>
                     </a:solidFill>
@@ -10742,7 +11805,7 @@
                 </a:tc>
                 <a:tc>
                   <a:txBody>
-                    <a:bodyPr wrap="square"/>
+                    <a:bodyPr/>
                     <a:lstStyle/>
                     <a:p>
                       <a:pPr algn="l"/>
@@ -10757,17 +11820,22 @@
                       </a:r>
                     </a:p>
                   </a:txBody>
-                  <a:tcPr marL="73152" marR="73152" marT="45720" marB="45720" anchor="ctr">
+                  <a:tcPr marL="73152" marR="73152" anchor="ctr">
                     <a:solidFill>
                       <a:srgbClr val="FFFFFF"/>
                     </a:solidFill>
                   </a:tcPr>
                 </a:tc>
+                <a:extLst>
+                  <a:ext uri="{0D108BD9-81ED-4DB2-BD59-A6C34878D82A}">
+                    <a16:rowId xmlns:a16="http://schemas.microsoft.com/office/drawing/2014/main" val="10001"/>
+                  </a:ext>
+                </a:extLst>
               </a:tr>
               <a:tr h="365760">
                 <a:tc>
                   <a:txBody>
-                    <a:bodyPr wrap="square"/>
+                    <a:bodyPr/>
                     <a:lstStyle/>
                     <a:p>
                       <a:pPr algn="l"/>
@@ -10782,7 +11850,7 @@
                       </a:r>
                     </a:p>
                   </a:txBody>
-                  <a:tcPr marL="73152" marR="73152" marT="45720" marB="45720" anchor="ctr">
+                  <a:tcPr marL="73152" marR="73152" anchor="ctr">
                     <a:solidFill>
                       <a:srgbClr val="F1F3F6"/>
                     </a:solidFill>
@@ -10790,7 +11858,7 @@
                 </a:tc>
                 <a:tc>
                   <a:txBody>
-                    <a:bodyPr wrap="square"/>
+                    <a:bodyPr/>
                     <a:lstStyle/>
                     <a:p>
                       <a:pPr algn="l"/>
@@ -10805,7 +11873,7 @@
                       </a:r>
                     </a:p>
                   </a:txBody>
-                  <a:tcPr marL="73152" marR="73152" marT="45720" marB="45720" anchor="ctr">
+                  <a:tcPr marL="73152" marR="73152" anchor="ctr">
                     <a:solidFill>
                       <a:srgbClr val="F1F3F6"/>
                     </a:solidFill>
@@ -10813,7 +11881,7 @@
                 </a:tc>
                 <a:tc>
                   <a:txBody>
-                    <a:bodyPr wrap="square"/>
+                    <a:bodyPr/>
                     <a:lstStyle/>
                     <a:p>
                       <a:pPr algn="l"/>
@@ -10828,17 +11896,22 @@
                       </a:r>
                     </a:p>
                   </a:txBody>
-                  <a:tcPr marL="73152" marR="73152" marT="45720" marB="45720" anchor="ctr">
+                  <a:tcPr marL="73152" marR="73152" anchor="ctr">
                     <a:solidFill>
                       <a:srgbClr val="F1F3F6"/>
                     </a:solidFill>
                   </a:tcPr>
                 </a:tc>
+                <a:extLst>
+                  <a:ext uri="{0D108BD9-81ED-4DB2-BD59-A6C34878D82A}">
+                    <a16:rowId xmlns:a16="http://schemas.microsoft.com/office/drawing/2014/main" val="10002"/>
+                  </a:ext>
+                </a:extLst>
               </a:tr>
               <a:tr h="365760">
                 <a:tc>
                   <a:txBody>
-                    <a:bodyPr wrap="square"/>
+                    <a:bodyPr/>
                     <a:lstStyle/>
                     <a:p>
                       <a:pPr algn="l"/>
@@ -10853,7 +11926,7 @@
                       </a:r>
                     </a:p>
                   </a:txBody>
-                  <a:tcPr marL="73152" marR="73152" marT="45720" marB="45720" anchor="ctr">
+                  <a:tcPr marL="73152" marR="73152" anchor="ctr">
                     <a:solidFill>
                       <a:srgbClr val="FFFFFF"/>
                     </a:solidFill>
@@ -10861,7 +11934,7 @@
                 </a:tc>
                 <a:tc>
                   <a:txBody>
-                    <a:bodyPr wrap="square"/>
+                    <a:bodyPr/>
                     <a:lstStyle/>
                     <a:p>
                       <a:pPr algn="l"/>
@@ -10876,7 +11949,7 @@
                       </a:r>
                     </a:p>
                   </a:txBody>
-                  <a:tcPr marL="73152" marR="73152" marT="45720" marB="45720" anchor="ctr">
+                  <a:tcPr marL="73152" marR="73152" anchor="ctr">
                     <a:solidFill>
                       <a:srgbClr val="FFFFFF"/>
                     </a:solidFill>
@@ -10884,7 +11957,7 @@
                 </a:tc>
                 <a:tc>
                   <a:txBody>
-                    <a:bodyPr wrap="square"/>
+                    <a:bodyPr/>
                     <a:lstStyle/>
                     <a:p>
                       <a:pPr algn="l"/>
@@ -10899,17 +11972,22 @@
                       </a:r>
                     </a:p>
                   </a:txBody>
-                  <a:tcPr marL="73152" marR="73152" marT="45720" marB="45720" anchor="ctr">
+                  <a:tcPr marL="73152" marR="73152" anchor="ctr">
                     <a:solidFill>
                       <a:srgbClr val="FFFFFF"/>
                     </a:solidFill>
                   </a:tcPr>
                 </a:tc>
+                <a:extLst>
+                  <a:ext uri="{0D108BD9-81ED-4DB2-BD59-A6C34878D82A}">
+                    <a16:rowId xmlns:a16="http://schemas.microsoft.com/office/drawing/2014/main" val="10003"/>
+                  </a:ext>
+                </a:extLst>
               </a:tr>
               <a:tr h="365760">
                 <a:tc>
                   <a:txBody>
-                    <a:bodyPr wrap="square"/>
+                    <a:bodyPr/>
                     <a:lstStyle/>
                     <a:p>
                       <a:pPr algn="l"/>
@@ -10924,7 +12002,7 @@
                       </a:r>
                     </a:p>
                   </a:txBody>
-                  <a:tcPr marL="73152" marR="73152" marT="45720" marB="45720" anchor="ctr">
+                  <a:tcPr marL="73152" marR="73152" anchor="ctr">
                     <a:solidFill>
                       <a:srgbClr val="F1F3F6"/>
                     </a:solidFill>
@@ -10932,7 +12010,7 @@
                 </a:tc>
                 <a:tc>
                   <a:txBody>
-                    <a:bodyPr wrap="square"/>
+                    <a:bodyPr/>
                     <a:lstStyle/>
                     <a:p>
                       <a:pPr algn="l"/>
@@ -10947,7 +12025,7 @@
                       </a:r>
                     </a:p>
                   </a:txBody>
-                  <a:tcPr marL="73152" marR="73152" marT="45720" marB="45720" anchor="ctr">
+                  <a:tcPr marL="73152" marR="73152" anchor="ctr">
                     <a:solidFill>
                       <a:srgbClr val="F1F3F6"/>
                     </a:solidFill>
@@ -10955,7 +12033,7 @@
                 </a:tc>
                 <a:tc>
                   <a:txBody>
-                    <a:bodyPr wrap="square"/>
+                    <a:bodyPr/>
                     <a:lstStyle/>
                     <a:p>
                       <a:pPr algn="l"/>
@@ -10970,12 +12048,17 @@
                       </a:r>
                     </a:p>
                   </a:txBody>
-                  <a:tcPr marL="73152" marR="73152" marT="45720" marB="45720" anchor="ctr">
+                  <a:tcPr marL="73152" marR="73152" anchor="ctr">
                     <a:solidFill>
                       <a:srgbClr val="F1F3F6"/>
                     </a:solidFill>
                   </a:tcPr>
                 </a:tc>
+                <a:extLst>
+                  <a:ext uri="{0D108BD9-81ED-4DB2-BD59-A6C34878D82A}">
+                    <a16:rowId xmlns:a16="http://schemas.microsoft.com/office/drawing/2014/main" val="10004"/>
+                  </a:ext>
+                </a:extLst>
               </a:tr>
             </a:tbl>
           </a:graphicData>
@@ -10998,7 +12081,7 @@
           <a:noFill/>
         </p:spPr>
         <p:txBody>
-          <a:bodyPr wrap="square" lIns="0" rIns="0" tIns="0" bIns="0" anchor="t">
+          <a:bodyPr wrap="square" lIns="0" tIns="0" rIns="0" bIns="0" anchor="t">
             <a:spAutoFit/>
           </a:bodyPr>
           <a:lstStyle/>
@@ -11033,16 +12116,13 @@
           <a:noFill/>
         </p:spPr>
         <p:txBody>
-          <a:bodyPr wrap="square" lIns="0" rIns="0" tIns="0" bIns="0">
+          <a:bodyPr wrap="square" lIns="0" tIns="0" rIns="0" bIns="0">
             <a:spAutoFit/>
           </a:bodyPr>
           <a:lstStyle/>
           <a:p>
-            <a:pPr algn="l" indent="-228600" marL="228600">
+            <a:pPr marL="228600" indent="-228600" algn="l">
               <a:buChar char="•"/>
-              <a:buClr>
-                <a:srgbClr val="E74C3C"/>
-              </a:buClr>
             </a:pPr>
             <a:r>
               <a:rPr sz="1300" b="1">
@@ -11064,11 +12144,8 @@
             </a:r>
           </a:p>
           <a:p>
-            <a:pPr algn="l" indent="-228600" marL="228600">
+            <a:pPr marL="228600" indent="-228600" algn="l">
               <a:buChar char="•"/>
-              <a:buClr>
-                <a:srgbClr val="E74C3C"/>
-              </a:buClr>
             </a:pPr>
             <a:r>
               <a:rPr sz="1300" b="1">
@@ -11090,11 +12167,8 @@
             </a:r>
           </a:p>
           <a:p>
-            <a:pPr algn="l" indent="-228600" marL="228600">
+            <a:pPr marL="228600" indent="-228600" algn="l">
               <a:buChar char="•"/>
-              <a:buClr>
-                <a:srgbClr val="E74C3C"/>
-              </a:buClr>
             </a:pPr>
             <a:r>
               <a:rPr sz="1300" b="1">
@@ -11116,11 +12190,8 @@
             </a:r>
           </a:p>
           <a:p>
-            <a:pPr algn="l" indent="-228600" marL="228600">
+            <a:pPr marL="228600" indent="-228600" algn="l">
               <a:buChar char="•"/>
-              <a:buClr>
-                <a:srgbClr val="E74C3C"/>
-              </a:buClr>
             </a:pPr>
             <a:r>
               <a:rPr sz="1300" b="1">
@@ -11142,11 +12213,8 @@
             </a:r>
           </a:p>
           <a:p>
-            <a:pPr algn="l" indent="-228600" marL="228600">
+            <a:pPr marL="228600" indent="-228600" algn="l">
               <a:buChar char="•"/>
-              <a:buClr>
-                <a:srgbClr val="E74C3C"/>
-              </a:buClr>
             </a:pPr>
             <a:r>
               <a:rPr sz="1300" b="1">
@@ -11178,7 +12246,7 @@
 </file>
 
 <file path=ppt/slides/slide17.xml><?xml version="1.0" encoding="utf-8"?>
-<p:sld xmlns:a="http://schemas.openxmlformats.org/drawingml/2006/main" xmlns:p="http://schemas.openxmlformats.org/presentationml/2006/main" xmlns:r="http://schemas.openxmlformats.org/officeDocument/2006/relationships">
+<p:sld xmlns:a="http://schemas.openxmlformats.org/drawingml/2006/main" xmlns:r="http://schemas.openxmlformats.org/officeDocument/2006/relationships" xmlns:p="http://schemas.openxmlformats.org/presentationml/2006/main">
   <p:cSld>
     <p:bg>
       <p:bgPr>
@@ -11194,7 +12262,14 @@
         <p:cNvGrpSpPr/>
         <p:nvPr/>
       </p:nvGrpSpPr>
-      <p:grpSpPr/>
+      <p:grpSpPr>
+        <a:xfrm>
+          <a:off x="0" y="0"/>
+          <a:ext cx="0" cy="0"/>
+          <a:chOff x="0" y="0"/>
+          <a:chExt cx="0" cy="0"/>
+        </a:xfrm>
+      </p:grpSpPr>
       <p:sp>
         <p:nvSpPr>
           <p:cNvPr id="2" name="Rectangle 1"/>
@@ -11236,6 +12311,7 @@
           <a:lstStyle/>
           <a:p>
             <a:pPr algn="ctr"/>
+            <a:endParaRPr/>
           </a:p>
         </p:txBody>
       </p:sp>
@@ -11256,7 +12332,7 @@
           <a:noFill/>
         </p:spPr>
         <p:txBody>
-          <a:bodyPr wrap="square" lIns="0" rIns="0" tIns="0" bIns="0" anchor="t">
+          <a:bodyPr wrap="square" lIns="0" tIns="0" rIns="0" bIns="0" anchor="t">
             <a:spAutoFit/>
           </a:bodyPr>
           <a:lstStyle/>
@@ -11291,7 +12367,7 @@
           <a:noFill/>
         </p:spPr>
         <p:txBody>
-          <a:bodyPr wrap="square" lIns="0" rIns="0" tIns="0" bIns="0" anchor="t">
+          <a:bodyPr wrap="square" lIns="0" tIns="0" rIns="0" bIns="0" anchor="t">
             <a:spAutoFit/>
           </a:bodyPr>
           <a:lstStyle/>
@@ -11326,7 +12402,7 @@
           <a:noFill/>
         </p:spPr>
         <p:txBody>
-          <a:bodyPr wrap="square" lIns="0" rIns="0" tIns="0" bIns="0" anchor="t">
+          <a:bodyPr wrap="square" lIns="0" tIns="0" rIns="0" bIns="0" anchor="t">
             <a:spAutoFit/>
           </a:bodyPr>
           <a:lstStyle/>
@@ -11361,7 +12437,7 @@
           <a:noFill/>
         </p:spPr>
         <p:txBody>
-          <a:bodyPr wrap="square" lIns="0" rIns="0" tIns="0" bIns="0" anchor="t">
+          <a:bodyPr wrap="square" lIns="0" tIns="0" rIns="0" bIns="0" anchor="t">
             <a:spAutoFit/>
           </a:bodyPr>
           <a:lstStyle/>
@@ -11420,6 +12496,7 @@
           <a:lstStyle/>
           <a:p>
             <a:pPr algn="ctr"/>
+            <a:endParaRPr/>
           </a:p>
         </p:txBody>
       </p:sp>
@@ -11429,11 +12506,17 @@
           <p:cNvGraphicFramePr>
             <a:graphicFrameLocks noGrp="1"/>
           </p:cNvGraphicFramePr>
-          <p:nvPr/>
+          <p:nvPr>
+            <p:extLst>
+              <p:ext uri="{D42A27DB-BD31-4B8C-83A1-F6EECF244321}">
+                <p14:modId xmlns:p14="http://schemas.microsoft.com/office/powerpoint/2010/main" val="1036921610"/>
+              </p:ext>
+            </p:extLst>
+          </p:nvPr>
         </p:nvGraphicFramePr>
         <p:xfrm>
           <a:off x="548640" y="1463040"/>
-          <a:ext cx="11064240" cy="4663440"/>
+          <a:ext cx="11064240" cy="1865376"/>
         </p:xfrm>
         <a:graphic>
           <a:graphicData uri="http://schemas.openxmlformats.org/drawingml/2006/table">
@@ -11442,29 +12525,47 @@
                 <a:tableStyleId>{5C22544A-7EE6-4342-B048-85BDC9FD1C3A}</a:tableStyleId>
               </a:tblPr>
               <a:tblGrid>
-                <a:gridCol w="4114800"/>
-                <a:gridCol w="4572000"/>
-                <a:gridCol w="2377440"/>
+                <a:gridCol w="3428449">
+                  <a:extLst>
+                    <a:ext uri="{9D8B030D-6E8A-4147-A177-3AD203B41FA5}">
+                      <a16:colId xmlns:a16="http://schemas.microsoft.com/office/drawing/2014/main" val="20000"/>
+                    </a:ext>
+                  </a:extLst>
+                </a:gridCol>
+                <a:gridCol w="4208444">
+                  <a:extLst>
+                    <a:ext uri="{9D8B030D-6E8A-4147-A177-3AD203B41FA5}">
+                      <a16:colId xmlns:a16="http://schemas.microsoft.com/office/drawing/2014/main" val="20001"/>
+                    </a:ext>
+                  </a:extLst>
+                </a:gridCol>
+                <a:gridCol w="3427347">
+                  <a:extLst>
+                    <a:ext uri="{9D8B030D-6E8A-4147-A177-3AD203B41FA5}">
+                      <a16:colId xmlns:a16="http://schemas.microsoft.com/office/drawing/2014/main" val="20002"/>
+                    </a:ext>
+                  </a:extLst>
+                </a:gridCol>
               </a:tblGrid>
               <a:tr h="932688">
                 <a:tc>
                   <a:txBody>
-                    <a:bodyPr wrap="square"/>
+                    <a:bodyPr/>
                     <a:lstStyle/>
                     <a:p>
                       <a:pPr algn="ctr"/>
                       <a:r>
-                        <a:rPr sz="1400" b="1">
+                        <a:rPr sz="1400" b="1" dirty="0">
                           <a:solidFill>
                             <a:srgbClr val="111418"/>
                           </a:solidFill>
                           <a:latin typeface="PingFang TC"/>
                         </a:rPr>
-                        <a:t>短期 EX: Y26/07</a:t>
+                        <a:t>Y26/07</a:t>
                       </a:r>
                     </a:p>
                   </a:txBody>
-                  <a:tcPr marL="73152" marR="73152" marT="45720" marB="45720" anchor="ctr">
+                  <a:tcPr marL="73152" marR="73152" anchor="ctr">
                     <a:solidFill>
                       <a:srgbClr val="D8DDE6"/>
                     </a:solidFill>
@@ -11472,22 +12573,22 @@
                 </a:tc>
                 <a:tc>
                   <a:txBody>
-                    <a:bodyPr wrap="square"/>
+                    <a:bodyPr/>
                     <a:lstStyle/>
                     <a:p>
                       <a:pPr algn="ctr"/>
                       <a:r>
-                        <a:rPr sz="1400" b="1">
+                        <a:rPr lang="en" altLang="zh-TW" sz="1400" b="1" dirty="0">
                           <a:solidFill>
                             <a:srgbClr val="111418"/>
                           </a:solidFill>
                           <a:latin typeface="PingFang TC"/>
                         </a:rPr>
-                        <a:t>中期</a:t>
+                        <a:t>Y26/08</a:t>
                       </a:r>
                     </a:p>
                   </a:txBody>
-                  <a:tcPr marL="73152" marR="73152" marT="45720" marB="45720" anchor="ctr">
+                  <a:tcPr marL="73152" marR="73152" anchor="ctr">
                     <a:solidFill>
                       <a:srgbClr val="D8DDE6"/>
                     </a:solidFill>
@@ -11495,48 +12596,122 @@
                 </a:tc>
                 <a:tc>
                   <a:txBody>
-                    <a:bodyPr wrap="square"/>
+                    <a:bodyPr/>
                     <a:lstStyle/>
                     <a:p>
                       <a:pPr algn="ctr"/>
                       <a:r>
-                        <a:rPr sz="1400" b="1">
+                        <a:rPr lang="en" altLang="zh-TW" sz="1400" b="1" dirty="0">
                           <a:solidFill>
                             <a:srgbClr val="111418"/>
                           </a:solidFill>
                           <a:latin typeface="PingFang TC"/>
                         </a:rPr>
-                        <a:t>決策</a:t>
+                        <a:t>Y26/09</a:t>
                       </a:r>
                     </a:p>
                   </a:txBody>
-                  <a:tcPr marL="73152" marR="73152" marT="45720" marB="45720" anchor="ctr">
+                  <a:tcPr marL="73152" marR="73152" anchor="ctr">
                     <a:solidFill>
                       <a:srgbClr val="D8DDE6"/>
                     </a:solidFill>
                   </a:tcPr>
                 </a:tc>
+                <a:extLst>
+                  <a:ext uri="{0D108BD9-81ED-4DB2-BD59-A6C34878D82A}">
+                    <a16:rowId xmlns:a16="http://schemas.microsoft.com/office/drawing/2014/main" val="10000"/>
+                  </a:ext>
+                </a:extLst>
               </a:tr>
               <a:tr h="932688">
                 <a:tc>
                   <a:txBody>
-                    <a:bodyPr wrap="square"/>
+                    <a:bodyPr/>
                     <a:lstStyle/>
                     <a:p>
                       <a:pPr algn="l"/>
                       <a:r>
-                        <a:rPr sz="1300" b="0">
+                        <a:rPr lang="en-US" sz="1300" b="0" dirty="0">
                           <a:solidFill>
                             <a:srgbClr val="111418"/>
                           </a:solidFill>
                           <a:latin typeface="PingFang TC"/>
                         </a:rPr>
-                        <a:t>Cross Region W=4 框架已完成初步流程驗收
-啟動正式 W=128 基準量測</a:t>
-                      </a:r>
+                        <a:t>- </a:t>
+                      </a:r>
+                      <a:r>
+                        <a:rPr sz="1300" b="0" dirty="0">
+                          <a:solidFill>
+                            <a:srgbClr val="111418"/>
+                          </a:solidFill>
+                          <a:latin typeface="PingFang TC"/>
+                        </a:rPr>
+                        <a:t>Cross Region W=4 </a:t>
+                      </a:r>
+                      <a:r>
+                        <a:rPr sz="1300" b="0" dirty="0" err="1">
+                          <a:solidFill>
+                            <a:srgbClr val="111418"/>
+                          </a:solidFill>
+                          <a:latin typeface="PingFang TC"/>
+                        </a:rPr>
+                        <a:t>框架已完成初步流程驗收</a:t>
+                      </a:r>
+                      <a:r>
+                        <a:rPr sz="1300" b="0" dirty="0">
+                          <a:solidFill>
+                            <a:srgbClr val="111418"/>
+                          </a:solidFill>
+                          <a:latin typeface="PingFang TC"/>
+                        </a:rPr>
+                        <a:t>
+</a:t>
+                      </a:r>
+                      <a:r>
+                        <a:rPr lang="en-US" sz="1300" b="0" dirty="0">
+                          <a:solidFill>
+                            <a:srgbClr val="111418"/>
+                          </a:solidFill>
+                          <a:latin typeface="PingFang TC"/>
+                        </a:rPr>
+                        <a:t>- </a:t>
+                      </a:r>
+                      <a:r>
+                        <a:rPr sz="1300" b="0" dirty="0" err="1">
+                          <a:solidFill>
+                            <a:srgbClr val="111418"/>
+                          </a:solidFill>
+                          <a:latin typeface="PingFang TC"/>
+                        </a:rPr>
+                        <a:t>啟動正式</a:t>
+                      </a:r>
+                      <a:r>
+                        <a:rPr sz="1300" b="0" dirty="0">
+                          <a:solidFill>
+                            <a:srgbClr val="111418"/>
+                          </a:solidFill>
+                          <a:latin typeface="PingFang TC"/>
+                        </a:rPr>
+                        <a:t> W=128 </a:t>
+                      </a:r>
+                      <a:r>
+                        <a:rPr sz="1300" b="0" dirty="0" err="1">
+                          <a:solidFill>
+                            <a:srgbClr val="111418"/>
+                          </a:solidFill>
+                          <a:latin typeface="PingFang TC"/>
+                        </a:rPr>
+                        <a:t>基準量測</a:t>
+                      </a:r>
+                      <a:endParaRPr sz="1300" b="0" dirty="0">
+                        <a:solidFill>
+                          <a:srgbClr val="111418"/>
+                        </a:solidFill>
+                        <a:latin typeface="PingFang TC"/>
+                      </a:endParaRPr>
                     </a:p>
                   </a:txBody>
-                  <a:tcPr marL="73152" marR="73152" marT="45720" marB="45720" anchor="ctr">
+                  <a:tcPr marL="73152" marR="73152" anchor="ctr">
                     <a:solidFill>
                       <a:srgbClr val="FFFFFF"/>
                     </a:solidFill>
@@ -11544,22 +12719,152 @@
                 </a:tc>
                 <a:tc>
                   <a:txBody>
-                    <a:bodyPr wrap="square"/>
+                    <a:bodyPr/>
                     <a:lstStyle/>
                     <a:p>
-                      <a:pPr algn="l"/>
-                      <a:r>
-                        <a:rPr sz="1300" b="0">
+                      <a:pPr marL="285750" indent="-285750" algn="l">
+                        <a:buFontTx/>
+                        <a:buChar char="-"/>
+                      </a:pPr>
+                      <a:r>
+                        <a:rPr lang="en-US" sz="1300" b="0" dirty="0" err="1">
                           <a:solidFill>
                             <a:srgbClr val="111418"/>
                           </a:solidFill>
                           <a:latin typeface="PingFang TC"/>
                         </a:rPr>
-                        <a:t>A-S / A-A-RO / A-A 三個 workload profile × P-A/P-B placement × 三家資料庫，依檢驗指標分批 / 量測</a:t>
-                      </a:r>
+                        <a:t>各</a:t>
+                      </a:r>
+                      <a:r>
+                        <a:rPr lang="en-US" sz="1300" b="0" dirty="0">
+                          <a:solidFill>
+                            <a:srgbClr val="111418"/>
+                          </a:solidFill>
+                          <a:latin typeface="PingFang TC"/>
+                        </a:rPr>
+                        <a:t> DB </a:t>
+                      </a:r>
+                      <a:r>
+                        <a:rPr lang="en-US" sz="1300" b="0" dirty="0" err="1">
+                          <a:solidFill>
+                            <a:srgbClr val="111418"/>
+                          </a:solidFill>
+                          <a:latin typeface="PingFang TC"/>
+                        </a:rPr>
+                        <a:t>根據</a:t>
+                      </a:r>
+                      <a:r>
+                        <a:rPr lang="en-US" sz="1300" b="0" dirty="0">
+                          <a:solidFill>
+                            <a:srgbClr val="111418"/>
+                          </a:solidFill>
+                          <a:latin typeface="PingFang TC"/>
+                        </a:rPr>
+                        <a:t> Workload: </a:t>
+                      </a:r>
+                      <a:r>
+                        <a:rPr sz="1300" b="0" dirty="0">
+                          <a:solidFill>
+                            <a:srgbClr val="111418"/>
+                          </a:solidFill>
+                          <a:latin typeface="PingFang TC"/>
+                        </a:rPr>
+                        <a:t>A-S / A-A-RO / A-A × P-A/P-B placement </a:t>
+                      </a:r>
+                      <a:r>
+                        <a:rPr sz="1300" b="0" dirty="0" err="1">
+                          <a:solidFill>
+                            <a:srgbClr val="111418"/>
+                          </a:solidFill>
+                          <a:latin typeface="PingFang TC"/>
+                        </a:rPr>
+                        <a:t>依檢驗</a:t>
+                      </a:r>
+                      <a:r>
+                        <a:rPr lang="en-US" sz="1300" b="0" dirty="0" err="1">
+                          <a:solidFill>
+                            <a:srgbClr val="111418"/>
+                          </a:solidFill>
+                          <a:latin typeface="PingFang TC"/>
+                        </a:rPr>
+                        <a:t>流程進行測試</a:t>
+                      </a:r>
+                      <a:endParaRPr lang="en-US" sz="1300" b="0" dirty="0">
+                        <a:solidFill>
+                          <a:srgbClr val="111418"/>
+                        </a:solidFill>
+                        <a:latin typeface="PingFang TC"/>
+                      </a:endParaRPr>
+                    </a:p>
+                    <a:p>
+                      <a:pPr marL="285750" marR="0" lvl="0" indent="-285750" algn="l" defTabSz="457200" rtl="0" eaLnBrk="1" fontAlgn="auto" latinLnBrk="0" hangingPunct="1">
+                        <a:lnSpc>
+                          <a:spcPct val="100000"/>
+                        </a:lnSpc>
+                        <a:spcBef>
+                          <a:spcPts val="0"/>
+                        </a:spcBef>
+                        <a:spcAft>
+                          <a:spcPts val="0"/>
+                        </a:spcAft>
+                        <a:buClrTx/>
+                        <a:buSzTx/>
+                        <a:buFontTx/>
+                        <a:buChar char="-"/>
+                        <a:tabLst/>
+                        <a:defRPr/>
+                      </a:pPr>
+                      <a:r>
+                        <a:rPr lang="en" altLang="zh-TW" sz="1300" b="0" dirty="0">
+                          <a:solidFill>
+                            <a:srgbClr val="111418"/>
+                          </a:solidFill>
+                          <a:latin typeface="PingFang TC"/>
+                        </a:rPr>
+                        <a:t>Failover </a:t>
+                      </a:r>
+                      <a:r>
+                        <a:rPr lang="zh-TW" altLang="en-US" sz="1300" b="0" dirty="0">
+                          <a:solidFill>
+                            <a:srgbClr val="111418"/>
+                          </a:solidFill>
+                          <a:latin typeface="PingFang TC"/>
+                        </a:rPr>
+                        <a:t>與 </a:t>
+                      </a:r>
+                      <a:r>
+                        <a:rPr lang="en" altLang="zh-TW" sz="1300" b="0" dirty="0">
+                          <a:solidFill>
+                            <a:srgbClr val="111418"/>
+                          </a:solidFill>
+                          <a:latin typeface="PingFang TC"/>
+                        </a:rPr>
+                        <a:t>Chaos Engineering </a:t>
+                      </a:r>
+                      <a:r>
+                        <a:rPr lang="zh-TW" altLang="en-US" sz="1300" b="0" dirty="0">
+                          <a:solidFill>
+                            <a:srgbClr val="111418"/>
+                          </a:solidFill>
+                          <a:latin typeface="PingFang TC"/>
+                        </a:rPr>
+                        <a:t>測試</a:t>
+                      </a:r>
+                    </a:p>
+                    <a:p>
+                      <a:pPr marL="285750" indent="-285750" algn="l">
+                        <a:buFontTx/>
+                        <a:buChar char="-"/>
+                      </a:pPr>
+                      <a:endParaRPr sz="1300" b="0" dirty="0">
+                        <a:solidFill>
+                          <a:srgbClr val="111418"/>
+                        </a:solidFill>
+                        <a:latin typeface="PingFang TC"/>
+                      </a:endParaRPr>
                     </a:p>
                   </a:txBody>
-                  <a:tcPr marL="73152" marR="73152" marT="45720" marB="45720" anchor="ctr">
+                  <a:tcPr marL="73152" marR="73152" anchor="ctr">
                     <a:solidFill>
                       <a:srgbClr val="FFFFFF"/>
                     </a:solidFill>
@@ -11567,240 +12872,65 @@
                 </a:tc>
                 <a:tc>
                   <a:txBody>
-                    <a:bodyPr wrap="square"/>
+                    <a:bodyPr/>
                     <a:lstStyle/>
                     <a:p>
                       <a:pPr algn="l"/>
                       <a:r>
-                        <a:rPr sz="1300" b="0">
+                        <a:rPr lang="en-US" sz="1300" b="0" dirty="0">
                           <a:solidFill>
                             <a:srgbClr val="111418"/>
                           </a:solidFill>
                           <a:latin typeface="PingFang TC"/>
                         </a:rPr>
-                        <a:t>Application owner 完成五項議題確認</a:t>
-                      </a:r>
+                        <a:t>- </a:t>
+                      </a:r>
+                      <a:r>
+                        <a:rPr lang="en-US" sz="1300" b="0" dirty="0" err="1">
+                          <a:solidFill>
+                            <a:srgbClr val="111418"/>
+                          </a:solidFill>
+                          <a:latin typeface="PingFang TC"/>
+                        </a:rPr>
+                        <a:t>報告產出</a:t>
+                      </a:r>
+                      <a:r>
+                        <a:rPr lang="en-US" sz="1300" b="0" dirty="0">
+                          <a:solidFill>
+                            <a:srgbClr val="111418"/>
+                          </a:solidFill>
+                          <a:latin typeface="PingFang TC"/>
+                        </a:rPr>
+                        <a:t> &amp; </a:t>
+                      </a:r>
+                      <a:r>
+                        <a:rPr lang="en-US" sz="1300" b="0" dirty="0" err="1">
+                          <a:solidFill>
+                            <a:srgbClr val="111418"/>
+                          </a:solidFill>
+                          <a:latin typeface="PingFang TC"/>
+                        </a:rPr>
+                        <a:t>相關議題待確認</a:t>
+                      </a:r>
+                      <a:endParaRPr sz="1300" b="0" dirty="0">
+                        <a:solidFill>
+                          <a:srgbClr val="111418"/>
+                        </a:solidFill>
+                        <a:latin typeface="PingFang TC"/>
+                      </a:endParaRPr>
                     </a:p>
                   </a:txBody>
-                  <a:tcPr marL="73152" marR="73152" marT="45720" marB="45720" anchor="ctr">
+                  <a:tcPr marL="73152" marR="73152" anchor="ctr">
                     <a:solidFill>
                       <a:srgbClr val="FFFFFF"/>
                     </a:solidFill>
                   </a:tcPr>
                 </a:tc>
-              </a:tr>
-              <a:tr h="932688">
-                <a:tc>
-                  <a:txBody>
-                    <a:bodyPr wrap="square"/>
-                    <a:lstStyle/>
-                    <a:p>
-                      <a:pPr algn="l"/>
-                      <a:r>
-                        <a:rPr sz="1300" b="0">
-                          <a:solidFill>
-                            <a:srgbClr val="111418"/>
-                          </a:solidFill>
-                          <a:latin typeface="PingFang TC"/>
-                        </a:rPr>
-                        <a:t>W=4 框架已驗，接 W=128 基準</a:t>
-                      </a:r>
-                    </a:p>
-                  </a:txBody>
-                  <a:tcPr marL="73152" marR="73152" marT="45720" marB="45720" anchor="ctr">
-                    <a:solidFill>
-                      <a:srgbClr val="F1F3F6"/>
-                    </a:solidFill>
-                  </a:tcPr>
-                </a:tc>
-                <a:tc>
-                  <a:txBody>
-                    <a:bodyPr wrap="square"/>
-                    <a:lstStyle/>
-                    <a:p>
-                      <a:pPr algn="l"/>
-                      <a:r>
-                        <a:rPr sz="1300" b="0">
-                          <a:solidFill>
-                            <a:srgbClr val="111418"/>
-                          </a:solidFill>
-                          <a:latin typeface="PingFang TC"/>
-                        </a:rPr>
-                        <a:t>Failover 與 Chaos Engineering 測試</a:t>
-                      </a:r>
-                    </a:p>
-                  </a:txBody>
-                  <a:tcPr marL="73152" marR="73152" marT="45720" marB="45720" anchor="ctr">
-                    <a:solidFill>
-                      <a:srgbClr val="F1F3F6"/>
-                    </a:solidFill>
-                  </a:tcPr>
-                </a:tc>
-                <a:tc>
-                  <a:txBody>
-                    <a:bodyPr wrap="square"/>
-                    <a:lstStyle/>
-                    <a:p>
-                      <a:pPr algn="l"/>
-                      <a:r>
-                        <a:rPr sz="1300" b="0">
-                          <a:solidFill>
-                            <a:srgbClr val="111418"/>
-                          </a:solidFill>
-                          <a:latin typeface="PingFang TC"/>
-                        </a:rPr>
-                        <a:t>原廠後勤對接狀況說明</a:t>
-                      </a:r>
-                    </a:p>
-                  </a:txBody>
-                  <a:tcPr marL="73152" marR="73152" marT="45720" marB="45720" anchor="ctr">
-                    <a:solidFill>
-                      <a:srgbClr val="F1F3F6"/>
-                    </a:solidFill>
-                  </a:tcPr>
-                </a:tc>
-              </a:tr>
-              <a:tr h="932688">
-                <a:tc>
-                  <a:txBody>
-                    <a:bodyPr wrap="square"/>
-                    <a:lstStyle/>
-                    <a:p>
-                      <a:pPr algn="l"/>
-                      <a:r>
-                        <a:rPr sz="1300" b="0">
-                          <a:solidFill>
-                            <a:srgbClr val="111418"/>
-                          </a:solidFill>
-                          <a:latin typeface="PingFang TC"/>
-                        </a:rPr>
-                        <a:t>freeze/unfreeze、round-only runner、暖機、placement gate 全部通過 審查</a:t>
-                      </a:r>
-                    </a:p>
-                  </a:txBody>
-                  <a:tcPr marL="73152" marR="73152" marT="45720" marB="45720" anchor="ctr">
-                    <a:solidFill>
-                      <a:srgbClr val="FFFFFF"/>
-                    </a:solidFill>
-                  </a:tcPr>
-                </a:tc>
-                <a:tc>
-                  <a:txBody>
-                    <a:bodyPr wrap="square"/>
-                    <a:lstStyle/>
-                    <a:p>
-                      <a:pPr algn="l"/>
-                      <a:r>
-                        <a:rPr sz="1300" b="0">
-                          <a:solidFill>
-                            <a:srgbClr val="111418"/>
-                          </a:solidFill>
-                          <a:latin typeface="PingFang TC"/>
-                        </a:rPr>
-                        <a:t>跨區域 analytics 第二份報告</a:t>
-                      </a:r>
-                    </a:p>
-                  </a:txBody>
-                  <a:tcPr marL="73152" marR="73152" marT="45720" marB="45720" anchor="ctr">
-                    <a:solidFill>
-                      <a:srgbClr val="FFFFFF"/>
-                    </a:solidFill>
-                  </a:tcPr>
-                </a:tc>
-                <a:tc>
-                  <a:txBody>
-                    <a:bodyPr wrap="square"/>
-                    <a:lstStyle/>
-                    <a:p>
-                      <a:pPr algn="l"/>
-                      <a:r>
-                        <a:rPr sz="1300" b="0">
-                          <a:solidFill>
-                            <a:srgbClr val="111418"/>
-                          </a:solidFill>
-                          <a:latin typeface="PingFang TC"/>
-                        </a:rPr>
-                        <a:t/>
-                      </a:r>
-                    </a:p>
-                  </a:txBody>
-                  <a:tcPr marL="73152" marR="73152" marT="45720" marB="45720" anchor="ctr">
-                    <a:solidFill>
-                      <a:srgbClr val="FFFFFF"/>
-                    </a:solidFill>
-                  </a:tcPr>
-                </a:tc>
-              </a:tr>
-              <a:tr h="932688">
-                <a:tc>
-                  <a:txBody>
-                    <a:bodyPr wrap="square"/>
-                    <a:lstStyle/>
-                    <a:p>
-                      <a:pPr algn="l"/>
-                      <a:r>
-                        <a:rPr sz="1300" b="0">
-                          <a:solidFill>
-                            <a:srgbClr val="111418"/>
-                          </a:solidFill>
-                          <a:latin typeface="PingFang TC"/>
-                        </a:rPr>
-                        <a:t>X-CROSS 完成 determinism 流程 驗收，啟動正式 W=128 基準 量測</a:t>
-                      </a:r>
-                    </a:p>
-                  </a:txBody>
-                  <a:tcPr marL="73152" marR="73152" marT="45720" marB="45720" anchor="ctr">
-                    <a:solidFill>
-                      <a:srgbClr val="F1F3F6"/>
-                    </a:solidFill>
-                  </a:tcPr>
-                </a:tc>
-                <a:tc>
-                  <a:txBody>
-                    <a:bodyPr wrap="square"/>
-                    <a:lstStyle/>
-                    <a:p>
-                      <a:pPr algn="l"/>
-                      <a:r>
-                        <a:rPr sz="1300" b="0">
-                          <a:solidFill>
-                            <a:srgbClr val="111418"/>
-                          </a:solidFill>
-                          <a:latin typeface="PingFang TC"/>
-                        </a:rPr>
-                        <a:t>補齊 YugabyteDB K8s 退化成因調查（P-A/P-B、A-S/A-A-RO/A-A）</a:t>
-                      </a:r>
-                    </a:p>
-                  </a:txBody>
-                  <a:tcPr marL="73152" marR="73152" marT="45720" marB="45720" anchor="ctr">
-                    <a:solidFill>
-                      <a:srgbClr val="F1F3F6"/>
-                    </a:solidFill>
-                  </a:tcPr>
-                </a:tc>
-                <a:tc>
-                  <a:txBody>
-                    <a:bodyPr wrap="square"/>
-                    <a:lstStyle/>
-                    <a:p>
-                      <a:pPr algn="l"/>
-                      <a:r>
-                        <a:rPr sz="1300" b="0">
-                          <a:solidFill>
-                            <a:srgbClr val="111418"/>
-                          </a:solidFill>
-                          <a:latin typeface="PingFang TC"/>
-                        </a:rPr>
-                        <a:t/>
-                      </a:r>
-                    </a:p>
-                  </a:txBody>
-                  <a:tcPr marL="73152" marR="73152" marT="45720" marB="45720" anchor="ctr">
-                    <a:solidFill>
-                      <a:srgbClr val="F1F3F6"/>
-                    </a:solidFill>
-                  </a:tcPr>
-                </a:tc>
+                <a:extLst>
+                  <a:ext uri="{0D108BD9-81ED-4DB2-BD59-A6C34878D82A}">
+                    <a16:rowId xmlns:a16="http://schemas.microsoft.com/office/drawing/2014/main" val="10001"/>
+                  </a:ext>
+                </a:extLst>
               </a:tr>
             </a:tbl>
           </a:graphicData>
@@ -11815,7 +12945,7 @@
 </file>
 
 <file path=ppt/slides/slide2.xml><?xml version="1.0" encoding="utf-8"?>
-<p:sld xmlns:a="http://schemas.openxmlformats.org/drawingml/2006/main" xmlns:p="http://schemas.openxmlformats.org/presentationml/2006/main" xmlns:r="http://schemas.openxmlformats.org/officeDocument/2006/relationships">
+<p:sld xmlns:a="http://schemas.openxmlformats.org/drawingml/2006/main" xmlns:r="http://schemas.openxmlformats.org/officeDocument/2006/relationships" xmlns:p="http://schemas.openxmlformats.org/presentationml/2006/main">
   <p:cSld>
     <p:bg>
       <p:bgPr>
@@ -11831,7 +12961,14 @@
         <p:cNvGrpSpPr/>
         <p:nvPr/>
       </p:nvGrpSpPr>
-      <p:grpSpPr/>
+      <p:grpSpPr>
+        <a:xfrm>
+          <a:off x="0" y="0"/>
+          <a:ext cx="0" cy="0"/>
+          <a:chOff x="0" y="0"/>
+          <a:chExt cx="0" cy="0"/>
+        </a:xfrm>
+      </p:grpSpPr>
       <p:sp>
         <p:nvSpPr>
           <p:cNvPr id="2" name="Rectangle 1"/>
@@ -11873,6 +13010,7 @@
           <a:lstStyle/>
           <a:p>
             <a:pPr algn="ctr"/>
+            <a:endParaRPr/>
           </a:p>
         </p:txBody>
       </p:sp>
@@ -11893,7 +13031,7 @@
           <a:noFill/>
         </p:spPr>
         <p:txBody>
-          <a:bodyPr wrap="square" lIns="0" rIns="0" tIns="0" bIns="0" anchor="t">
+          <a:bodyPr wrap="square" lIns="0" tIns="0" rIns="0" bIns="0" anchor="t">
             <a:spAutoFit/>
           </a:bodyPr>
           <a:lstStyle/>
@@ -11928,7 +13066,7 @@
           <a:noFill/>
         </p:spPr>
         <p:txBody>
-          <a:bodyPr wrap="square" lIns="0" rIns="0" tIns="0" bIns="0" anchor="t">
+          <a:bodyPr wrap="square" lIns="0" tIns="0" rIns="0" bIns="0" anchor="t">
             <a:spAutoFit/>
           </a:bodyPr>
           <a:lstStyle/>
@@ -11963,7 +13101,7 @@
           <a:noFill/>
         </p:spPr>
         <p:txBody>
-          <a:bodyPr wrap="square" lIns="0" rIns="0" tIns="0" bIns="0" anchor="t">
+          <a:bodyPr wrap="square" lIns="0" tIns="0" rIns="0" bIns="0" anchor="t">
             <a:spAutoFit/>
           </a:bodyPr>
           <a:lstStyle/>
@@ -11998,7 +13136,7 @@
           <a:noFill/>
         </p:spPr>
         <p:txBody>
-          <a:bodyPr wrap="square" lIns="0" rIns="0" tIns="0" bIns="0" anchor="t">
+          <a:bodyPr wrap="square" lIns="0" tIns="0" rIns="0" bIns="0" anchor="t">
             <a:spAutoFit/>
           </a:bodyPr>
           <a:lstStyle/>
@@ -12057,6 +13195,7 @@
           <a:lstStyle/>
           <a:p>
             <a:pPr algn="ctr"/>
+            <a:endParaRPr/>
           </a:p>
         </p:txBody>
       </p:sp>
@@ -12077,16 +13216,13 @@
           <a:noFill/>
         </p:spPr>
         <p:txBody>
-          <a:bodyPr wrap="square" lIns="0" rIns="0" tIns="0" bIns="0">
+          <a:bodyPr wrap="square" lIns="0" tIns="0" rIns="0" bIns="0">
             <a:spAutoFit/>
           </a:bodyPr>
           <a:lstStyle/>
           <a:p>
-            <a:pPr algn="l" indent="-228600" marL="228600">
+            <a:pPr marL="228600" indent="-228600" algn="l">
               <a:buChar char="•"/>
-              <a:buClr>
-                <a:srgbClr val="E74C3C"/>
-              </a:buClr>
             </a:pPr>
             <a:r>
               <a:rPr sz="2200">
@@ -12099,11 +13235,8 @@
             </a:r>
           </a:p>
           <a:p>
-            <a:pPr algn="l" indent="-228600" marL="228600">
+            <a:pPr marL="228600" indent="-228600" algn="l">
               <a:buChar char="•"/>
-              <a:buClr>
-                <a:srgbClr val="E74C3C"/>
-              </a:buClr>
             </a:pPr>
             <a:r>
               <a:rPr sz="2200">
@@ -12116,11 +13249,8 @@
             </a:r>
           </a:p>
           <a:p>
-            <a:pPr algn="l" indent="-228600" marL="228600">
+            <a:pPr marL="228600" indent="-228600" algn="l">
               <a:buChar char="•"/>
-              <a:buClr>
-                <a:srgbClr val="E74C3C"/>
-              </a:buClr>
             </a:pPr>
             <a:r>
               <a:rPr sz="2200">
@@ -12133,11 +13263,8 @@
             </a:r>
           </a:p>
           <a:p>
-            <a:pPr algn="l" indent="-228600" marL="228600">
+            <a:pPr marL="228600" indent="-228600" algn="l">
               <a:buChar char="•"/>
-              <a:buClr>
-                <a:srgbClr val="E74C3C"/>
-              </a:buClr>
             </a:pPr>
             <a:r>
               <a:rPr sz="2200">
@@ -12150,11 +13277,8 @@
             </a:r>
           </a:p>
           <a:p>
-            <a:pPr algn="l" indent="-228600" marL="228600">
+            <a:pPr marL="228600" indent="-228600" algn="l">
               <a:buChar char="•"/>
-              <a:buClr>
-                <a:srgbClr val="E74C3C"/>
-              </a:buClr>
             </a:pPr>
             <a:r>
               <a:rPr sz="2200">
@@ -12177,7 +13301,7 @@
 </file>
 
 <file path=ppt/slides/slide3.xml><?xml version="1.0" encoding="utf-8"?>
-<p:sld xmlns:a="http://schemas.openxmlformats.org/drawingml/2006/main" xmlns:p="http://schemas.openxmlformats.org/presentationml/2006/main" xmlns:r="http://schemas.openxmlformats.org/officeDocument/2006/relationships">
+<p:sld xmlns:a="http://schemas.openxmlformats.org/drawingml/2006/main" xmlns:r="http://schemas.openxmlformats.org/officeDocument/2006/relationships" xmlns:p="http://schemas.openxmlformats.org/presentationml/2006/main">
   <p:cSld>
     <p:bg>
       <p:bgPr>
@@ -12193,7 +13317,14 @@
         <p:cNvGrpSpPr/>
         <p:nvPr/>
       </p:nvGrpSpPr>
-      <p:grpSpPr/>
+      <p:grpSpPr>
+        <a:xfrm>
+          <a:off x="0" y="0"/>
+          <a:ext cx="0" cy="0"/>
+          <a:chOff x="0" y="0"/>
+          <a:chExt cx="0" cy="0"/>
+        </a:xfrm>
+      </p:grpSpPr>
       <p:sp>
         <p:nvSpPr>
           <p:cNvPr id="2" name="Rectangle 1"/>
@@ -12235,6 +13366,7 @@
           <a:lstStyle/>
           <a:p>
             <a:pPr algn="ctr"/>
+            <a:endParaRPr/>
           </a:p>
         </p:txBody>
       </p:sp>
@@ -12255,7 +13387,7 @@
           <a:noFill/>
         </p:spPr>
         <p:txBody>
-          <a:bodyPr wrap="square" lIns="0" rIns="0" tIns="0" bIns="0" anchor="t">
+          <a:bodyPr wrap="square" lIns="0" tIns="0" rIns="0" bIns="0" anchor="t">
             <a:spAutoFit/>
           </a:bodyPr>
           <a:lstStyle/>
@@ -12290,7 +13422,7 @@
           <a:noFill/>
         </p:spPr>
         <p:txBody>
-          <a:bodyPr wrap="square" lIns="0" rIns="0" tIns="0" bIns="0" anchor="t">
+          <a:bodyPr wrap="square" lIns="0" tIns="0" rIns="0" bIns="0" anchor="t">
             <a:spAutoFit/>
           </a:bodyPr>
           <a:lstStyle/>
@@ -12325,7 +13457,7 @@
           <a:noFill/>
         </p:spPr>
         <p:txBody>
-          <a:bodyPr wrap="square" lIns="0" rIns="0" tIns="0" bIns="0" anchor="t">
+          <a:bodyPr wrap="square" lIns="0" tIns="0" rIns="0" bIns="0" anchor="t">
             <a:spAutoFit/>
           </a:bodyPr>
           <a:lstStyle/>
@@ -12360,7 +13492,7 @@
           <a:noFill/>
         </p:spPr>
         <p:txBody>
-          <a:bodyPr wrap="square" lIns="0" rIns="0" tIns="0" bIns="0" anchor="t">
+          <a:bodyPr wrap="square" lIns="0" tIns="0" rIns="0" bIns="0" anchor="t">
             <a:spAutoFit/>
           </a:bodyPr>
           <a:lstStyle/>
@@ -12419,6 +13551,7 @@
           <a:lstStyle/>
           <a:p>
             <a:pPr algn="ctr"/>
+            <a:endParaRPr/>
           </a:p>
         </p:txBody>
       </p:sp>
@@ -12463,6 +13596,7 @@
           <a:lstStyle/>
           <a:p>
             <a:pPr algn="ctr"/>
+            <a:endParaRPr/>
           </a:p>
         </p:txBody>
       </p:sp>
@@ -12483,7 +13617,7 @@
           <a:noFill/>
         </p:spPr>
         <p:txBody>
-          <a:bodyPr wrap="square" lIns="0" rIns="0" tIns="0" bIns="0" anchor="ctr">
+          <a:bodyPr wrap="square" lIns="0" tIns="0" rIns="0" bIns="0" anchor="ctr">
             <a:spAutoFit/>
           </a:bodyPr>
           <a:lstStyle/>
@@ -12520,15 +13654,39 @@
                 <a:tableStyleId>{5C22544A-7EE6-4342-B048-85BDC9FD1C3A}</a:tableStyleId>
               </a:tblPr>
               <a:tblGrid>
-                <a:gridCol w="2011680"/>
-                <a:gridCol w="2011680"/>
-                <a:gridCol w="5943600"/>
-                <a:gridCol w="1097280"/>
+                <a:gridCol w="2011680">
+                  <a:extLst>
+                    <a:ext uri="{9D8B030D-6E8A-4147-A177-3AD203B41FA5}">
+                      <a16:colId xmlns:a16="http://schemas.microsoft.com/office/drawing/2014/main" val="20000"/>
+                    </a:ext>
+                  </a:extLst>
+                </a:gridCol>
+                <a:gridCol w="2011680">
+                  <a:extLst>
+                    <a:ext uri="{9D8B030D-6E8A-4147-A177-3AD203B41FA5}">
+                      <a16:colId xmlns:a16="http://schemas.microsoft.com/office/drawing/2014/main" val="20001"/>
+                    </a:ext>
+                  </a:extLst>
+                </a:gridCol>
+                <a:gridCol w="5943600">
+                  <a:extLst>
+                    <a:ext uri="{9D8B030D-6E8A-4147-A177-3AD203B41FA5}">
+                      <a16:colId xmlns:a16="http://schemas.microsoft.com/office/drawing/2014/main" val="20002"/>
+                    </a:ext>
+                  </a:extLst>
+                </a:gridCol>
+                <a:gridCol w="1097280">
+                  <a:extLst>
+                    <a:ext uri="{9D8B030D-6E8A-4147-A177-3AD203B41FA5}">
+                      <a16:colId xmlns:a16="http://schemas.microsoft.com/office/drawing/2014/main" val="20003"/>
+                    </a:ext>
+                  </a:extLst>
+                </a:gridCol>
               </a:tblGrid>
               <a:tr h="804672">
                 <a:tc>
                   <a:txBody>
-                    <a:bodyPr wrap="square"/>
+                    <a:bodyPr/>
                     <a:lstStyle/>
                     <a:p>
                       <a:pPr algn="ctr"/>
@@ -12543,7 +13701,7 @@
                       </a:r>
                     </a:p>
                   </a:txBody>
-                  <a:tcPr marL="73152" marR="73152" marT="45720" marB="45720" anchor="ctr">
+                  <a:tcPr marL="73152" marR="73152" anchor="ctr">
                     <a:solidFill>
                       <a:srgbClr val="D8DDE6"/>
                     </a:solidFill>
@@ -12551,7 +13709,7 @@
                 </a:tc>
                 <a:tc>
                   <a:txBody>
-                    <a:bodyPr wrap="square"/>
+                    <a:bodyPr/>
                     <a:lstStyle/>
                     <a:p>
                       <a:pPr algn="ctr"/>
@@ -12566,7 +13724,7 @@
                       </a:r>
                     </a:p>
                   </a:txBody>
-                  <a:tcPr marL="73152" marR="73152" marT="45720" marB="45720" anchor="ctr">
+                  <a:tcPr marL="73152" marR="73152" anchor="ctr">
                     <a:solidFill>
                       <a:srgbClr val="D8DDE6"/>
                     </a:solidFill>
@@ -12574,7 +13732,7 @@
                 </a:tc>
                 <a:tc>
                   <a:txBody>
-                    <a:bodyPr wrap="square"/>
+                    <a:bodyPr/>
                     <a:lstStyle/>
                     <a:p>
                       <a:pPr algn="ctr"/>
@@ -12589,7 +13747,7 @@
                       </a:r>
                     </a:p>
                   </a:txBody>
-                  <a:tcPr marL="73152" marR="73152" marT="45720" marB="45720" anchor="ctr">
+                  <a:tcPr marL="73152" marR="73152" anchor="ctr">
                     <a:solidFill>
                       <a:srgbClr val="D8DDE6"/>
                     </a:solidFill>
@@ -12597,7 +13755,7 @@
                 </a:tc>
                 <a:tc>
                   <a:txBody>
-                    <a:bodyPr wrap="square"/>
+                    <a:bodyPr/>
                     <a:lstStyle/>
                     <a:p>
                       <a:pPr algn="ctr"/>
@@ -12612,17 +13770,22 @@
                       </a:r>
                     </a:p>
                   </a:txBody>
-                  <a:tcPr marL="73152" marR="73152" marT="45720" marB="45720" anchor="ctr">
+                  <a:tcPr marL="73152" marR="73152" anchor="ctr">
                     <a:solidFill>
                       <a:srgbClr val="D8DDE6"/>
                     </a:solidFill>
                   </a:tcPr>
                 </a:tc>
+                <a:extLst>
+                  <a:ext uri="{0D108BD9-81ED-4DB2-BD59-A6C34878D82A}">
+                    <a16:rowId xmlns:a16="http://schemas.microsoft.com/office/drawing/2014/main" val="10000"/>
+                  </a:ext>
+                </a:extLst>
               </a:tr>
               <a:tr h="804672">
                 <a:tc>
                   <a:txBody>
-                    <a:bodyPr wrap="square"/>
+                    <a:bodyPr/>
                     <a:lstStyle/>
                     <a:p>
                       <a:pPr algn="l"/>
@@ -12637,7 +13800,7 @@
                       </a:r>
                     </a:p>
                   </a:txBody>
-                  <a:tcPr marL="73152" marR="73152" marT="45720" marB="45720" anchor="ctr">
+                  <a:tcPr marL="73152" marR="73152" anchor="ctr">
                     <a:solidFill>
                       <a:srgbClr val="FFFFFF"/>
                     </a:solidFill>
@@ -12645,7 +13808,7 @@
                 </a:tc>
                 <a:tc>
                   <a:txBody>
-                    <a:bodyPr wrap="square"/>
+                    <a:bodyPr/>
                     <a:lstStyle/>
                     <a:p>
                       <a:pPr algn="l"/>
@@ -12660,7 +13823,7 @@
                       </a:r>
                     </a:p>
                   </a:txBody>
-                  <a:tcPr marL="73152" marR="73152" marT="45720" marB="45720" anchor="ctr">
+                  <a:tcPr marL="73152" marR="73152" anchor="ctr">
                     <a:solidFill>
                       <a:srgbClr val="FFFFFF"/>
                     </a:solidFill>
@@ -12668,7 +13831,7 @@
                 </a:tc>
                 <a:tc>
                   <a:txBody>
-                    <a:bodyPr wrap="square"/>
+                    <a:bodyPr/>
                     <a:lstStyle/>
                     <a:p>
                       <a:pPr algn="l"/>
@@ -12683,7 +13846,7 @@
                       </a:r>
                     </a:p>
                   </a:txBody>
-                  <a:tcPr marL="73152" marR="73152" marT="45720" marB="45720" anchor="ctr">
+                  <a:tcPr marL="73152" marR="73152" anchor="ctr">
                     <a:solidFill>
                       <a:srgbClr val="FFFFFF"/>
                     </a:solidFill>
@@ -12691,7 +13854,7 @@
                 </a:tc>
                 <a:tc>
                   <a:txBody>
-                    <a:bodyPr wrap="square"/>
+                    <a:bodyPr/>
                     <a:lstStyle/>
                     <a:p>
                       <a:pPr algn="l"/>
@@ -12706,17 +13869,22 @@
                       </a:r>
                     </a:p>
                   </a:txBody>
-                  <a:tcPr marL="73152" marR="73152" marT="45720" marB="45720" anchor="ctr">
+                  <a:tcPr marL="73152" marR="73152" anchor="ctr">
                     <a:solidFill>
                       <a:srgbClr val="FFFFFF"/>
                     </a:solidFill>
                   </a:tcPr>
                 </a:tc>
+                <a:extLst>
+                  <a:ext uri="{0D108BD9-81ED-4DB2-BD59-A6C34878D82A}">
+                    <a16:rowId xmlns:a16="http://schemas.microsoft.com/office/drawing/2014/main" val="10001"/>
+                  </a:ext>
+                </a:extLst>
               </a:tr>
               <a:tr h="804672">
                 <a:tc>
                   <a:txBody>
-                    <a:bodyPr wrap="square"/>
+                    <a:bodyPr/>
                     <a:lstStyle/>
                     <a:p>
                       <a:pPr algn="l"/>
@@ -12731,7 +13899,7 @@
                       </a:r>
                     </a:p>
                   </a:txBody>
-                  <a:tcPr marL="73152" marR="73152" marT="45720" marB="45720" anchor="ctr">
+                  <a:tcPr marL="73152" marR="73152" anchor="ctr">
                     <a:solidFill>
                       <a:srgbClr val="F1F3F6"/>
                     </a:solidFill>
@@ -12739,7 +13907,7 @@
                 </a:tc>
                 <a:tc>
                   <a:txBody>
-                    <a:bodyPr wrap="square"/>
+                    <a:bodyPr/>
                     <a:lstStyle/>
                     <a:p>
                       <a:pPr algn="l"/>
@@ -12754,7 +13922,7 @@
                       </a:r>
                     </a:p>
                   </a:txBody>
-                  <a:tcPr marL="73152" marR="73152" marT="45720" marB="45720" anchor="ctr">
+                  <a:tcPr marL="73152" marR="73152" anchor="ctr">
                     <a:solidFill>
                       <a:srgbClr val="F1F3F6"/>
                     </a:solidFill>
@@ -12762,7 +13930,7 @@
                 </a:tc>
                 <a:tc>
                   <a:txBody>
-                    <a:bodyPr wrap="square"/>
+                    <a:bodyPr/>
                     <a:lstStyle/>
                     <a:p>
                       <a:pPr algn="l"/>
@@ -12787,7 +13955,7 @@
                       </a:r>
                     </a:p>
                   </a:txBody>
-                  <a:tcPr marL="73152" marR="73152" marT="45720" marB="45720" anchor="ctr">
+                  <a:tcPr marL="73152" marR="73152" anchor="ctr">
                     <a:solidFill>
                       <a:srgbClr val="F1F3F6"/>
                     </a:solidFill>
@@ -12795,7 +13963,7 @@
                 </a:tc>
                 <a:tc>
                   <a:txBody>
-                    <a:bodyPr wrap="square"/>
+                    <a:bodyPr/>
                     <a:lstStyle/>
                     <a:p>
                       <a:pPr algn="l"/>
@@ -12810,17 +13978,22 @@
                       </a:r>
                     </a:p>
                   </a:txBody>
-                  <a:tcPr marL="73152" marR="73152" marT="45720" marB="45720" anchor="ctr">
+                  <a:tcPr marL="73152" marR="73152" anchor="ctr">
                     <a:solidFill>
                       <a:srgbClr val="F1F3F6"/>
                     </a:solidFill>
                   </a:tcPr>
                 </a:tc>
+                <a:extLst>
+                  <a:ext uri="{0D108BD9-81ED-4DB2-BD59-A6C34878D82A}">
+                    <a16:rowId xmlns:a16="http://schemas.microsoft.com/office/drawing/2014/main" val="10002"/>
+                  </a:ext>
+                </a:extLst>
               </a:tr>
               <a:tr h="804672">
                 <a:tc>
                   <a:txBody>
-                    <a:bodyPr wrap="square"/>
+                    <a:bodyPr/>
                     <a:lstStyle/>
                     <a:p>
                       <a:pPr algn="l"/>
@@ -12835,7 +14008,7 @@
                       </a:r>
                     </a:p>
                   </a:txBody>
-                  <a:tcPr marL="73152" marR="73152" marT="45720" marB="45720" anchor="ctr">
+                  <a:tcPr marL="73152" marR="73152" anchor="ctr">
                     <a:solidFill>
                       <a:srgbClr val="FFFFFF"/>
                     </a:solidFill>
@@ -12843,7 +14016,7 @@
                 </a:tc>
                 <a:tc>
                   <a:txBody>
-                    <a:bodyPr wrap="square"/>
+                    <a:bodyPr/>
                     <a:lstStyle/>
                     <a:p>
                       <a:pPr algn="l"/>
@@ -12858,7 +14031,7 @@
                       </a:r>
                     </a:p>
                   </a:txBody>
-                  <a:tcPr marL="73152" marR="73152" marT="45720" marB="45720" anchor="ctr">
+                  <a:tcPr marL="73152" marR="73152" anchor="ctr">
                     <a:solidFill>
                       <a:srgbClr val="FFFFFF"/>
                     </a:solidFill>
@@ -12866,7 +14039,7 @@
                 </a:tc>
                 <a:tc>
                   <a:txBody>
-                    <a:bodyPr wrap="square"/>
+                    <a:bodyPr/>
                     <a:lstStyle/>
                     <a:p>
                       <a:pPr algn="l"/>
@@ -12881,7 +14054,7 @@
                       </a:r>
                     </a:p>
                   </a:txBody>
-                  <a:tcPr marL="73152" marR="73152" marT="45720" marB="45720" anchor="ctr">
+                  <a:tcPr marL="73152" marR="73152" anchor="ctr">
                     <a:solidFill>
                       <a:srgbClr val="FFFFFF"/>
                     </a:solidFill>
@@ -12889,7 +14062,7 @@
                 </a:tc>
                 <a:tc>
                   <a:txBody>
-                    <a:bodyPr wrap="square"/>
+                    <a:bodyPr/>
                     <a:lstStyle/>
                     <a:p>
                       <a:pPr algn="l"/>
@@ -12904,17 +14077,22 @@
                       </a:r>
                     </a:p>
                   </a:txBody>
-                  <a:tcPr marL="73152" marR="73152" marT="45720" marB="45720" anchor="ctr">
+                  <a:tcPr marL="73152" marR="73152" anchor="ctr">
                     <a:solidFill>
                       <a:srgbClr val="FFFFFF"/>
                     </a:solidFill>
                   </a:tcPr>
                 </a:tc>
+                <a:extLst>
+                  <a:ext uri="{0D108BD9-81ED-4DB2-BD59-A6C34878D82A}">
+                    <a16:rowId xmlns:a16="http://schemas.microsoft.com/office/drawing/2014/main" val="10003"/>
+                  </a:ext>
+                </a:extLst>
               </a:tr>
               <a:tr h="804672">
                 <a:tc>
                   <a:txBody>
-                    <a:bodyPr wrap="square"/>
+                    <a:bodyPr/>
                     <a:lstStyle/>
                     <a:p>
                       <a:pPr algn="l"/>
@@ -12929,7 +14107,7 @@
                       </a:r>
                     </a:p>
                   </a:txBody>
-                  <a:tcPr marL="73152" marR="73152" marT="45720" marB="45720" anchor="ctr">
+                  <a:tcPr marL="73152" marR="73152" anchor="ctr">
                     <a:solidFill>
                       <a:srgbClr val="F1F3F6"/>
                     </a:solidFill>
@@ -12937,7 +14115,7 @@
                 </a:tc>
                 <a:tc>
                   <a:txBody>
-                    <a:bodyPr wrap="square"/>
+                    <a:bodyPr/>
                     <a:lstStyle/>
                     <a:p>
                       <a:pPr algn="l"/>
@@ -12952,7 +14130,7 @@
                       </a:r>
                     </a:p>
                   </a:txBody>
-                  <a:tcPr marL="73152" marR="73152" marT="45720" marB="45720" anchor="ctr">
+                  <a:tcPr marL="73152" marR="73152" anchor="ctr">
                     <a:solidFill>
                       <a:srgbClr val="F1F3F6"/>
                     </a:solidFill>
@@ -12960,7 +14138,7 @@
                 </a:tc>
                 <a:tc>
                   <a:txBody>
-                    <a:bodyPr wrap="square"/>
+                    <a:bodyPr/>
                     <a:lstStyle/>
                     <a:p>
                       <a:pPr algn="l"/>
@@ -12975,7 +14153,7 @@
                       </a:r>
                     </a:p>
                   </a:txBody>
-                  <a:tcPr marL="73152" marR="73152" marT="45720" marB="45720" anchor="ctr">
+                  <a:tcPr marL="73152" marR="73152" anchor="ctr">
                     <a:solidFill>
                       <a:srgbClr val="F1F3F6"/>
                     </a:solidFill>
@@ -12983,7 +14161,7 @@
                 </a:tc>
                 <a:tc>
                   <a:txBody>
-                    <a:bodyPr wrap="square"/>
+                    <a:bodyPr/>
                     <a:lstStyle/>
                     <a:p>
                       <a:pPr algn="l"/>
@@ -12998,12 +14176,17 @@
                       </a:r>
                     </a:p>
                   </a:txBody>
-                  <a:tcPr marL="73152" marR="73152" marT="45720" marB="45720" anchor="ctr">
+                  <a:tcPr marL="73152" marR="73152" anchor="ctr">
                     <a:solidFill>
                       <a:srgbClr val="F1F3F6"/>
                     </a:solidFill>
                   </a:tcPr>
                 </a:tc>
+                <a:extLst>
+                  <a:ext uri="{0D108BD9-81ED-4DB2-BD59-A6C34878D82A}">
+                    <a16:rowId xmlns:a16="http://schemas.microsoft.com/office/drawing/2014/main" val="10004"/>
+                  </a:ext>
+                </a:extLst>
               </a:tr>
             </a:tbl>
           </a:graphicData>
@@ -13050,6 +14233,7 @@
           <a:lstStyle/>
           <a:p>
             <a:pPr algn="ctr"/>
+            <a:endParaRPr/>
           </a:p>
         </p:txBody>
       </p:sp>
@@ -13070,7 +14254,7 @@
           <a:noFill/>
         </p:spPr>
         <p:txBody>
-          <a:bodyPr wrap="square" lIns="0" rIns="0" tIns="0" bIns="0" anchor="ctr">
+          <a:bodyPr wrap="square" lIns="0" tIns="0" rIns="0" bIns="0" anchor="ctr">
             <a:spAutoFit/>
           </a:bodyPr>
           <a:lstStyle/>
@@ -13097,7 +14281,7 @@
 </file>
 
 <file path=ppt/slides/slide4.xml><?xml version="1.0" encoding="utf-8"?>
-<p:sld xmlns:a="http://schemas.openxmlformats.org/drawingml/2006/main" xmlns:p="http://schemas.openxmlformats.org/presentationml/2006/main" xmlns:r="http://schemas.openxmlformats.org/officeDocument/2006/relationships">
+<p:sld xmlns:a="http://schemas.openxmlformats.org/drawingml/2006/main" xmlns:r="http://schemas.openxmlformats.org/officeDocument/2006/relationships" xmlns:p="http://schemas.openxmlformats.org/presentationml/2006/main">
   <p:cSld>
     <p:bg>
       <p:bgPr>
@@ -13113,7 +14297,14 @@
         <p:cNvGrpSpPr/>
         <p:nvPr/>
       </p:nvGrpSpPr>
-      <p:grpSpPr/>
+      <p:grpSpPr>
+        <a:xfrm>
+          <a:off x="0" y="0"/>
+          <a:ext cx="0" cy="0"/>
+          <a:chOff x="0" y="0"/>
+          <a:chExt cx="0" cy="0"/>
+        </a:xfrm>
+      </p:grpSpPr>
       <p:sp>
         <p:nvSpPr>
           <p:cNvPr id="2" name="Rectangle 1"/>
@@ -13155,6 +14346,7 @@
           <a:lstStyle/>
           <a:p>
             <a:pPr algn="ctr"/>
+            <a:endParaRPr/>
           </a:p>
         </p:txBody>
       </p:sp>
@@ -13175,7 +14367,7 @@
           <a:noFill/>
         </p:spPr>
         <p:txBody>
-          <a:bodyPr wrap="square" lIns="0" rIns="0" tIns="0" bIns="0" anchor="t">
+          <a:bodyPr wrap="square" lIns="0" tIns="0" rIns="0" bIns="0" anchor="t">
             <a:spAutoFit/>
           </a:bodyPr>
           <a:lstStyle/>
@@ -13210,7 +14402,7 @@
           <a:noFill/>
         </p:spPr>
         <p:txBody>
-          <a:bodyPr wrap="square" lIns="0" rIns="0" tIns="0" bIns="0" anchor="t">
+          <a:bodyPr wrap="square" lIns="0" tIns="0" rIns="0" bIns="0" anchor="t">
             <a:spAutoFit/>
           </a:bodyPr>
           <a:lstStyle/>
@@ -13245,7 +14437,7 @@
           <a:noFill/>
         </p:spPr>
         <p:txBody>
-          <a:bodyPr wrap="square" lIns="0" rIns="0" tIns="0" bIns="0" anchor="t">
+          <a:bodyPr wrap="square" lIns="0" tIns="0" rIns="0" bIns="0" anchor="t">
             <a:spAutoFit/>
           </a:bodyPr>
           <a:lstStyle/>
@@ -13280,7 +14472,7 @@
           <a:noFill/>
         </p:spPr>
         <p:txBody>
-          <a:bodyPr wrap="square" lIns="0" rIns="0" tIns="0" bIns="0" anchor="t">
+          <a:bodyPr wrap="square" lIns="0" tIns="0" rIns="0" bIns="0" anchor="t">
             <a:spAutoFit/>
           </a:bodyPr>
           <a:lstStyle/>
@@ -13339,6 +14531,7 @@
           <a:lstStyle/>
           <a:p>
             <a:pPr algn="ctr"/>
+            <a:endParaRPr/>
           </a:p>
         </p:txBody>
       </p:sp>
@@ -13383,6 +14576,7 @@
           <a:lstStyle/>
           <a:p>
             <a:pPr algn="ctr"/>
+            <a:endParaRPr/>
           </a:p>
         </p:txBody>
       </p:sp>
@@ -13403,7 +14597,7 @@
           <a:noFill/>
         </p:spPr>
         <p:txBody>
-          <a:bodyPr wrap="square" lIns="0" rIns="0" tIns="0" bIns="0" anchor="ctr">
+          <a:bodyPr wrap="square" lIns="0" tIns="0" rIns="0" bIns="0" anchor="ctr">
             <a:spAutoFit/>
           </a:bodyPr>
           <a:lstStyle/>
@@ -13440,15 +14634,39 @@
                 <a:tableStyleId>{5C22544A-7EE6-4342-B048-85BDC9FD1C3A}</a:tableStyleId>
               </a:tblPr>
               <a:tblGrid>
-                <a:gridCol w="2011680"/>
-                <a:gridCol w="2194560"/>
-                <a:gridCol w="5760720"/>
-                <a:gridCol w="1097280"/>
+                <a:gridCol w="2011680">
+                  <a:extLst>
+                    <a:ext uri="{9D8B030D-6E8A-4147-A177-3AD203B41FA5}">
+                      <a16:colId xmlns:a16="http://schemas.microsoft.com/office/drawing/2014/main" val="20000"/>
+                    </a:ext>
+                  </a:extLst>
+                </a:gridCol>
+                <a:gridCol w="2194560">
+                  <a:extLst>
+                    <a:ext uri="{9D8B030D-6E8A-4147-A177-3AD203B41FA5}">
+                      <a16:colId xmlns:a16="http://schemas.microsoft.com/office/drawing/2014/main" val="20001"/>
+                    </a:ext>
+                  </a:extLst>
+                </a:gridCol>
+                <a:gridCol w="5760720">
+                  <a:extLst>
+                    <a:ext uri="{9D8B030D-6E8A-4147-A177-3AD203B41FA5}">
+                      <a16:colId xmlns:a16="http://schemas.microsoft.com/office/drawing/2014/main" val="20002"/>
+                    </a:ext>
+                  </a:extLst>
+                </a:gridCol>
+                <a:gridCol w="1097280">
+                  <a:extLst>
+                    <a:ext uri="{9D8B030D-6E8A-4147-A177-3AD203B41FA5}">
+                      <a16:colId xmlns:a16="http://schemas.microsoft.com/office/drawing/2014/main" val="20003"/>
+                    </a:ext>
+                  </a:extLst>
+                </a:gridCol>
               </a:tblGrid>
               <a:tr h="804672">
                 <a:tc>
                   <a:txBody>
-                    <a:bodyPr wrap="square"/>
+                    <a:bodyPr/>
                     <a:lstStyle/>
                     <a:p>
                       <a:pPr algn="ctr"/>
@@ -13463,7 +14681,7 @@
                       </a:r>
                     </a:p>
                   </a:txBody>
-                  <a:tcPr marL="73152" marR="73152" marT="45720" marB="45720" anchor="ctr">
+                  <a:tcPr marL="73152" marR="73152" anchor="ctr">
                     <a:solidFill>
                       <a:srgbClr val="D8DDE6"/>
                     </a:solidFill>
@@ -13471,7 +14689,7 @@
                 </a:tc>
                 <a:tc>
                   <a:txBody>
-                    <a:bodyPr wrap="square"/>
+                    <a:bodyPr/>
                     <a:lstStyle/>
                     <a:p>
                       <a:pPr algn="ctr"/>
@@ -13486,7 +14704,7 @@
                       </a:r>
                     </a:p>
                   </a:txBody>
-                  <a:tcPr marL="73152" marR="73152" marT="45720" marB="45720" anchor="ctr">
+                  <a:tcPr marL="73152" marR="73152" anchor="ctr">
                     <a:solidFill>
                       <a:srgbClr val="D8DDE6"/>
                     </a:solidFill>
@@ -13494,7 +14712,7 @@
                 </a:tc>
                 <a:tc>
                   <a:txBody>
-                    <a:bodyPr wrap="square"/>
+                    <a:bodyPr/>
                     <a:lstStyle/>
                     <a:p>
                       <a:pPr algn="ctr"/>
@@ -13509,7 +14727,7 @@
                       </a:r>
                     </a:p>
                   </a:txBody>
-                  <a:tcPr marL="73152" marR="73152" marT="45720" marB="45720" anchor="ctr">
+                  <a:tcPr marL="73152" marR="73152" anchor="ctr">
                     <a:solidFill>
                       <a:srgbClr val="D8DDE6"/>
                     </a:solidFill>
@@ -13517,7 +14735,7 @@
                 </a:tc>
                 <a:tc>
                   <a:txBody>
-                    <a:bodyPr wrap="square"/>
+                    <a:bodyPr/>
                     <a:lstStyle/>
                     <a:p>
                       <a:pPr algn="ctr"/>
@@ -13532,17 +14750,22 @@
                       </a:r>
                     </a:p>
                   </a:txBody>
-                  <a:tcPr marL="73152" marR="73152" marT="45720" marB="45720" anchor="ctr">
+                  <a:tcPr marL="73152" marR="73152" anchor="ctr">
                     <a:solidFill>
                       <a:srgbClr val="D8DDE6"/>
                     </a:solidFill>
                   </a:tcPr>
                 </a:tc>
+                <a:extLst>
+                  <a:ext uri="{0D108BD9-81ED-4DB2-BD59-A6C34878D82A}">
+                    <a16:rowId xmlns:a16="http://schemas.microsoft.com/office/drawing/2014/main" val="10000"/>
+                  </a:ext>
+                </a:extLst>
               </a:tr>
               <a:tr h="804672">
                 <a:tc>
                   <a:txBody>
-                    <a:bodyPr wrap="square"/>
+                    <a:bodyPr/>
                     <a:lstStyle/>
                     <a:p>
                       <a:pPr algn="l"/>
@@ -13557,7 +14780,7 @@
                       </a:r>
                     </a:p>
                   </a:txBody>
-                  <a:tcPr marL="73152" marR="73152" marT="45720" marB="45720" anchor="ctr">
+                  <a:tcPr marL="73152" marR="73152" anchor="ctr">
                     <a:solidFill>
                       <a:srgbClr val="FFFFFF"/>
                     </a:solidFill>
@@ -13565,7 +14788,7 @@
                 </a:tc>
                 <a:tc>
                   <a:txBody>
-                    <a:bodyPr wrap="square"/>
+                    <a:bodyPr/>
                     <a:lstStyle/>
                     <a:p>
                       <a:pPr algn="l"/>
@@ -13580,7 +14803,7 @@
                       </a:r>
                     </a:p>
                   </a:txBody>
-                  <a:tcPr marL="73152" marR="73152" marT="45720" marB="45720" anchor="ctr">
+                  <a:tcPr marL="73152" marR="73152" anchor="ctr">
                     <a:solidFill>
                       <a:srgbClr val="FFFFFF"/>
                     </a:solidFill>
@@ -13588,7 +14811,7 @@
                 </a:tc>
                 <a:tc>
                   <a:txBody>
-                    <a:bodyPr wrap="square"/>
+                    <a:bodyPr/>
                     <a:lstStyle/>
                     <a:p>
                       <a:pPr algn="l"/>
@@ -13603,7 +14826,7 @@
                       </a:r>
                     </a:p>
                   </a:txBody>
-                  <a:tcPr marL="73152" marR="73152" marT="45720" marB="45720" anchor="ctr">
+                  <a:tcPr marL="73152" marR="73152" anchor="ctr">
                     <a:solidFill>
                       <a:srgbClr val="FFFFFF"/>
                     </a:solidFill>
@@ -13611,7 +14834,7 @@
                 </a:tc>
                 <a:tc>
                   <a:txBody>
-                    <a:bodyPr wrap="square"/>
+                    <a:bodyPr/>
                     <a:lstStyle/>
                     <a:p>
                       <a:pPr algn="l"/>
@@ -13626,17 +14849,22 @@
                       </a:r>
                     </a:p>
                   </a:txBody>
-                  <a:tcPr marL="73152" marR="73152" marT="45720" marB="45720" anchor="ctr">
+                  <a:tcPr marL="73152" marR="73152" anchor="ctr">
                     <a:solidFill>
                       <a:srgbClr val="FFFFFF"/>
                     </a:solidFill>
                   </a:tcPr>
                 </a:tc>
+                <a:extLst>
+                  <a:ext uri="{0D108BD9-81ED-4DB2-BD59-A6C34878D82A}">
+                    <a16:rowId xmlns:a16="http://schemas.microsoft.com/office/drawing/2014/main" val="10001"/>
+                  </a:ext>
+                </a:extLst>
               </a:tr>
               <a:tr h="804672">
                 <a:tc>
                   <a:txBody>
-                    <a:bodyPr wrap="square"/>
+                    <a:bodyPr/>
                     <a:lstStyle/>
                     <a:p>
                       <a:pPr algn="l"/>
@@ -13651,7 +14879,7 @@
                       </a:r>
                     </a:p>
                   </a:txBody>
-                  <a:tcPr marL="73152" marR="73152" marT="45720" marB="45720" anchor="ctr">
+                  <a:tcPr marL="73152" marR="73152" anchor="ctr">
                     <a:solidFill>
                       <a:srgbClr val="F1F3F6"/>
                     </a:solidFill>
@@ -13659,7 +14887,7 @@
                 </a:tc>
                 <a:tc>
                   <a:txBody>
-                    <a:bodyPr wrap="square"/>
+                    <a:bodyPr/>
                     <a:lstStyle/>
                     <a:p>
                       <a:pPr algn="l"/>
@@ -13674,7 +14902,7 @@
                       </a:r>
                     </a:p>
                   </a:txBody>
-                  <a:tcPr marL="73152" marR="73152" marT="45720" marB="45720" anchor="ctr">
+                  <a:tcPr marL="73152" marR="73152" anchor="ctr">
                     <a:solidFill>
                       <a:srgbClr val="F1F3F6"/>
                     </a:solidFill>
@@ -13682,7 +14910,7 @@
                 </a:tc>
                 <a:tc>
                   <a:txBody>
-                    <a:bodyPr wrap="square"/>
+                    <a:bodyPr/>
                     <a:lstStyle/>
                     <a:p>
                       <a:pPr algn="l"/>
@@ -13697,7 +14925,7 @@
                       </a:r>
                     </a:p>
                   </a:txBody>
-                  <a:tcPr marL="73152" marR="73152" marT="45720" marB="45720" anchor="ctr">
+                  <a:tcPr marL="73152" marR="73152" anchor="ctr">
                     <a:solidFill>
                       <a:srgbClr val="F1F3F6"/>
                     </a:solidFill>
@@ -13705,7 +14933,7 @@
                 </a:tc>
                 <a:tc>
                   <a:txBody>
-                    <a:bodyPr wrap="square"/>
+                    <a:bodyPr/>
                     <a:lstStyle/>
                     <a:p>
                       <a:pPr algn="l"/>
@@ -13720,17 +14948,22 @@
                       </a:r>
                     </a:p>
                   </a:txBody>
-                  <a:tcPr marL="73152" marR="73152" marT="45720" marB="45720" anchor="ctr">
+                  <a:tcPr marL="73152" marR="73152" anchor="ctr">
                     <a:solidFill>
                       <a:srgbClr val="F1F3F6"/>
                     </a:solidFill>
                   </a:tcPr>
                 </a:tc>
+                <a:extLst>
+                  <a:ext uri="{0D108BD9-81ED-4DB2-BD59-A6C34878D82A}">
+                    <a16:rowId xmlns:a16="http://schemas.microsoft.com/office/drawing/2014/main" val="10002"/>
+                  </a:ext>
+                </a:extLst>
               </a:tr>
               <a:tr h="804672">
                 <a:tc>
                   <a:txBody>
-                    <a:bodyPr wrap="square"/>
+                    <a:bodyPr/>
                     <a:lstStyle/>
                     <a:p>
                       <a:pPr algn="l"/>
@@ -13745,7 +14978,7 @@
                       </a:r>
                     </a:p>
                   </a:txBody>
-                  <a:tcPr marL="73152" marR="73152" marT="45720" marB="45720" anchor="ctr">
+                  <a:tcPr marL="73152" marR="73152" anchor="ctr">
                     <a:solidFill>
                       <a:srgbClr val="FFFFFF"/>
                     </a:solidFill>
@@ -13753,7 +14986,7 @@
                 </a:tc>
                 <a:tc>
                   <a:txBody>
-                    <a:bodyPr wrap="square"/>
+                    <a:bodyPr/>
                     <a:lstStyle/>
                     <a:p>
                       <a:pPr algn="l"/>
@@ -13768,7 +15001,7 @@
                       </a:r>
                     </a:p>
                   </a:txBody>
-                  <a:tcPr marL="73152" marR="73152" marT="45720" marB="45720" anchor="ctr">
+                  <a:tcPr marL="73152" marR="73152" anchor="ctr">
                     <a:solidFill>
                       <a:srgbClr val="FFFFFF"/>
                     </a:solidFill>
@@ -13776,7 +15009,7 @@
                 </a:tc>
                 <a:tc>
                   <a:txBody>
-                    <a:bodyPr wrap="square"/>
+                    <a:bodyPr/>
                     <a:lstStyle/>
                     <a:p>
                       <a:pPr algn="l"/>
@@ -13791,7 +15024,7 @@
                       </a:r>
                     </a:p>
                   </a:txBody>
-                  <a:tcPr marL="73152" marR="73152" marT="45720" marB="45720" anchor="ctr">
+                  <a:tcPr marL="73152" marR="73152" anchor="ctr">
                     <a:solidFill>
                       <a:srgbClr val="FFFFFF"/>
                     </a:solidFill>
@@ -13799,7 +15032,7 @@
                 </a:tc>
                 <a:tc>
                   <a:txBody>
-                    <a:bodyPr wrap="square"/>
+                    <a:bodyPr/>
                     <a:lstStyle/>
                     <a:p>
                       <a:pPr algn="l"/>
@@ -13814,17 +15047,22 @@
                       </a:r>
                     </a:p>
                   </a:txBody>
-                  <a:tcPr marL="73152" marR="73152" marT="45720" marB="45720" anchor="ctr">
+                  <a:tcPr marL="73152" marR="73152" anchor="ctr">
                     <a:solidFill>
                       <a:srgbClr val="FFFFFF"/>
                     </a:solidFill>
                   </a:tcPr>
                 </a:tc>
+                <a:extLst>
+                  <a:ext uri="{0D108BD9-81ED-4DB2-BD59-A6C34878D82A}">
+                    <a16:rowId xmlns:a16="http://schemas.microsoft.com/office/drawing/2014/main" val="10003"/>
+                  </a:ext>
+                </a:extLst>
               </a:tr>
               <a:tr h="804672">
                 <a:tc>
                   <a:txBody>
-                    <a:bodyPr wrap="square"/>
+                    <a:bodyPr/>
                     <a:lstStyle/>
                     <a:p>
                       <a:pPr algn="l"/>
@@ -13839,7 +15077,7 @@
                       </a:r>
                     </a:p>
                   </a:txBody>
-                  <a:tcPr marL="73152" marR="73152" marT="45720" marB="45720" anchor="ctr">
+                  <a:tcPr marL="73152" marR="73152" anchor="ctr">
                     <a:solidFill>
                       <a:srgbClr val="F1F3F6"/>
                     </a:solidFill>
@@ -13847,7 +15085,7 @@
                 </a:tc>
                 <a:tc>
                   <a:txBody>
-                    <a:bodyPr wrap="square"/>
+                    <a:bodyPr/>
                     <a:lstStyle/>
                     <a:p>
                       <a:pPr algn="l"/>
@@ -13862,7 +15100,7 @@
                       </a:r>
                     </a:p>
                   </a:txBody>
-                  <a:tcPr marL="73152" marR="73152" marT="45720" marB="45720" anchor="ctr">
+                  <a:tcPr marL="73152" marR="73152" anchor="ctr">
                     <a:solidFill>
                       <a:srgbClr val="F1F3F6"/>
                     </a:solidFill>
@@ -13870,7 +15108,7 @@
                 </a:tc>
                 <a:tc>
                   <a:txBody>
-                    <a:bodyPr wrap="square"/>
+                    <a:bodyPr/>
                     <a:lstStyle/>
                     <a:p>
                       <a:pPr algn="l"/>
@@ -13885,7 +15123,7 @@
                       </a:r>
                     </a:p>
                   </a:txBody>
-                  <a:tcPr marL="73152" marR="73152" marT="45720" marB="45720" anchor="ctr">
+                  <a:tcPr marL="73152" marR="73152" anchor="ctr">
                     <a:solidFill>
                       <a:srgbClr val="F1F3F6"/>
                     </a:solidFill>
@@ -13893,7 +15131,7 @@
                 </a:tc>
                 <a:tc>
                   <a:txBody>
-                    <a:bodyPr wrap="square"/>
+                    <a:bodyPr/>
                     <a:lstStyle/>
                     <a:p>
                       <a:pPr algn="l"/>
@@ -13908,12 +15146,17 @@
                       </a:r>
                     </a:p>
                   </a:txBody>
-                  <a:tcPr marL="73152" marR="73152" marT="45720" marB="45720" anchor="ctr">
+                  <a:tcPr marL="73152" marR="73152" anchor="ctr">
                     <a:solidFill>
                       <a:srgbClr val="F1F3F6"/>
                     </a:solidFill>
                   </a:tcPr>
                 </a:tc>
+                <a:extLst>
+                  <a:ext uri="{0D108BD9-81ED-4DB2-BD59-A6C34878D82A}">
+                    <a16:rowId xmlns:a16="http://schemas.microsoft.com/office/drawing/2014/main" val="10004"/>
+                  </a:ext>
+                </a:extLst>
               </a:tr>
             </a:tbl>
           </a:graphicData>
@@ -13960,6 +15203,7 @@
           <a:lstStyle/>
           <a:p>
             <a:pPr algn="ctr"/>
+            <a:endParaRPr/>
           </a:p>
         </p:txBody>
       </p:sp>
@@ -13980,7 +15224,7 @@
           <a:noFill/>
         </p:spPr>
         <p:txBody>
-          <a:bodyPr wrap="square" lIns="0" rIns="0" tIns="0" bIns="0" anchor="ctr">
+          <a:bodyPr wrap="square" lIns="0" tIns="0" rIns="0" bIns="0" anchor="ctr">
             <a:spAutoFit/>
           </a:bodyPr>
           <a:lstStyle/>
@@ -14007,7 +15251,7 @@
 </file>
 
 <file path=ppt/slides/slide5.xml><?xml version="1.0" encoding="utf-8"?>
-<p:sld xmlns:a="http://schemas.openxmlformats.org/drawingml/2006/main" xmlns:p="http://schemas.openxmlformats.org/presentationml/2006/main" xmlns:r="http://schemas.openxmlformats.org/officeDocument/2006/relationships">
+<p:sld xmlns:a="http://schemas.openxmlformats.org/drawingml/2006/main" xmlns:r="http://schemas.openxmlformats.org/officeDocument/2006/relationships" xmlns:p="http://schemas.openxmlformats.org/presentationml/2006/main">
   <p:cSld>
     <p:bg>
       <p:bgPr>
@@ -14023,7 +15267,14 @@
         <p:cNvGrpSpPr/>
         <p:nvPr/>
       </p:nvGrpSpPr>
-      <p:grpSpPr/>
+      <p:grpSpPr>
+        <a:xfrm>
+          <a:off x="0" y="0"/>
+          <a:ext cx="0" cy="0"/>
+          <a:chOff x="0" y="0"/>
+          <a:chExt cx="0" cy="0"/>
+        </a:xfrm>
+      </p:grpSpPr>
       <p:sp>
         <p:nvSpPr>
           <p:cNvPr id="2" name="Rectangle 1"/>
@@ -14065,6 +15316,7 @@
           <a:lstStyle/>
           <a:p>
             <a:pPr algn="ctr"/>
+            <a:endParaRPr/>
           </a:p>
         </p:txBody>
       </p:sp>
@@ -14085,7 +15337,7 @@
           <a:noFill/>
         </p:spPr>
         <p:txBody>
-          <a:bodyPr wrap="square" lIns="0" rIns="0" tIns="0" bIns="0" anchor="t">
+          <a:bodyPr wrap="square" lIns="0" tIns="0" rIns="0" bIns="0" anchor="t">
             <a:spAutoFit/>
           </a:bodyPr>
           <a:lstStyle/>
@@ -14120,7 +15372,7 @@
           <a:noFill/>
         </p:spPr>
         <p:txBody>
-          <a:bodyPr wrap="square" lIns="0" rIns="0" tIns="0" bIns="0" anchor="t">
+          <a:bodyPr wrap="square" lIns="0" tIns="0" rIns="0" bIns="0" anchor="t">
             <a:spAutoFit/>
           </a:bodyPr>
           <a:lstStyle/>
@@ -14155,7 +15407,7 @@
           <a:noFill/>
         </p:spPr>
         <p:txBody>
-          <a:bodyPr wrap="square" lIns="0" rIns="0" tIns="0" bIns="0" anchor="t">
+          <a:bodyPr wrap="square" lIns="0" tIns="0" rIns="0" bIns="0" anchor="t">
             <a:spAutoFit/>
           </a:bodyPr>
           <a:lstStyle/>
@@ -14190,7 +15442,7 @@
           <a:noFill/>
         </p:spPr>
         <p:txBody>
-          <a:bodyPr wrap="square" lIns="0" rIns="0" tIns="0" bIns="0" anchor="t">
+          <a:bodyPr wrap="square" lIns="0" tIns="0" rIns="0" bIns="0" anchor="t">
             <a:spAutoFit/>
           </a:bodyPr>
           <a:lstStyle/>
@@ -14249,6 +15501,7 @@
           <a:lstStyle/>
           <a:p>
             <a:pPr algn="ctr"/>
+            <a:endParaRPr/>
           </a:p>
         </p:txBody>
       </p:sp>
@@ -14293,6 +15546,7 @@
           <a:lstStyle/>
           <a:p>
             <a:pPr algn="ctr"/>
+            <a:endParaRPr/>
           </a:p>
         </p:txBody>
       </p:sp>
@@ -14313,7 +15567,7 @@
           <a:noFill/>
         </p:spPr>
         <p:txBody>
-          <a:bodyPr wrap="square" lIns="0" rIns="0" tIns="0" bIns="0" anchor="ctr">
+          <a:bodyPr wrap="square" lIns="0" tIns="0" rIns="0" bIns="0" anchor="ctr">
             <a:spAutoFit/>
           </a:bodyPr>
           <a:lstStyle/>
@@ -14350,15 +15604,39 @@
                 <a:tableStyleId>{5C22544A-7EE6-4342-B048-85BDC9FD1C3A}</a:tableStyleId>
               </a:tblPr>
               <a:tblGrid>
-                <a:gridCol w="2011680"/>
-                <a:gridCol w="2194560"/>
-                <a:gridCol w="5760720"/>
-                <a:gridCol w="1097280"/>
+                <a:gridCol w="2011680">
+                  <a:extLst>
+                    <a:ext uri="{9D8B030D-6E8A-4147-A177-3AD203B41FA5}">
+                      <a16:colId xmlns:a16="http://schemas.microsoft.com/office/drawing/2014/main" val="20000"/>
+                    </a:ext>
+                  </a:extLst>
+                </a:gridCol>
+                <a:gridCol w="2194560">
+                  <a:extLst>
+                    <a:ext uri="{9D8B030D-6E8A-4147-A177-3AD203B41FA5}">
+                      <a16:colId xmlns:a16="http://schemas.microsoft.com/office/drawing/2014/main" val="20001"/>
+                    </a:ext>
+                  </a:extLst>
+                </a:gridCol>
+                <a:gridCol w="5760720">
+                  <a:extLst>
+                    <a:ext uri="{9D8B030D-6E8A-4147-A177-3AD203B41FA5}">
+                      <a16:colId xmlns:a16="http://schemas.microsoft.com/office/drawing/2014/main" val="20002"/>
+                    </a:ext>
+                  </a:extLst>
+                </a:gridCol>
+                <a:gridCol w="1097280">
+                  <a:extLst>
+                    <a:ext uri="{9D8B030D-6E8A-4147-A177-3AD203B41FA5}">
+                      <a16:colId xmlns:a16="http://schemas.microsoft.com/office/drawing/2014/main" val="20003"/>
+                    </a:ext>
+                  </a:extLst>
+                </a:gridCol>
               </a:tblGrid>
               <a:tr h="804672">
                 <a:tc>
                   <a:txBody>
-                    <a:bodyPr wrap="square"/>
+                    <a:bodyPr/>
                     <a:lstStyle/>
                     <a:p>
                       <a:pPr algn="ctr"/>
@@ -14373,7 +15651,7 @@
                       </a:r>
                     </a:p>
                   </a:txBody>
-                  <a:tcPr marL="73152" marR="73152" marT="45720" marB="45720" anchor="ctr">
+                  <a:tcPr marL="73152" marR="73152" anchor="ctr">
                     <a:solidFill>
                       <a:srgbClr val="D8DDE6"/>
                     </a:solidFill>
@@ -14381,7 +15659,7 @@
                 </a:tc>
                 <a:tc>
                   <a:txBody>
-                    <a:bodyPr wrap="square"/>
+                    <a:bodyPr/>
                     <a:lstStyle/>
                     <a:p>
                       <a:pPr algn="ctr"/>
@@ -14396,7 +15674,7 @@
                       </a:r>
                     </a:p>
                   </a:txBody>
-                  <a:tcPr marL="73152" marR="73152" marT="45720" marB="45720" anchor="ctr">
+                  <a:tcPr marL="73152" marR="73152" anchor="ctr">
                     <a:solidFill>
                       <a:srgbClr val="D8DDE6"/>
                     </a:solidFill>
@@ -14404,7 +15682,7 @@
                 </a:tc>
                 <a:tc>
                   <a:txBody>
-                    <a:bodyPr wrap="square"/>
+                    <a:bodyPr/>
                     <a:lstStyle/>
                     <a:p>
                       <a:pPr algn="ctr"/>
@@ -14419,7 +15697,7 @@
                       </a:r>
                     </a:p>
                   </a:txBody>
-                  <a:tcPr marL="73152" marR="73152" marT="45720" marB="45720" anchor="ctr">
+                  <a:tcPr marL="73152" marR="73152" anchor="ctr">
                     <a:solidFill>
                       <a:srgbClr val="D8DDE6"/>
                     </a:solidFill>
@@ -14427,7 +15705,7 @@
                 </a:tc>
                 <a:tc>
                   <a:txBody>
-                    <a:bodyPr wrap="square"/>
+                    <a:bodyPr/>
                     <a:lstStyle/>
                     <a:p>
                       <a:pPr algn="ctr"/>
@@ -14442,17 +15720,22 @@
                       </a:r>
                     </a:p>
                   </a:txBody>
-                  <a:tcPr marL="73152" marR="73152" marT="45720" marB="45720" anchor="ctr">
+                  <a:tcPr marL="73152" marR="73152" anchor="ctr">
                     <a:solidFill>
                       <a:srgbClr val="D8DDE6"/>
                     </a:solidFill>
                   </a:tcPr>
                 </a:tc>
+                <a:extLst>
+                  <a:ext uri="{0D108BD9-81ED-4DB2-BD59-A6C34878D82A}">
+                    <a16:rowId xmlns:a16="http://schemas.microsoft.com/office/drawing/2014/main" val="10000"/>
+                  </a:ext>
+                </a:extLst>
               </a:tr>
               <a:tr h="804672">
                 <a:tc>
                   <a:txBody>
-                    <a:bodyPr wrap="square"/>
+                    <a:bodyPr/>
                     <a:lstStyle/>
                     <a:p>
                       <a:pPr algn="l"/>
@@ -14467,7 +15750,7 @@
                       </a:r>
                     </a:p>
                   </a:txBody>
-                  <a:tcPr marL="73152" marR="73152" marT="45720" marB="45720" anchor="ctr">
+                  <a:tcPr marL="73152" marR="73152" anchor="ctr">
                     <a:solidFill>
                       <a:srgbClr val="FFFFFF"/>
                     </a:solidFill>
@@ -14475,7 +15758,7 @@
                 </a:tc>
                 <a:tc>
                   <a:txBody>
-                    <a:bodyPr wrap="square"/>
+                    <a:bodyPr/>
                     <a:lstStyle/>
                     <a:p>
                       <a:pPr algn="l"/>
@@ -14490,7 +15773,7 @@
                       </a:r>
                     </a:p>
                   </a:txBody>
-                  <a:tcPr marL="73152" marR="73152" marT="45720" marB="45720" anchor="ctr">
+                  <a:tcPr marL="73152" marR="73152" anchor="ctr">
                     <a:solidFill>
                       <a:srgbClr val="FFFFFF"/>
                     </a:solidFill>
@@ -14498,7 +15781,7 @@
                 </a:tc>
                 <a:tc>
                   <a:txBody>
-                    <a:bodyPr wrap="square"/>
+                    <a:bodyPr/>
                     <a:lstStyle/>
                     <a:p>
                       <a:pPr algn="l"/>
@@ -14513,7 +15796,7 @@
                       </a:r>
                     </a:p>
                   </a:txBody>
-                  <a:tcPr marL="73152" marR="73152" marT="45720" marB="45720" anchor="ctr">
+                  <a:tcPr marL="73152" marR="73152" anchor="ctr">
                     <a:solidFill>
                       <a:srgbClr val="FFFFFF"/>
                     </a:solidFill>
@@ -14521,7 +15804,7 @@
                 </a:tc>
                 <a:tc>
                   <a:txBody>
-                    <a:bodyPr wrap="square"/>
+                    <a:bodyPr/>
                     <a:lstStyle/>
                     <a:p>
                       <a:pPr algn="l"/>
@@ -14536,17 +15819,22 @@
                       </a:r>
                     </a:p>
                   </a:txBody>
-                  <a:tcPr marL="73152" marR="73152" marT="45720" marB="45720" anchor="ctr">
+                  <a:tcPr marL="73152" marR="73152" anchor="ctr">
                     <a:solidFill>
                       <a:srgbClr val="FFFFFF"/>
                     </a:solidFill>
                   </a:tcPr>
                 </a:tc>
+                <a:extLst>
+                  <a:ext uri="{0D108BD9-81ED-4DB2-BD59-A6C34878D82A}">
+                    <a16:rowId xmlns:a16="http://schemas.microsoft.com/office/drawing/2014/main" val="10001"/>
+                  </a:ext>
+                </a:extLst>
               </a:tr>
               <a:tr h="804672">
                 <a:tc>
                   <a:txBody>
-                    <a:bodyPr wrap="square"/>
+                    <a:bodyPr/>
                     <a:lstStyle/>
                     <a:p>
                       <a:pPr algn="l"/>
@@ -14561,7 +15849,7 @@
                       </a:r>
                     </a:p>
                   </a:txBody>
-                  <a:tcPr marL="73152" marR="73152" marT="45720" marB="45720" anchor="ctr">
+                  <a:tcPr marL="73152" marR="73152" anchor="ctr">
                     <a:solidFill>
                       <a:srgbClr val="F1F3F6"/>
                     </a:solidFill>
@@ -14569,7 +15857,7 @@
                 </a:tc>
                 <a:tc>
                   <a:txBody>
-                    <a:bodyPr wrap="square"/>
+                    <a:bodyPr/>
                     <a:lstStyle/>
                     <a:p>
                       <a:pPr algn="l"/>
@@ -14584,7 +15872,7 @@
                       </a:r>
                     </a:p>
                   </a:txBody>
-                  <a:tcPr marL="73152" marR="73152" marT="45720" marB="45720" anchor="ctr">
+                  <a:tcPr marL="73152" marR="73152" anchor="ctr">
                     <a:solidFill>
                       <a:srgbClr val="F1F3F6"/>
                     </a:solidFill>
@@ -14592,7 +15880,7 @@
                 </a:tc>
                 <a:tc>
                   <a:txBody>
-                    <a:bodyPr wrap="square"/>
+                    <a:bodyPr/>
                     <a:lstStyle/>
                     <a:p>
                       <a:pPr algn="l"/>
@@ -14607,7 +15895,7 @@
                       </a:r>
                     </a:p>
                   </a:txBody>
-                  <a:tcPr marL="73152" marR="73152" marT="45720" marB="45720" anchor="ctr">
+                  <a:tcPr marL="73152" marR="73152" anchor="ctr">
                     <a:solidFill>
                       <a:srgbClr val="F1F3F6"/>
                     </a:solidFill>
@@ -14615,7 +15903,7 @@
                 </a:tc>
                 <a:tc>
                   <a:txBody>
-                    <a:bodyPr wrap="square"/>
+                    <a:bodyPr/>
                     <a:lstStyle/>
                     <a:p>
                       <a:pPr algn="l"/>
@@ -14631,17 +15919,22 @@
                       </a:r>
                     </a:p>
                   </a:txBody>
-                  <a:tcPr marL="73152" marR="73152" marT="45720" marB="45720" anchor="ctr">
+                  <a:tcPr marL="73152" marR="73152" anchor="ctr">
                     <a:solidFill>
                       <a:srgbClr val="F1F3F6"/>
                     </a:solidFill>
                   </a:tcPr>
                 </a:tc>
+                <a:extLst>
+                  <a:ext uri="{0D108BD9-81ED-4DB2-BD59-A6C34878D82A}">
+                    <a16:rowId xmlns:a16="http://schemas.microsoft.com/office/drawing/2014/main" val="10002"/>
+                  </a:ext>
+                </a:extLst>
               </a:tr>
               <a:tr h="804672">
                 <a:tc>
                   <a:txBody>
-                    <a:bodyPr wrap="square"/>
+                    <a:bodyPr/>
                     <a:lstStyle/>
                     <a:p>
                       <a:pPr algn="l"/>
@@ -14656,7 +15949,7 @@
                       </a:r>
                     </a:p>
                   </a:txBody>
-                  <a:tcPr marL="73152" marR="73152" marT="45720" marB="45720" anchor="ctr">
+                  <a:tcPr marL="73152" marR="73152" anchor="ctr">
                     <a:solidFill>
                       <a:srgbClr val="FFFFFF"/>
                     </a:solidFill>
@@ -14664,7 +15957,7 @@
                 </a:tc>
                 <a:tc>
                   <a:txBody>
-                    <a:bodyPr wrap="square"/>
+                    <a:bodyPr/>
                     <a:lstStyle/>
                     <a:p>
                       <a:pPr algn="l"/>
@@ -14679,7 +15972,7 @@
                       </a:r>
                     </a:p>
                   </a:txBody>
-                  <a:tcPr marL="73152" marR="73152" marT="45720" marB="45720" anchor="ctr">
+                  <a:tcPr marL="73152" marR="73152" anchor="ctr">
                     <a:solidFill>
                       <a:srgbClr val="FFFFFF"/>
                     </a:solidFill>
@@ -14687,7 +15980,7 @@
                 </a:tc>
                 <a:tc>
                   <a:txBody>
-                    <a:bodyPr wrap="square"/>
+                    <a:bodyPr/>
                     <a:lstStyle/>
                     <a:p>
                       <a:pPr algn="l"/>
@@ -14702,7 +15995,7 @@
                       </a:r>
                     </a:p>
                   </a:txBody>
-                  <a:tcPr marL="73152" marR="73152" marT="45720" marB="45720" anchor="ctr">
+                  <a:tcPr marL="73152" marR="73152" anchor="ctr">
                     <a:solidFill>
                       <a:srgbClr val="FFFFFF"/>
                     </a:solidFill>
@@ -14710,7 +16003,7 @@
                 </a:tc>
                 <a:tc>
                   <a:txBody>
-                    <a:bodyPr wrap="square"/>
+                    <a:bodyPr/>
                     <a:lstStyle/>
                     <a:p>
                       <a:pPr algn="l"/>
@@ -14725,17 +16018,22 @@
                       </a:r>
                     </a:p>
                   </a:txBody>
-                  <a:tcPr marL="73152" marR="73152" marT="45720" marB="45720" anchor="ctr">
+                  <a:tcPr marL="73152" marR="73152" anchor="ctr">
                     <a:solidFill>
                       <a:srgbClr val="FFFFFF"/>
                     </a:solidFill>
                   </a:tcPr>
                 </a:tc>
+                <a:extLst>
+                  <a:ext uri="{0D108BD9-81ED-4DB2-BD59-A6C34878D82A}">
+                    <a16:rowId xmlns:a16="http://schemas.microsoft.com/office/drawing/2014/main" val="10003"/>
+                  </a:ext>
+                </a:extLst>
               </a:tr>
               <a:tr h="804672">
                 <a:tc>
                   <a:txBody>
-                    <a:bodyPr wrap="square"/>
+                    <a:bodyPr/>
                     <a:lstStyle/>
                     <a:p>
                       <a:pPr algn="l"/>
@@ -14750,7 +16048,7 @@
                       </a:r>
                     </a:p>
                   </a:txBody>
-                  <a:tcPr marL="73152" marR="73152" marT="45720" marB="45720" anchor="ctr">
+                  <a:tcPr marL="73152" marR="73152" anchor="ctr">
                     <a:solidFill>
                       <a:srgbClr val="F1F3F6"/>
                     </a:solidFill>
@@ -14758,7 +16056,7 @@
                 </a:tc>
                 <a:tc>
                   <a:txBody>
-                    <a:bodyPr wrap="square"/>
+                    <a:bodyPr/>
                     <a:lstStyle/>
                     <a:p>
                       <a:pPr algn="l"/>
@@ -14773,7 +16071,7 @@
                       </a:r>
                     </a:p>
                   </a:txBody>
-                  <a:tcPr marL="73152" marR="73152" marT="45720" marB="45720" anchor="ctr">
+                  <a:tcPr marL="73152" marR="73152" anchor="ctr">
                     <a:solidFill>
                       <a:srgbClr val="F1F3F6"/>
                     </a:solidFill>
@@ -14781,7 +16079,7 @@
                 </a:tc>
                 <a:tc>
                   <a:txBody>
-                    <a:bodyPr wrap="square"/>
+                    <a:bodyPr/>
                     <a:lstStyle/>
                     <a:p>
                       <a:pPr algn="l"/>
@@ -14796,7 +16094,7 @@
                       </a:r>
                     </a:p>
                   </a:txBody>
-                  <a:tcPr marL="73152" marR="73152" marT="45720" marB="45720" anchor="ctr">
+                  <a:tcPr marL="73152" marR="73152" anchor="ctr">
                     <a:solidFill>
                       <a:srgbClr val="F1F3F6"/>
                     </a:solidFill>
@@ -14804,7 +16102,7 @@
                 </a:tc>
                 <a:tc>
                   <a:txBody>
-                    <a:bodyPr wrap="square"/>
+                    <a:bodyPr/>
                     <a:lstStyle/>
                     <a:p>
                       <a:pPr algn="l"/>
@@ -14819,12 +16117,17 @@
                       </a:r>
                     </a:p>
                   </a:txBody>
-                  <a:tcPr marL="73152" marR="73152" marT="45720" marB="45720" anchor="ctr">
+                  <a:tcPr marL="73152" marR="73152" anchor="ctr">
                     <a:solidFill>
                       <a:srgbClr val="F1F3F6"/>
                     </a:solidFill>
                   </a:tcPr>
                 </a:tc>
+                <a:extLst>
+                  <a:ext uri="{0D108BD9-81ED-4DB2-BD59-A6C34878D82A}">
+                    <a16:rowId xmlns:a16="http://schemas.microsoft.com/office/drawing/2014/main" val="10004"/>
+                  </a:ext>
+                </a:extLst>
               </a:tr>
             </a:tbl>
           </a:graphicData>
@@ -14871,6 +16174,7 @@
           <a:lstStyle/>
           <a:p>
             <a:pPr algn="ctr"/>
+            <a:endParaRPr/>
           </a:p>
         </p:txBody>
       </p:sp>
@@ -14891,7 +16195,7 @@
           <a:noFill/>
         </p:spPr>
         <p:txBody>
-          <a:bodyPr wrap="square" lIns="0" rIns="0" tIns="0" bIns="0" anchor="ctr">
+          <a:bodyPr wrap="square" lIns="0" tIns="0" rIns="0" bIns="0" anchor="ctr">
             <a:spAutoFit/>
           </a:bodyPr>
           <a:lstStyle/>
@@ -14918,7 +16222,7 @@
 </file>
 
 <file path=ppt/slides/slide6.xml><?xml version="1.0" encoding="utf-8"?>
-<p:sld xmlns:a="http://schemas.openxmlformats.org/drawingml/2006/main" xmlns:p="http://schemas.openxmlformats.org/presentationml/2006/main" xmlns:r="http://schemas.openxmlformats.org/officeDocument/2006/relationships">
+<p:sld xmlns:a="http://schemas.openxmlformats.org/drawingml/2006/main" xmlns:r="http://schemas.openxmlformats.org/officeDocument/2006/relationships" xmlns:p="http://schemas.openxmlformats.org/presentationml/2006/main">
   <p:cSld>
     <p:bg>
       <p:bgPr>
@@ -14934,7 +16238,14 @@
         <p:cNvGrpSpPr/>
         <p:nvPr/>
       </p:nvGrpSpPr>
-      <p:grpSpPr/>
+      <p:grpSpPr>
+        <a:xfrm>
+          <a:off x="0" y="0"/>
+          <a:ext cx="0" cy="0"/>
+          <a:chOff x="0" y="0"/>
+          <a:chExt cx="0" cy="0"/>
+        </a:xfrm>
+      </p:grpSpPr>
       <p:sp>
         <p:nvSpPr>
           <p:cNvPr id="2" name="Rectangle 1"/>
@@ -14976,6 +16287,7 @@
           <a:lstStyle/>
           <a:p>
             <a:pPr algn="ctr"/>
+            <a:endParaRPr/>
           </a:p>
         </p:txBody>
       </p:sp>
@@ -14996,7 +16308,7 @@
           <a:noFill/>
         </p:spPr>
         <p:txBody>
-          <a:bodyPr wrap="square" lIns="0" rIns="0" tIns="0" bIns="0" anchor="t">
+          <a:bodyPr wrap="square" lIns="0" tIns="0" rIns="0" bIns="0" anchor="t">
             <a:spAutoFit/>
           </a:bodyPr>
           <a:lstStyle/>
@@ -15031,7 +16343,7 @@
           <a:noFill/>
         </p:spPr>
         <p:txBody>
-          <a:bodyPr wrap="square" lIns="0" rIns="0" tIns="0" bIns="0" anchor="t">
+          <a:bodyPr wrap="square" lIns="0" tIns="0" rIns="0" bIns="0" anchor="t">
             <a:spAutoFit/>
           </a:bodyPr>
           <a:lstStyle/>
@@ -15066,7 +16378,7 @@
           <a:noFill/>
         </p:spPr>
         <p:txBody>
-          <a:bodyPr wrap="square" lIns="0" rIns="0" tIns="0" bIns="0" anchor="t">
+          <a:bodyPr wrap="square" lIns="0" tIns="0" rIns="0" bIns="0" anchor="t">
             <a:spAutoFit/>
           </a:bodyPr>
           <a:lstStyle/>
@@ -15101,7 +16413,7 @@
           <a:noFill/>
         </p:spPr>
         <p:txBody>
-          <a:bodyPr wrap="square" lIns="0" rIns="0" tIns="0" bIns="0" anchor="t">
+          <a:bodyPr wrap="square" lIns="0" tIns="0" rIns="0" bIns="0" anchor="t">
             <a:spAutoFit/>
           </a:bodyPr>
           <a:lstStyle/>
@@ -15160,6 +16472,7 @@
           <a:lstStyle/>
           <a:p>
             <a:pPr algn="ctr"/>
+            <a:endParaRPr/>
           </a:p>
         </p:txBody>
       </p:sp>
@@ -15173,7 +16486,7 @@
         </p:nvGraphicFramePr>
         <p:xfrm>
           <a:off x="548640" y="1417320"/>
-          <a:ext cx="11064238" cy="1828800"/>
+          <a:ext cx="11064238" cy="1889760"/>
         </p:xfrm>
         <a:graphic>
           <a:graphicData uri="http://schemas.openxmlformats.org/drawingml/2006/table">
@@ -15182,14 +16495,32 @@
                 <a:tableStyleId>{5C22544A-7EE6-4342-B048-85BDC9FD1C3A}</a:tableStyleId>
               </a:tblPr>
               <a:tblGrid>
-                <a:gridCol w="1828799"/>
-                <a:gridCol w="4937760"/>
-                <a:gridCol w="4297679"/>
+                <a:gridCol w="1828799">
+                  <a:extLst>
+                    <a:ext uri="{9D8B030D-6E8A-4147-A177-3AD203B41FA5}">
+                      <a16:colId xmlns:a16="http://schemas.microsoft.com/office/drawing/2014/main" val="20000"/>
+                    </a:ext>
+                  </a:extLst>
+                </a:gridCol>
+                <a:gridCol w="4937760">
+                  <a:extLst>
+                    <a:ext uri="{9D8B030D-6E8A-4147-A177-3AD203B41FA5}">
+                      <a16:colId xmlns:a16="http://schemas.microsoft.com/office/drawing/2014/main" val="20001"/>
+                    </a:ext>
+                  </a:extLst>
+                </a:gridCol>
+                <a:gridCol w="4297679">
+                  <a:extLst>
+                    <a:ext uri="{9D8B030D-6E8A-4147-A177-3AD203B41FA5}">
+                      <a16:colId xmlns:a16="http://schemas.microsoft.com/office/drawing/2014/main" val="20002"/>
+                    </a:ext>
+                  </a:extLst>
+                </a:gridCol>
               </a:tblGrid>
               <a:tr h="457200">
                 <a:tc>
                   <a:txBody>
-                    <a:bodyPr wrap="square"/>
+                    <a:bodyPr/>
                     <a:lstStyle/>
                     <a:p>
                       <a:pPr algn="ctr"/>
@@ -15204,7 +16535,7 @@
                       </a:r>
                     </a:p>
                   </a:txBody>
-                  <a:tcPr marL="73152" marR="73152" marT="45720" marB="45720" anchor="ctr">
+                  <a:tcPr marL="73152" marR="73152" anchor="ctr">
                     <a:solidFill>
                       <a:srgbClr val="D8DDE6"/>
                     </a:solidFill>
@@ -15212,7 +16543,7 @@
                 </a:tc>
                 <a:tc>
                   <a:txBody>
-                    <a:bodyPr wrap="square"/>
+                    <a:bodyPr/>
                     <a:lstStyle/>
                     <a:p>
                       <a:pPr algn="ctr"/>
@@ -15227,7 +16558,7 @@
                       </a:r>
                     </a:p>
                   </a:txBody>
-                  <a:tcPr marL="73152" marR="73152" marT="45720" marB="45720" anchor="ctr">
+                  <a:tcPr marL="73152" marR="73152" anchor="ctr">
                     <a:solidFill>
                       <a:srgbClr val="D8DDE6"/>
                     </a:solidFill>
@@ -15235,7 +16566,7 @@
                 </a:tc>
                 <a:tc>
                   <a:txBody>
-                    <a:bodyPr wrap="square"/>
+                    <a:bodyPr/>
                     <a:lstStyle/>
                     <a:p>
                       <a:pPr algn="ctr"/>
@@ -15250,17 +16581,22 @@
                       </a:r>
                     </a:p>
                   </a:txBody>
-                  <a:tcPr marL="73152" marR="73152" marT="45720" marB="45720" anchor="ctr">
+                  <a:tcPr marL="73152" marR="73152" anchor="ctr">
                     <a:solidFill>
                       <a:srgbClr val="D8DDE6"/>
                     </a:solidFill>
                   </a:tcPr>
                 </a:tc>
+                <a:extLst>
+                  <a:ext uri="{0D108BD9-81ED-4DB2-BD59-A6C34878D82A}">
+                    <a16:rowId xmlns:a16="http://schemas.microsoft.com/office/drawing/2014/main" val="10000"/>
+                  </a:ext>
+                </a:extLst>
               </a:tr>
               <a:tr h="457200">
                 <a:tc>
                   <a:txBody>
-                    <a:bodyPr wrap="square"/>
+                    <a:bodyPr/>
                     <a:lstStyle/>
                     <a:p>
                       <a:pPr algn="l"/>
@@ -15275,7 +16611,7 @@
                       </a:r>
                     </a:p>
                   </a:txBody>
-                  <a:tcPr marL="73152" marR="73152" marT="45720" marB="45720" anchor="ctr">
+                  <a:tcPr marL="73152" marR="73152" anchor="ctr">
                     <a:solidFill>
                       <a:srgbClr val="FFFFFF"/>
                     </a:solidFill>
@@ -15283,7 +16619,7 @@
                 </a:tc>
                 <a:tc>
                   <a:txBody>
-                    <a:bodyPr wrap="square"/>
+                    <a:bodyPr/>
                     <a:lstStyle/>
                     <a:p>
                       <a:pPr algn="l"/>
@@ -15298,7 +16634,7 @@
                       </a:r>
                     </a:p>
                   </a:txBody>
-                  <a:tcPr marL="73152" marR="73152" marT="45720" marB="45720" anchor="ctr">
+                  <a:tcPr marL="73152" marR="73152" anchor="ctr">
                     <a:solidFill>
                       <a:srgbClr val="FFFFFF"/>
                     </a:solidFill>
@@ -15306,7 +16642,7 @@
                 </a:tc>
                 <a:tc>
                   <a:txBody>
-                    <a:bodyPr wrap="square"/>
+                    <a:bodyPr/>
                     <a:lstStyle/>
                     <a:p>
                       <a:pPr algn="l"/>
@@ -15321,17 +16657,22 @@
                       </a:r>
                     </a:p>
                   </a:txBody>
-                  <a:tcPr marL="73152" marR="73152" marT="45720" marB="45720" anchor="ctr">
+                  <a:tcPr marL="73152" marR="73152" anchor="ctr">
                     <a:solidFill>
                       <a:srgbClr val="FFFFFF"/>
                     </a:solidFill>
                   </a:tcPr>
                 </a:tc>
+                <a:extLst>
+                  <a:ext uri="{0D108BD9-81ED-4DB2-BD59-A6C34878D82A}">
+                    <a16:rowId xmlns:a16="http://schemas.microsoft.com/office/drawing/2014/main" val="10001"/>
+                  </a:ext>
+                </a:extLst>
               </a:tr>
               <a:tr h="457200">
                 <a:tc>
                   <a:txBody>
-                    <a:bodyPr wrap="square"/>
+                    <a:bodyPr/>
                     <a:lstStyle/>
                     <a:p>
                       <a:pPr algn="l"/>
@@ -15346,7 +16687,7 @@
                       </a:r>
                     </a:p>
                   </a:txBody>
-                  <a:tcPr marL="73152" marR="73152" marT="45720" marB="45720" anchor="ctr">
+                  <a:tcPr marL="73152" marR="73152" anchor="ctr">
                     <a:solidFill>
                       <a:srgbClr val="F1F3F6"/>
                     </a:solidFill>
@@ -15354,7 +16695,7 @@
                 </a:tc>
                 <a:tc>
                   <a:txBody>
-                    <a:bodyPr wrap="square"/>
+                    <a:bodyPr/>
                     <a:lstStyle/>
                     <a:p>
                       <a:pPr algn="l"/>
@@ -15369,7 +16710,7 @@
                       </a:r>
                     </a:p>
                   </a:txBody>
-                  <a:tcPr marL="73152" marR="73152" marT="45720" marB="45720" anchor="ctr">
+                  <a:tcPr marL="73152" marR="73152" anchor="ctr">
                     <a:solidFill>
                       <a:srgbClr val="F1F3F6"/>
                     </a:solidFill>
@@ -15377,7 +16718,7 @@
                 </a:tc>
                 <a:tc>
                   <a:txBody>
-                    <a:bodyPr wrap="square"/>
+                    <a:bodyPr/>
                     <a:lstStyle/>
                     <a:p>
                       <a:pPr algn="l"/>
@@ -15401,17 +16742,22 @@
                       </a:r>
                     </a:p>
                   </a:txBody>
-                  <a:tcPr marL="73152" marR="73152" marT="45720" marB="45720" anchor="ctr">
+                  <a:tcPr marL="73152" marR="73152" anchor="ctr">
                     <a:solidFill>
                       <a:srgbClr val="F1F3F6"/>
                     </a:solidFill>
                   </a:tcPr>
                 </a:tc>
+                <a:extLst>
+                  <a:ext uri="{0D108BD9-81ED-4DB2-BD59-A6C34878D82A}">
+                    <a16:rowId xmlns:a16="http://schemas.microsoft.com/office/drawing/2014/main" val="10002"/>
+                  </a:ext>
+                </a:extLst>
               </a:tr>
               <a:tr h="457200">
                 <a:tc>
                   <a:txBody>
-                    <a:bodyPr wrap="square"/>
+                    <a:bodyPr/>
                     <a:lstStyle/>
                     <a:p>
                       <a:pPr algn="l"/>
@@ -15426,7 +16772,7 @@
                       </a:r>
                     </a:p>
                   </a:txBody>
-                  <a:tcPr marL="73152" marR="73152" marT="45720" marB="45720" anchor="ctr">
+                  <a:tcPr marL="73152" marR="73152" anchor="ctr">
                     <a:solidFill>
                       <a:srgbClr val="FFFFFF"/>
                     </a:solidFill>
@@ -15434,7 +16780,7 @@
                 </a:tc>
                 <a:tc>
                   <a:txBody>
-                    <a:bodyPr wrap="square"/>
+                    <a:bodyPr/>
                     <a:lstStyle/>
                     <a:p>
                       <a:pPr algn="l"/>
@@ -15449,7 +16795,7 @@
                       </a:r>
                     </a:p>
                   </a:txBody>
-                  <a:tcPr marL="73152" marR="73152" marT="45720" marB="45720" anchor="ctr">
+                  <a:tcPr marL="73152" marR="73152" anchor="ctr">
                     <a:solidFill>
                       <a:srgbClr val="FFFFFF"/>
                     </a:solidFill>
@@ -15457,7 +16803,7 @@
                 </a:tc>
                 <a:tc>
                   <a:txBody>
-                    <a:bodyPr wrap="square"/>
+                    <a:bodyPr/>
                     <a:lstStyle/>
                     <a:p>
                       <a:pPr algn="l"/>
@@ -15481,12 +16827,17 @@
                       </a:r>
                     </a:p>
                   </a:txBody>
-                  <a:tcPr marL="73152" marR="73152" marT="45720" marB="45720" anchor="ctr">
+                  <a:tcPr marL="73152" marR="73152" anchor="ctr">
                     <a:solidFill>
                       <a:srgbClr val="FFFFFF"/>
                     </a:solidFill>
                   </a:tcPr>
                 </a:tc>
+                <a:extLst>
+                  <a:ext uri="{0D108BD9-81ED-4DB2-BD59-A6C34878D82A}">
+                    <a16:rowId xmlns:a16="http://schemas.microsoft.com/office/drawing/2014/main" val="10003"/>
+                  </a:ext>
+                </a:extLst>
               </a:tr>
             </a:tbl>
           </a:graphicData>
@@ -15509,7 +16860,7 @@
           <a:noFill/>
         </p:spPr>
         <p:txBody>
-          <a:bodyPr wrap="square" lIns="0" rIns="0" tIns="0" bIns="0" anchor="t">
+          <a:bodyPr wrap="square" lIns="0" tIns="0" rIns="0" bIns="0" anchor="t">
             <a:spAutoFit/>
           </a:bodyPr>
           <a:lstStyle/>
@@ -15536,7 +16887,7 @@
         <p:spPr>
           <a:xfrm>
             <a:off x="548640" y="3931920"/>
-            <a:ext cx="11430000" cy="365760"/>
+            <a:ext cx="11430000" cy="215444"/>
           </a:xfrm>
           <a:prstGeom prst="rect">
             <a:avLst/>
@@ -15544,30 +16895,36 @@
           <a:noFill/>
         </p:spPr>
         <p:txBody>
-          <a:bodyPr wrap="square" lIns="0" rIns="0" tIns="0" bIns="0" anchor="t">
+          <a:bodyPr wrap="square" lIns="0" tIns="0" rIns="0" bIns="0" anchor="t">
             <a:spAutoFit/>
           </a:bodyPr>
           <a:lstStyle/>
           <a:p>
             <a:pPr algn="l"/>
             <a:r>
-              <a:rPr sz="1400" b="0">
+              <a:rPr sz="1400" b="0" dirty="0" err="1">
                 <a:solidFill>
                   <a:srgbClr val="A0A8B8"/>
                 </a:solidFill>
                 <a:latin typeface="PingFang TC"/>
               </a:rPr>
-              <a:t>三家架構與元件介紹見後續 Slide 7-9；</a:t>
-            </a:r>
-            <a:r>
-              <a:rPr sz="1400" b="0">
-                <a:solidFill>
-                  <a:srgbClr val="B03A14"/>
-                </a:solidFill>
-                <a:latin typeface="PingFang TC"/>
-              </a:rPr>
-              <a:t>各節點較重損耗待 W=128 baseline 補</a:t>
-            </a:r>
+              <a:t>三家架構與元件介紹見後續</a:t>
+            </a:r>
+            <a:r>
+              <a:rPr sz="1400" b="0" dirty="0">
+                <a:solidFill>
+                  <a:srgbClr val="A0A8B8"/>
+                </a:solidFill>
+                <a:latin typeface="PingFang TC"/>
+              </a:rPr>
+              <a:t> Slide 7-9</a:t>
+            </a:r>
+            <a:endParaRPr sz="1400" b="0" dirty="0">
+              <a:solidFill>
+                <a:srgbClr val="B03A14"/>
+              </a:solidFill>
+              <a:latin typeface="PingFang TC"/>
+            </a:endParaRPr>
           </a:p>
         </p:txBody>
       </p:sp>
@@ -15590,14 +16947,32 @@
                 <a:tableStyleId>{5C22544A-7EE6-4342-B048-85BDC9FD1C3A}</a:tableStyleId>
               </a:tblPr>
               <a:tblGrid>
-                <a:gridCol w="2133600"/>
-                <a:gridCol w="2133600"/>
-                <a:gridCol w="2133600"/>
+                <a:gridCol w="2133600">
+                  <a:extLst>
+                    <a:ext uri="{9D8B030D-6E8A-4147-A177-3AD203B41FA5}">
+                      <a16:colId xmlns:a16="http://schemas.microsoft.com/office/drawing/2014/main" val="20000"/>
+                    </a:ext>
+                  </a:extLst>
+                </a:gridCol>
+                <a:gridCol w="2133600">
+                  <a:extLst>
+                    <a:ext uri="{9D8B030D-6E8A-4147-A177-3AD203B41FA5}">
+                      <a16:colId xmlns:a16="http://schemas.microsoft.com/office/drawing/2014/main" val="20001"/>
+                    </a:ext>
+                  </a:extLst>
+                </a:gridCol>
+                <a:gridCol w="2133600">
+                  <a:extLst>
+                    <a:ext uri="{9D8B030D-6E8A-4147-A177-3AD203B41FA5}">
+                      <a16:colId xmlns:a16="http://schemas.microsoft.com/office/drawing/2014/main" val="20002"/>
+                    </a:ext>
+                  </a:extLst>
+                </a:gridCol>
               </a:tblGrid>
               <a:tr h="548640">
                 <a:tc>
                   <a:txBody>
-                    <a:bodyPr wrap="square"/>
+                    <a:bodyPr/>
                     <a:lstStyle/>
                     <a:p>
                       <a:pPr algn="ctr"/>
@@ -15612,7 +16987,7 @@
                       </a:r>
                     </a:p>
                   </a:txBody>
-                  <a:tcPr marL="73152" marR="73152" marT="45720" marB="45720" anchor="ctr">
+                  <a:tcPr marL="73152" marR="73152" anchor="ctr">
                     <a:solidFill>
                       <a:srgbClr val="D8DDE6"/>
                     </a:solidFill>
@@ -15620,7 +16995,7 @@
                 </a:tc>
                 <a:tc>
                   <a:txBody>
-                    <a:bodyPr wrap="square"/>
+                    <a:bodyPr/>
                     <a:lstStyle/>
                     <a:p>
                       <a:pPr algn="ctr"/>
@@ -15635,7 +17010,7 @@
                       </a:r>
                     </a:p>
                   </a:txBody>
-                  <a:tcPr marL="73152" marR="73152" marT="45720" marB="45720" anchor="ctr">
+                  <a:tcPr marL="73152" marR="73152" anchor="ctr">
                     <a:solidFill>
                       <a:srgbClr val="D8DDE6"/>
                     </a:solidFill>
@@ -15643,7 +17018,7 @@
                 </a:tc>
                 <a:tc>
                   <a:txBody>
-                    <a:bodyPr wrap="square"/>
+                    <a:bodyPr/>
                     <a:lstStyle/>
                     <a:p>
                       <a:pPr algn="ctr"/>
@@ -15658,17 +17033,22 @@
                       </a:r>
                     </a:p>
                   </a:txBody>
-                  <a:tcPr marL="73152" marR="73152" marT="45720" marB="45720" anchor="ctr">
+                  <a:tcPr marL="73152" marR="73152" anchor="ctr">
                     <a:solidFill>
                       <a:srgbClr val="D8DDE6"/>
                     </a:solidFill>
                   </a:tcPr>
                 </a:tc>
+                <a:extLst>
+                  <a:ext uri="{0D108BD9-81ED-4DB2-BD59-A6C34878D82A}">
+                    <a16:rowId xmlns:a16="http://schemas.microsoft.com/office/drawing/2014/main" val="10000"/>
+                  </a:ext>
+                </a:extLst>
               </a:tr>
               <a:tr h="548640">
                 <a:tc>
                   <a:txBody>
-                    <a:bodyPr wrap="square"/>
+                    <a:bodyPr/>
                     <a:lstStyle/>
                     <a:p>
                       <a:pPr algn="l"/>
@@ -15683,7 +17063,7 @@
                       </a:r>
                     </a:p>
                   </a:txBody>
-                  <a:tcPr marL="73152" marR="73152" marT="45720" marB="45720" anchor="ctr">
+                  <a:tcPr marL="73152" marR="73152" anchor="ctr">
                     <a:solidFill>
                       <a:srgbClr val="FFFFFF"/>
                     </a:solidFill>
@@ -15691,7 +17071,7 @@
                 </a:tc>
                 <a:tc>
                   <a:txBody>
-                    <a:bodyPr wrap="square"/>
+                    <a:bodyPr/>
                     <a:lstStyle/>
                     <a:p>
                       <a:pPr algn="l"/>
@@ -15706,7 +17086,7 @@
                       </a:r>
                     </a:p>
                   </a:txBody>
-                  <a:tcPr marL="73152" marR="73152" marT="45720" marB="45720" anchor="ctr">
+                  <a:tcPr marL="73152" marR="73152" anchor="ctr">
                     <a:solidFill>
                       <a:srgbClr val="FFFFFF"/>
                     </a:solidFill>
@@ -15714,7 +17094,7 @@
                 </a:tc>
                 <a:tc>
                   <a:txBody>
-                    <a:bodyPr wrap="square"/>
+                    <a:bodyPr/>
                     <a:lstStyle/>
                     <a:p>
                       <a:pPr algn="l"/>
@@ -15729,12 +17109,17 @@
                       </a:r>
                     </a:p>
                   </a:txBody>
-                  <a:tcPr marL="73152" marR="73152" marT="45720" marB="45720" anchor="ctr">
+                  <a:tcPr marL="73152" marR="73152" anchor="ctr">
                     <a:solidFill>
                       <a:srgbClr val="FFFFFF"/>
                     </a:solidFill>
                   </a:tcPr>
                 </a:tc>
+                <a:extLst>
+                  <a:ext uri="{0D108BD9-81ED-4DB2-BD59-A6C34878D82A}">
+                    <a16:rowId xmlns:a16="http://schemas.microsoft.com/office/drawing/2014/main" val="10001"/>
+                  </a:ext>
+                </a:extLst>
               </a:tr>
             </a:tbl>
           </a:graphicData>
@@ -15757,7 +17142,7 @@
           <a:noFill/>
         </p:spPr>
         <p:txBody>
-          <a:bodyPr wrap="square" lIns="0" rIns="0" tIns="0" bIns="0" anchor="t">
+          <a:bodyPr wrap="square" lIns="0" tIns="0" rIns="0" bIns="0" anchor="t">
             <a:spAutoFit/>
           </a:bodyPr>
           <a:lstStyle/>
@@ -15796,7 +17181,7 @@
 </file>
 
 <file path=ppt/slides/slide7.xml><?xml version="1.0" encoding="utf-8"?>
-<p:sld xmlns:a="http://schemas.openxmlformats.org/drawingml/2006/main" xmlns:p="http://schemas.openxmlformats.org/presentationml/2006/main" xmlns:r="http://schemas.openxmlformats.org/officeDocument/2006/relationships">
+<p:sld xmlns:a="http://schemas.openxmlformats.org/drawingml/2006/main" xmlns:r="http://schemas.openxmlformats.org/officeDocument/2006/relationships" xmlns:p="http://schemas.openxmlformats.org/presentationml/2006/main">
   <p:cSld>
     <p:bg>
       <p:bgPr>
@@ -15812,7 +17197,14 @@
         <p:cNvGrpSpPr/>
         <p:nvPr/>
       </p:nvGrpSpPr>
-      <p:grpSpPr/>
+      <p:grpSpPr>
+        <a:xfrm>
+          <a:off x="0" y="0"/>
+          <a:ext cx="0" cy="0"/>
+          <a:chOff x="0" y="0"/>
+          <a:chExt cx="0" cy="0"/>
+        </a:xfrm>
+      </p:grpSpPr>
       <p:sp>
         <p:nvSpPr>
           <p:cNvPr id="2" name="Rectangle 1"/>
@@ -15854,6 +17246,7 @@
           <a:lstStyle/>
           <a:p>
             <a:pPr algn="ctr"/>
+            <a:endParaRPr/>
           </a:p>
         </p:txBody>
       </p:sp>
@@ -15874,7 +17267,7 @@
           <a:noFill/>
         </p:spPr>
         <p:txBody>
-          <a:bodyPr wrap="square" lIns="0" rIns="0" tIns="0" bIns="0" anchor="t">
+          <a:bodyPr wrap="square" lIns="0" tIns="0" rIns="0" bIns="0" anchor="t">
             <a:spAutoFit/>
           </a:bodyPr>
           <a:lstStyle/>
@@ -15909,7 +17302,7 @@
           <a:noFill/>
         </p:spPr>
         <p:txBody>
-          <a:bodyPr wrap="square" lIns="0" rIns="0" tIns="0" bIns="0" anchor="t">
+          <a:bodyPr wrap="square" lIns="0" tIns="0" rIns="0" bIns="0" anchor="t">
             <a:spAutoFit/>
           </a:bodyPr>
           <a:lstStyle/>
@@ -15944,7 +17337,7 @@
           <a:noFill/>
         </p:spPr>
         <p:txBody>
-          <a:bodyPr wrap="square" lIns="0" rIns="0" tIns="0" bIns="0" anchor="t">
+          <a:bodyPr wrap="square" lIns="0" tIns="0" rIns="0" bIns="0" anchor="t">
             <a:spAutoFit/>
           </a:bodyPr>
           <a:lstStyle/>
@@ -15979,7 +17372,7 @@
           <a:noFill/>
         </p:spPr>
         <p:txBody>
-          <a:bodyPr wrap="square" lIns="0" rIns="0" tIns="0" bIns="0" anchor="t">
+          <a:bodyPr wrap="square" lIns="0" tIns="0" rIns="0" bIns="0" anchor="t">
             <a:spAutoFit/>
           </a:bodyPr>
           <a:lstStyle/>
@@ -16038,6 +17431,7 @@
           <a:lstStyle/>
           <a:p>
             <a:pPr algn="ctr"/>
+            <a:endParaRPr/>
           </a:p>
         </p:txBody>
       </p:sp>
@@ -16082,16 +17476,13 @@
           <a:noFill/>
         </p:spPr>
         <p:txBody>
-          <a:bodyPr wrap="square" lIns="0" rIns="0" tIns="0" bIns="0">
+          <a:bodyPr wrap="square" lIns="0" tIns="0" rIns="0" bIns="0">
             <a:spAutoFit/>
           </a:bodyPr>
           <a:lstStyle/>
           <a:p>
-            <a:pPr algn="l" indent="-228600" marL="228600">
+            <a:pPr marL="228600" indent="-228600" algn="l">
               <a:buChar char="•"/>
-              <a:buClr>
-                <a:srgbClr val="E74C3C"/>
-              </a:buClr>
             </a:pPr>
             <a:r>
               <a:rPr sz="1200" b="1">
@@ -16113,11 +17504,8 @@
             </a:r>
           </a:p>
           <a:p>
-            <a:pPr algn="l" indent="-228600" marL="228600">
+            <a:pPr marL="228600" indent="-228600" algn="l">
               <a:buChar char="•"/>
-              <a:buClr>
-                <a:srgbClr val="E74C3C"/>
-              </a:buClr>
             </a:pPr>
             <a:r>
               <a:rPr sz="1200" b="1">
@@ -16139,11 +17527,8 @@
             </a:r>
           </a:p>
           <a:p>
-            <a:pPr algn="l" indent="-228600" marL="228600">
+            <a:pPr marL="228600" indent="-228600" algn="l">
               <a:buChar char="•"/>
-              <a:buClr>
-                <a:srgbClr val="E74C3C"/>
-              </a:buClr>
             </a:pPr>
             <a:r>
               <a:rPr sz="1200" b="1">
@@ -16165,11 +17550,8 @@
             </a:r>
           </a:p>
           <a:p>
-            <a:pPr algn="l" indent="-228600" marL="228600">
+            <a:pPr marL="228600" indent="-228600" algn="l">
               <a:buChar char="•"/>
-              <a:buClr>
-                <a:srgbClr val="E74C3C"/>
-              </a:buClr>
             </a:pPr>
             <a:r>
               <a:rPr sz="1200" b="1">
@@ -16191,11 +17573,8 @@
             </a:r>
           </a:p>
           <a:p>
-            <a:pPr algn="l" indent="-228600" marL="228600">
+            <a:pPr marL="228600" indent="-228600" algn="l">
               <a:buChar char="•"/>
-              <a:buClr>
-                <a:srgbClr val="E74C3C"/>
-              </a:buClr>
             </a:pPr>
             <a:r>
               <a:rPr sz="1200" b="1">
@@ -16227,7 +17606,7 @@
 </file>
 
 <file path=ppt/slides/slide8.xml><?xml version="1.0" encoding="utf-8"?>
-<p:sld xmlns:a="http://schemas.openxmlformats.org/drawingml/2006/main" xmlns:p="http://schemas.openxmlformats.org/presentationml/2006/main" xmlns:r="http://schemas.openxmlformats.org/officeDocument/2006/relationships">
+<p:sld xmlns:a="http://schemas.openxmlformats.org/drawingml/2006/main" xmlns:r="http://schemas.openxmlformats.org/officeDocument/2006/relationships" xmlns:p="http://schemas.openxmlformats.org/presentationml/2006/main">
   <p:cSld>
     <p:bg>
       <p:bgPr>
@@ -16243,7 +17622,14 @@
         <p:cNvGrpSpPr/>
         <p:nvPr/>
       </p:nvGrpSpPr>
-      <p:grpSpPr/>
+      <p:grpSpPr>
+        <a:xfrm>
+          <a:off x="0" y="0"/>
+          <a:ext cx="0" cy="0"/>
+          <a:chOff x="0" y="0"/>
+          <a:chExt cx="0" cy="0"/>
+        </a:xfrm>
+      </p:grpSpPr>
       <p:sp>
         <p:nvSpPr>
           <p:cNvPr id="2" name="Rectangle 1"/>
@@ -16285,6 +17671,7 @@
           <a:lstStyle/>
           <a:p>
             <a:pPr algn="ctr"/>
+            <a:endParaRPr/>
           </a:p>
         </p:txBody>
       </p:sp>
@@ -16305,7 +17692,7 @@
           <a:noFill/>
         </p:spPr>
         <p:txBody>
-          <a:bodyPr wrap="square" lIns="0" rIns="0" tIns="0" bIns="0" anchor="t">
+          <a:bodyPr wrap="square" lIns="0" tIns="0" rIns="0" bIns="0" anchor="t">
             <a:spAutoFit/>
           </a:bodyPr>
           <a:lstStyle/>
@@ -16340,7 +17727,7 @@
           <a:noFill/>
         </p:spPr>
         <p:txBody>
-          <a:bodyPr wrap="square" lIns="0" rIns="0" tIns="0" bIns="0" anchor="t">
+          <a:bodyPr wrap="square" lIns="0" tIns="0" rIns="0" bIns="0" anchor="t">
             <a:spAutoFit/>
           </a:bodyPr>
           <a:lstStyle/>
@@ -16375,7 +17762,7 @@
           <a:noFill/>
         </p:spPr>
         <p:txBody>
-          <a:bodyPr wrap="square" lIns="0" rIns="0" tIns="0" bIns="0" anchor="t">
+          <a:bodyPr wrap="square" lIns="0" tIns="0" rIns="0" bIns="0" anchor="t">
             <a:spAutoFit/>
           </a:bodyPr>
           <a:lstStyle/>
@@ -16410,7 +17797,7 @@
           <a:noFill/>
         </p:spPr>
         <p:txBody>
-          <a:bodyPr wrap="square" lIns="0" rIns="0" tIns="0" bIns="0" anchor="t">
+          <a:bodyPr wrap="square" lIns="0" tIns="0" rIns="0" bIns="0" anchor="t">
             <a:spAutoFit/>
           </a:bodyPr>
           <a:lstStyle/>
@@ -16469,6 +17856,7 @@
           <a:lstStyle/>
           <a:p>
             <a:pPr algn="ctr"/>
+            <a:endParaRPr/>
           </a:p>
         </p:txBody>
       </p:sp>
@@ -16513,16 +17901,13 @@
           <a:noFill/>
         </p:spPr>
         <p:txBody>
-          <a:bodyPr wrap="square" lIns="0" rIns="0" tIns="0" bIns="0">
+          <a:bodyPr wrap="square" lIns="0" tIns="0" rIns="0" bIns="0">
             <a:spAutoFit/>
           </a:bodyPr>
           <a:lstStyle/>
           <a:p>
-            <a:pPr algn="l" indent="-228600" marL="228600">
+            <a:pPr marL="228600" indent="-228600" algn="l">
               <a:buChar char="•"/>
-              <a:buClr>
-                <a:srgbClr val="E74C3C"/>
-              </a:buClr>
             </a:pPr>
             <a:r>
               <a:rPr sz="1200" b="1">
@@ -16544,11 +17929,8 @@
             </a:r>
           </a:p>
           <a:p>
-            <a:pPr algn="l" indent="-228600" marL="228600">
+            <a:pPr marL="228600" indent="-228600" algn="l">
               <a:buChar char="•"/>
-              <a:buClr>
-                <a:srgbClr val="E74C3C"/>
-              </a:buClr>
             </a:pPr>
             <a:r>
               <a:rPr sz="1200" b="1">
@@ -16570,11 +17952,8 @@
             </a:r>
           </a:p>
           <a:p>
-            <a:pPr algn="l" indent="-228600" marL="228600">
+            <a:pPr marL="228600" indent="-228600" algn="l">
               <a:buChar char="•"/>
-              <a:buClr>
-                <a:srgbClr val="E74C3C"/>
-              </a:buClr>
             </a:pPr>
             <a:r>
               <a:rPr sz="1200" b="1">
@@ -16596,11 +17975,8 @@
             </a:r>
           </a:p>
           <a:p>
-            <a:pPr algn="l" indent="-228600" marL="228600">
+            <a:pPr marL="228600" indent="-228600" algn="l">
               <a:buChar char="•"/>
-              <a:buClr>
-                <a:srgbClr val="E74C3C"/>
-              </a:buClr>
             </a:pPr>
             <a:r>
               <a:rPr sz="1200" b="1">
@@ -16622,11 +17998,8 @@
             </a:r>
           </a:p>
           <a:p>
-            <a:pPr algn="l" indent="-228600" marL="228600">
+            <a:pPr marL="228600" indent="-228600" algn="l">
               <a:buChar char="•"/>
-              <a:buClr>
-                <a:srgbClr val="E74C3C"/>
-              </a:buClr>
             </a:pPr>
             <a:r>
               <a:rPr sz="1200" b="1">
@@ -16658,7 +18031,7 @@
 </file>
 
 <file path=ppt/slides/slide9.xml><?xml version="1.0" encoding="utf-8"?>
-<p:sld xmlns:a="http://schemas.openxmlformats.org/drawingml/2006/main" xmlns:p="http://schemas.openxmlformats.org/presentationml/2006/main" xmlns:r="http://schemas.openxmlformats.org/officeDocument/2006/relationships">
+<p:sld xmlns:a="http://schemas.openxmlformats.org/drawingml/2006/main" xmlns:r="http://schemas.openxmlformats.org/officeDocument/2006/relationships" xmlns:p="http://schemas.openxmlformats.org/presentationml/2006/main">
   <p:cSld>
     <p:bg>
       <p:bgPr>
@@ -16674,7 +18047,14 @@
         <p:cNvGrpSpPr/>
         <p:nvPr/>
       </p:nvGrpSpPr>
-      <p:grpSpPr/>
+      <p:grpSpPr>
+        <a:xfrm>
+          <a:off x="0" y="0"/>
+          <a:ext cx="0" cy="0"/>
+          <a:chOff x="0" y="0"/>
+          <a:chExt cx="0" cy="0"/>
+        </a:xfrm>
+      </p:grpSpPr>
       <p:sp>
         <p:nvSpPr>
           <p:cNvPr id="2" name="Rectangle 1"/>
@@ -16716,6 +18096,7 @@
           <a:lstStyle/>
           <a:p>
             <a:pPr algn="ctr"/>
+            <a:endParaRPr/>
           </a:p>
         </p:txBody>
       </p:sp>
@@ -16736,7 +18117,7 @@
           <a:noFill/>
         </p:spPr>
         <p:txBody>
-          <a:bodyPr wrap="square" lIns="0" rIns="0" tIns="0" bIns="0" anchor="t">
+          <a:bodyPr wrap="square" lIns="0" tIns="0" rIns="0" bIns="0" anchor="t">
             <a:spAutoFit/>
           </a:bodyPr>
           <a:lstStyle/>
@@ -16771,7 +18152,7 @@
           <a:noFill/>
         </p:spPr>
         <p:txBody>
-          <a:bodyPr wrap="square" lIns="0" rIns="0" tIns="0" bIns="0" anchor="t">
+          <a:bodyPr wrap="square" lIns="0" tIns="0" rIns="0" bIns="0" anchor="t">
             <a:spAutoFit/>
           </a:bodyPr>
           <a:lstStyle/>
@@ -16806,7 +18187,7 @@
           <a:noFill/>
         </p:spPr>
         <p:txBody>
-          <a:bodyPr wrap="square" lIns="0" rIns="0" tIns="0" bIns="0" anchor="t">
+          <a:bodyPr wrap="square" lIns="0" tIns="0" rIns="0" bIns="0" anchor="t">
             <a:spAutoFit/>
           </a:bodyPr>
           <a:lstStyle/>
@@ -16841,7 +18222,7 @@
           <a:noFill/>
         </p:spPr>
         <p:txBody>
-          <a:bodyPr wrap="square" lIns="0" rIns="0" tIns="0" bIns="0" anchor="t">
+          <a:bodyPr wrap="square" lIns="0" tIns="0" rIns="0" bIns="0" anchor="t">
             <a:spAutoFit/>
           </a:bodyPr>
           <a:lstStyle/>
@@ -16900,6 +18281,7 @@
           <a:lstStyle/>
           <a:p>
             <a:pPr algn="ctr"/>
+            <a:endParaRPr/>
           </a:p>
         </p:txBody>
       </p:sp>
@@ -16944,16 +18326,13 @@
           <a:noFill/>
         </p:spPr>
         <p:txBody>
-          <a:bodyPr wrap="square" lIns="0" rIns="0" tIns="0" bIns="0">
+          <a:bodyPr wrap="square" lIns="0" tIns="0" rIns="0" bIns="0">
             <a:spAutoFit/>
           </a:bodyPr>
           <a:lstStyle/>
           <a:p>
-            <a:pPr algn="l" indent="-228600" marL="228600">
+            <a:pPr marL="228600" indent="-228600" algn="l">
               <a:buChar char="•"/>
-              <a:buClr>
-                <a:srgbClr val="E74C3C"/>
-              </a:buClr>
             </a:pPr>
             <a:r>
               <a:rPr sz="1200" b="1">
@@ -16975,11 +18354,8 @@
             </a:r>
           </a:p>
           <a:p>
-            <a:pPr algn="l" indent="-228600" marL="228600">
+            <a:pPr marL="228600" indent="-228600" algn="l">
               <a:buChar char="•"/>
-              <a:buClr>
-                <a:srgbClr val="E74C3C"/>
-              </a:buClr>
             </a:pPr>
             <a:r>
               <a:rPr sz="1200" b="1">
@@ -17001,11 +18377,8 @@
             </a:r>
           </a:p>
           <a:p>
-            <a:pPr algn="l" indent="-228600" marL="228600">
+            <a:pPr marL="228600" indent="-228600" algn="l">
               <a:buChar char="•"/>
-              <a:buClr>
-                <a:srgbClr val="E74C3C"/>
-              </a:buClr>
             </a:pPr>
             <a:r>
               <a:rPr sz="1200" b="1">
@@ -17027,11 +18400,8 @@
             </a:r>
           </a:p>
           <a:p>
-            <a:pPr algn="l" indent="-228600" marL="228600">
+            <a:pPr marL="228600" indent="-228600" algn="l">
               <a:buChar char="•"/>
-              <a:buClr>
-                <a:srgbClr val="E74C3C"/>
-              </a:buClr>
             </a:pPr>
             <a:r>
               <a:rPr sz="1200" b="1">
@@ -17053,11 +18423,8 @@
             </a:r>
           </a:p>
           <a:p>
-            <a:pPr algn="l" indent="-228600" marL="228600">
+            <a:pPr marL="228600" indent="-228600" algn="l">
               <a:buChar char="•"/>
-              <a:buClr>
-                <a:srgbClr val="E74C3C"/>
-              </a:buClr>
             </a:pPr>
             <a:r>
               <a:rPr sz="1200" b="1">
